--- a/Day 5 - Supervised finetuning and building a chat bot/sft.pptx
+++ b/Day 5 - Supervised finetuning and building a chat bot/sft.pptx
@@ -7,11 +7,12 @@
   <p:sldIdLst>
     <p:sldId id="257" r:id="rId2"/>
     <p:sldId id="258" r:id="rId3"/>
-    <p:sldId id="259" r:id="rId4"/>
-    <p:sldId id="260" r:id="rId5"/>
-    <p:sldId id="261" r:id="rId6"/>
-    <p:sldId id="262" r:id="rId7"/>
-    <p:sldId id="263" r:id="rId8"/>
+    <p:sldId id="264" r:id="rId4"/>
+    <p:sldId id="259" r:id="rId5"/>
+    <p:sldId id="260" r:id="rId6"/>
+    <p:sldId id="261" r:id="rId7"/>
+    <p:sldId id="262" r:id="rId8"/>
+    <p:sldId id="263" r:id="rId9"/>
   </p:sldIdLst>
   <p:sldSz cx="12192000" cy="6858000"/>
   <p:notesSz cx="6858000" cy="9144000"/>
@@ -110,6 +111,11 @@
       </a:defRPr>
     </a:lvl9pPr>
   </p:defaultTextStyle>
+  <p:extLst>
+    <p:ext uri="{EFAFB233-063F-42B5-8137-9DF3F51BA10A}">
+      <p15:sldGuideLst xmlns:p15="http://schemas.microsoft.com/office/powerpoint/2012/main"/>
+    </p:ext>
+  </p:extLst>
 </p:presentation>
 </file>
 
@@ -262,7 +268,7 @@
           <a:p>
             <a:fld id="{6BB8072E-5ACB-2A49-A29A-DFEF9F841A52}" type="datetimeFigureOut">
               <a:rPr lang="en-LK" smtClean="0"/>
-              <a:t>2026-04-30</a:t>
+              <a:t>2026-05-08</a:t>
             </a:fld>
             <a:endParaRPr lang="en-LK"/>
           </a:p>
@@ -462,7 +468,7 @@
           <a:p>
             <a:fld id="{6BB8072E-5ACB-2A49-A29A-DFEF9F841A52}" type="datetimeFigureOut">
               <a:rPr lang="en-LK" smtClean="0"/>
-              <a:t>2026-04-30</a:t>
+              <a:t>2026-05-08</a:t>
             </a:fld>
             <a:endParaRPr lang="en-LK"/>
           </a:p>
@@ -672,7 +678,7 @@
           <a:p>
             <a:fld id="{6BB8072E-5ACB-2A49-A29A-DFEF9F841A52}" type="datetimeFigureOut">
               <a:rPr lang="en-LK" smtClean="0"/>
-              <a:t>2026-04-30</a:t>
+              <a:t>2026-05-08</a:t>
             </a:fld>
             <a:endParaRPr lang="en-LK"/>
           </a:p>
@@ -872,7 +878,7 @@
           <a:p>
             <a:fld id="{6BB8072E-5ACB-2A49-A29A-DFEF9F841A52}" type="datetimeFigureOut">
               <a:rPr lang="en-LK" smtClean="0"/>
-              <a:t>2026-04-30</a:t>
+              <a:t>2026-05-08</a:t>
             </a:fld>
             <a:endParaRPr lang="en-LK"/>
           </a:p>
@@ -1148,7 +1154,7 @@
           <a:p>
             <a:fld id="{6BB8072E-5ACB-2A49-A29A-DFEF9F841A52}" type="datetimeFigureOut">
               <a:rPr lang="en-LK" smtClean="0"/>
-              <a:t>2026-04-30</a:t>
+              <a:t>2026-05-08</a:t>
             </a:fld>
             <a:endParaRPr lang="en-LK"/>
           </a:p>
@@ -1416,7 +1422,7 @@
           <a:p>
             <a:fld id="{6BB8072E-5ACB-2A49-A29A-DFEF9F841A52}" type="datetimeFigureOut">
               <a:rPr lang="en-LK" smtClean="0"/>
-              <a:t>2026-04-30</a:t>
+              <a:t>2026-05-08</a:t>
             </a:fld>
             <a:endParaRPr lang="en-LK"/>
           </a:p>
@@ -1831,7 +1837,7 @@
           <a:p>
             <a:fld id="{6BB8072E-5ACB-2A49-A29A-DFEF9F841A52}" type="datetimeFigureOut">
               <a:rPr lang="en-LK" smtClean="0"/>
-              <a:t>2026-04-30</a:t>
+              <a:t>2026-05-08</a:t>
             </a:fld>
             <a:endParaRPr lang="en-LK"/>
           </a:p>
@@ -1973,7 +1979,7 @@
           <a:p>
             <a:fld id="{6BB8072E-5ACB-2A49-A29A-DFEF9F841A52}" type="datetimeFigureOut">
               <a:rPr lang="en-LK" smtClean="0"/>
-              <a:t>2026-04-30</a:t>
+              <a:t>2026-05-08</a:t>
             </a:fld>
             <a:endParaRPr lang="en-LK"/>
           </a:p>
@@ -2086,7 +2092,7 @@
           <a:p>
             <a:fld id="{6BB8072E-5ACB-2A49-A29A-DFEF9F841A52}" type="datetimeFigureOut">
               <a:rPr lang="en-LK" smtClean="0"/>
-              <a:t>2026-04-30</a:t>
+              <a:t>2026-05-08</a:t>
             </a:fld>
             <a:endParaRPr lang="en-LK"/>
           </a:p>
@@ -2399,7 +2405,7 @@
           <a:p>
             <a:fld id="{6BB8072E-5ACB-2A49-A29A-DFEF9F841A52}" type="datetimeFigureOut">
               <a:rPr lang="en-LK" smtClean="0"/>
-              <a:t>2026-04-30</a:t>
+              <a:t>2026-05-08</a:t>
             </a:fld>
             <a:endParaRPr lang="en-LK"/>
           </a:p>
@@ -2688,7 +2694,7 @@
           <a:p>
             <a:fld id="{6BB8072E-5ACB-2A49-A29A-DFEF9F841A52}" type="datetimeFigureOut">
               <a:rPr lang="en-LK" smtClean="0"/>
-              <a:t>2026-04-30</a:t>
+              <a:t>2026-05-08</a:t>
             </a:fld>
             <a:endParaRPr lang="en-LK"/>
           </a:p>
@@ -2931,7 +2937,7 @@
           <a:p>
             <a:fld id="{6BB8072E-5ACB-2A49-A29A-DFEF9F841A52}" type="datetimeFigureOut">
               <a:rPr lang="en-LK" smtClean="0"/>
-              <a:t>2026-04-30</a:t>
+              <a:t>2026-05-08</a:t>
             </a:fld>
             <a:endParaRPr lang="en-LK"/>
           </a:p>
@@ -3742,7 +3748,7 @@
           <p:cNvPr id="5" name="TextBox 4">
             <a:extLst>
               <a:ext uri="{FF2B5EF4-FFF2-40B4-BE49-F238E27FC236}">
-                <a16:creationId xmlns:a16="http://schemas.microsoft.com/office/drawing/2014/main" id="{6DC971D7-6B19-BDAA-C1B2-9AF9FA1FD74C}"/>
+                <a16:creationId xmlns:a16="http://schemas.microsoft.com/office/drawing/2014/main" id="{71D67B28-5576-AA61-67CE-9F181054D28C}"/>
               </a:ext>
             </a:extLst>
           </p:cNvPr>
@@ -3751,8 +3757,8 @@
         </p:nvSpPr>
         <p:spPr>
           <a:xfrm>
-            <a:off x="518531" y="88540"/>
-            <a:ext cx="6099716" cy="369332"/>
+            <a:off x="3417848" y="-99726"/>
+            <a:ext cx="9662531" cy="7325082"/>
           </a:xfrm>
           <a:prstGeom prst="rect">
             <a:avLst/>
@@ -3768,22 +3774,1887 @@
             <a:pPr>
               <a:buNone/>
             </a:pPr>
-            <a:r>
-              <a:rPr lang="en-GB" b="1" dirty="0" err="1">
-                <a:latin typeface="Courier New" panose="02070309020205020404" pitchFamily="49" charset="0"/>
-              </a:rPr>
-              <a:t>sft.py</a:t>
-            </a:r>
-            <a:endParaRPr lang="en-GB" b="1" dirty="0"/>
-          </a:p>
-        </p:txBody>
-      </p:sp>
-      <p:sp>
-        <p:nvSpPr>
-          <p:cNvPr id="11" name="TextBox 10">
-            <a:extLst>
-              <a:ext uri="{FF2B5EF4-FFF2-40B4-BE49-F238E27FC236}">
-                <a16:creationId xmlns:a16="http://schemas.microsoft.com/office/drawing/2014/main" id="{C0EACF66-B793-7AD0-0119-A03B5969B876}"/>
+            <a:br>
+              <a:rPr lang="en-GB" sz="1000" dirty="0">
+                <a:solidFill>
+                  <a:srgbClr val="BCBEC4"/>
+                </a:solidFill>
+                <a:effectLst/>
+                <a:latin typeface="JetBrains Mono"/>
+              </a:rPr>
+            </a:br>
+            <a:r>
+              <a:rPr lang="en-GB" sz="1000" dirty="0">
+                <a:solidFill>
+                  <a:srgbClr val="CF8E6D"/>
+                </a:solidFill>
+                <a:effectLst/>
+                <a:latin typeface="JetBrains Mono"/>
+              </a:rPr>
+              <a:t>import </a:t>
+            </a:r>
+            <a:r>
+              <a:rPr lang="en-GB" sz="1000" dirty="0" err="1">
+                <a:solidFill>
+                  <a:srgbClr val="BCBEC4"/>
+                </a:solidFill>
+                <a:effectLst/>
+                <a:latin typeface="JetBrains Mono"/>
+              </a:rPr>
+              <a:t>json</a:t>
+            </a:r>
+            <a:br>
+              <a:rPr lang="en-GB" sz="1000" dirty="0">
+                <a:solidFill>
+                  <a:srgbClr val="BCBEC4"/>
+                </a:solidFill>
+                <a:effectLst/>
+                <a:latin typeface="JetBrains Mono"/>
+              </a:rPr>
+            </a:br>
+            <a:r>
+              <a:rPr lang="en-GB" sz="1000" dirty="0">
+                <a:solidFill>
+                  <a:srgbClr val="BCBEC4"/>
+                </a:solidFill>
+                <a:effectLst/>
+                <a:latin typeface="JetBrains Mono"/>
+              </a:rPr>
+              <a:t>data = []</a:t>
+            </a:r>
+            <a:br>
+              <a:rPr lang="en-GB" sz="1000" dirty="0">
+                <a:solidFill>
+                  <a:srgbClr val="BCBEC4"/>
+                </a:solidFill>
+                <a:effectLst/>
+                <a:latin typeface="JetBrains Mono"/>
+              </a:rPr>
+            </a:br>
+            <a:r>
+              <a:rPr lang="en-GB" sz="1000" dirty="0">
+                <a:solidFill>
+                  <a:srgbClr val="CF8E6D"/>
+                </a:solidFill>
+                <a:effectLst/>
+                <a:latin typeface="JetBrains Mono"/>
+              </a:rPr>
+              <a:t>from </a:t>
+            </a:r>
+            <a:r>
+              <a:rPr lang="en-GB" sz="1000" dirty="0">
+                <a:solidFill>
+                  <a:srgbClr val="BCBEC4"/>
+                </a:solidFill>
+                <a:effectLst/>
+                <a:latin typeface="JetBrains Mono"/>
+              </a:rPr>
+              <a:t>tokenizer </a:t>
+            </a:r>
+            <a:r>
+              <a:rPr lang="en-GB" sz="1000" dirty="0">
+                <a:solidFill>
+                  <a:srgbClr val="CF8E6D"/>
+                </a:solidFill>
+                <a:effectLst/>
+                <a:latin typeface="JetBrains Mono"/>
+              </a:rPr>
+              <a:t>import </a:t>
+            </a:r>
+            <a:r>
+              <a:rPr lang="en-GB" sz="1000" dirty="0">
+                <a:solidFill>
+                  <a:srgbClr val="BCBEC4"/>
+                </a:solidFill>
+                <a:effectLst/>
+                <a:latin typeface="JetBrains Mono"/>
+              </a:rPr>
+              <a:t>Tokenizer</a:t>
+            </a:r>
+            <a:br>
+              <a:rPr lang="en-GB" sz="1000" dirty="0">
+                <a:solidFill>
+                  <a:srgbClr val="BCBEC4"/>
+                </a:solidFill>
+                <a:effectLst/>
+                <a:latin typeface="JetBrains Mono"/>
+              </a:rPr>
+            </a:br>
+            <a:r>
+              <a:rPr lang="en-GB" sz="1000" dirty="0">
+                <a:solidFill>
+                  <a:srgbClr val="BCBEC4"/>
+                </a:solidFill>
+                <a:effectLst/>
+                <a:latin typeface="JetBrains Mono"/>
+              </a:rPr>
+              <a:t>tokenizer = Tokenizer()</a:t>
+            </a:r>
+            <a:br>
+              <a:rPr lang="en-GB" sz="1000" dirty="0">
+                <a:solidFill>
+                  <a:srgbClr val="BCBEC4"/>
+                </a:solidFill>
+                <a:effectLst/>
+                <a:latin typeface="JetBrains Mono"/>
+              </a:rPr>
+            </a:br>
+            <a:br>
+              <a:rPr lang="en-GB" sz="1000" dirty="0">
+                <a:solidFill>
+                  <a:srgbClr val="BCBEC4"/>
+                </a:solidFill>
+                <a:effectLst/>
+                <a:latin typeface="JetBrains Mono"/>
+              </a:rPr>
+            </a:br>
+            <a:r>
+              <a:rPr lang="en-GB" sz="1000" dirty="0">
+                <a:solidFill>
+                  <a:srgbClr val="CF8E6D"/>
+                </a:solidFill>
+                <a:effectLst/>
+                <a:latin typeface="JetBrains Mono"/>
+              </a:rPr>
+              <a:t>with </a:t>
+            </a:r>
+            <a:r>
+              <a:rPr lang="en-GB" sz="1000" dirty="0">
+                <a:solidFill>
+                  <a:srgbClr val="8888C6"/>
+                </a:solidFill>
+                <a:effectLst/>
+                <a:latin typeface="JetBrains Mono"/>
+              </a:rPr>
+              <a:t>open</a:t>
+            </a:r>
+            <a:r>
+              <a:rPr lang="en-GB" sz="1000" dirty="0">
+                <a:solidFill>
+                  <a:srgbClr val="BCBEC4"/>
+                </a:solidFill>
+                <a:effectLst/>
+                <a:latin typeface="JetBrains Mono"/>
+              </a:rPr>
+              <a:t>(</a:t>
+            </a:r>
+            <a:r>
+              <a:rPr lang="en-GB" sz="1000" dirty="0">
+                <a:solidFill>
+                  <a:srgbClr val="6AAB73"/>
+                </a:solidFill>
+                <a:effectLst/>
+                <a:latin typeface="JetBrains Mono"/>
+              </a:rPr>
+              <a:t>'</a:t>
+            </a:r>
+            <a:r>
+              <a:rPr lang="en-GB" sz="1000" dirty="0" err="1">
+                <a:solidFill>
+                  <a:srgbClr val="6AAB73"/>
+                </a:solidFill>
+                <a:effectLst/>
+                <a:latin typeface="JetBrains Mono"/>
+              </a:rPr>
+              <a:t>sft_data.jsonl</a:t>
+            </a:r>
+            <a:r>
+              <a:rPr lang="en-GB" sz="1000" dirty="0">
+                <a:solidFill>
+                  <a:srgbClr val="6AAB73"/>
+                </a:solidFill>
+                <a:effectLst/>
+                <a:latin typeface="JetBrains Mono"/>
+              </a:rPr>
+              <a:t>'</a:t>
+            </a:r>
+            <a:r>
+              <a:rPr lang="en-GB" sz="1000" dirty="0">
+                <a:solidFill>
+                  <a:srgbClr val="BCBEC4"/>
+                </a:solidFill>
+                <a:effectLst/>
+                <a:latin typeface="JetBrains Mono"/>
+              </a:rPr>
+              <a:t>, </a:t>
+            </a:r>
+            <a:r>
+              <a:rPr lang="en-GB" sz="1000" dirty="0">
+                <a:solidFill>
+                  <a:srgbClr val="6AAB73"/>
+                </a:solidFill>
+                <a:effectLst/>
+                <a:latin typeface="JetBrains Mono"/>
+              </a:rPr>
+              <a:t>"r"</a:t>
+            </a:r>
+            <a:r>
+              <a:rPr lang="en-GB" sz="1000" dirty="0">
+                <a:solidFill>
+                  <a:srgbClr val="BCBEC4"/>
+                </a:solidFill>
+                <a:effectLst/>
+                <a:latin typeface="JetBrains Mono"/>
+              </a:rPr>
+              <a:t>) </a:t>
+            </a:r>
+            <a:r>
+              <a:rPr lang="en-GB" sz="1000" dirty="0">
+                <a:solidFill>
+                  <a:srgbClr val="CF8E6D"/>
+                </a:solidFill>
+                <a:effectLst/>
+                <a:latin typeface="JetBrains Mono"/>
+              </a:rPr>
+              <a:t>as </a:t>
+            </a:r>
+            <a:r>
+              <a:rPr lang="en-GB" sz="1000" dirty="0">
+                <a:solidFill>
+                  <a:srgbClr val="BCBEC4"/>
+                </a:solidFill>
+                <a:effectLst/>
+                <a:latin typeface="JetBrains Mono"/>
+              </a:rPr>
+              <a:t>f:</a:t>
+            </a:r>
+            <a:br>
+              <a:rPr lang="en-GB" sz="1000" dirty="0">
+                <a:solidFill>
+                  <a:srgbClr val="BCBEC4"/>
+                </a:solidFill>
+                <a:effectLst/>
+                <a:latin typeface="JetBrains Mono"/>
+              </a:rPr>
+            </a:br>
+            <a:r>
+              <a:rPr lang="en-GB" sz="1000" dirty="0">
+                <a:solidFill>
+                  <a:srgbClr val="BCBEC4"/>
+                </a:solidFill>
+                <a:effectLst/>
+                <a:latin typeface="JetBrains Mono"/>
+              </a:rPr>
+              <a:t>    </a:t>
+            </a:r>
+            <a:r>
+              <a:rPr lang="en-GB" sz="1000" dirty="0">
+                <a:solidFill>
+                  <a:srgbClr val="CF8E6D"/>
+                </a:solidFill>
+                <a:effectLst/>
+                <a:latin typeface="JetBrains Mono"/>
+              </a:rPr>
+              <a:t>for </a:t>
+            </a:r>
+            <a:r>
+              <a:rPr lang="en-GB" sz="1000" dirty="0">
+                <a:solidFill>
+                  <a:srgbClr val="BCBEC4"/>
+                </a:solidFill>
+                <a:effectLst/>
+                <a:latin typeface="JetBrains Mono"/>
+              </a:rPr>
+              <a:t>line </a:t>
+            </a:r>
+            <a:r>
+              <a:rPr lang="en-GB" sz="1000" dirty="0">
+                <a:solidFill>
+                  <a:srgbClr val="CF8E6D"/>
+                </a:solidFill>
+                <a:effectLst/>
+                <a:latin typeface="JetBrains Mono"/>
+              </a:rPr>
+              <a:t>in </a:t>
+            </a:r>
+            <a:r>
+              <a:rPr lang="en-GB" sz="1000" dirty="0">
+                <a:solidFill>
+                  <a:srgbClr val="BCBEC4"/>
+                </a:solidFill>
+                <a:effectLst/>
+                <a:latin typeface="JetBrains Mono"/>
+              </a:rPr>
+              <a:t>f:</a:t>
+            </a:r>
+            <a:br>
+              <a:rPr lang="en-GB" sz="1000" dirty="0">
+                <a:solidFill>
+                  <a:srgbClr val="BCBEC4"/>
+                </a:solidFill>
+                <a:effectLst/>
+                <a:latin typeface="JetBrains Mono"/>
+              </a:rPr>
+            </a:br>
+            <a:r>
+              <a:rPr lang="en-GB" sz="1000" dirty="0">
+                <a:solidFill>
+                  <a:srgbClr val="BCBEC4"/>
+                </a:solidFill>
+                <a:effectLst/>
+                <a:latin typeface="JetBrains Mono"/>
+              </a:rPr>
+              <a:t>        </a:t>
+            </a:r>
+            <a:r>
+              <a:rPr lang="en-GB" sz="1000" dirty="0" err="1">
+                <a:solidFill>
+                  <a:srgbClr val="BCBEC4"/>
+                </a:solidFill>
+                <a:effectLst/>
+                <a:latin typeface="JetBrains Mono"/>
+              </a:rPr>
+              <a:t>data.append</a:t>
+            </a:r>
+            <a:r>
+              <a:rPr lang="en-GB" sz="1000" dirty="0">
+                <a:solidFill>
+                  <a:srgbClr val="BCBEC4"/>
+                </a:solidFill>
+                <a:effectLst/>
+                <a:latin typeface="JetBrains Mono"/>
+              </a:rPr>
+              <a:t>(</a:t>
+            </a:r>
+            <a:r>
+              <a:rPr lang="en-GB" sz="1000" dirty="0" err="1">
+                <a:solidFill>
+                  <a:srgbClr val="BCBEC4"/>
+                </a:solidFill>
+                <a:effectLst/>
+                <a:latin typeface="JetBrains Mono"/>
+              </a:rPr>
+              <a:t>json.loads</a:t>
+            </a:r>
+            <a:r>
+              <a:rPr lang="en-GB" sz="1000" dirty="0">
+                <a:solidFill>
+                  <a:srgbClr val="BCBEC4"/>
+                </a:solidFill>
+                <a:effectLst/>
+                <a:latin typeface="JetBrains Mono"/>
+              </a:rPr>
+              <a:t>(line))</a:t>
+            </a:r>
+            <a:br>
+              <a:rPr lang="en-GB" sz="1000" dirty="0">
+                <a:solidFill>
+                  <a:srgbClr val="BCBEC4"/>
+                </a:solidFill>
+                <a:effectLst/>
+                <a:latin typeface="JetBrains Mono"/>
+              </a:rPr>
+            </a:br>
+            <a:br>
+              <a:rPr lang="en-GB" sz="1000" dirty="0">
+                <a:solidFill>
+                  <a:srgbClr val="BCBEC4"/>
+                </a:solidFill>
+                <a:effectLst/>
+                <a:latin typeface="JetBrains Mono"/>
+              </a:rPr>
+            </a:br>
+            <a:r>
+              <a:rPr lang="en-GB" sz="1000" dirty="0">
+                <a:solidFill>
+                  <a:srgbClr val="8888C6"/>
+                </a:solidFill>
+                <a:effectLst/>
+                <a:latin typeface="JetBrains Mono"/>
+              </a:rPr>
+              <a:t>print</a:t>
+            </a:r>
+            <a:r>
+              <a:rPr lang="en-GB" sz="1000" dirty="0">
+                <a:solidFill>
+                  <a:srgbClr val="BCBEC4"/>
+                </a:solidFill>
+                <a:effectLst/>
+                <a:latin typeface="JetBrains Mono"/>
+              </a:rPr>
+              <a:t>(data)</a:t>
+            </a:r>
+            <a:br>
+              <a:rPr lang="en-GB" sz="1000" dirty="0">
+                <a:solidFill>
+                  <a:srgbClr val="BCBEC4"/>
+                </a:solidFill>
+                <a:effectLst/>
+                <a:latin typeface="JetBrains Mono"/>
+              </a:rPr>
+            </a:br>
+            <a:r>
+              <a:rPr lang="en-GB" sz="1000" dirty="0" err="1">
+                <a:solidFill>
+                  <a:srgbClr val="BCBEC4"/>
+                </a:solidFill>
+                <a:effectLst/>
+                <a:latin typeface="JetBrains Mono"/>
+              </a:rPr>
+              <a:t>seq_len</a:t>
+            </a:r>
+            <a:r>
+              <a:rPr lang="en-GB" sz="1000" dirty="0">
+                <a:solidFill>
+                  <a:srgbClr val="BCBEC4"/>
+                </a:solidFill>
+                <a:effectLst/>
+                <a:latin typeface="JetBrains Mono"/>
+              </a:rPr>
+              <a:t> = </a:t>
+            </a:r>
+            <a:r>
+              <a:rPr lang="en-GB" sz="1000" dirty="0">
+                <a:solidFill>
+                  <a:srgbClr val="2AACB8"/>
+                </a:solidFill>
+                <a:effectLst/>
+                <a:latin typeface="JetBrains Mono"/>
+              </a:rPr>
+              <a:t>30</a:t>
+            </a:r>
+            <a:br>
+              <a:rPr lang="en-GB" sz="1000" dirty="0">
+                <a:solidFill>
+                  <a:srgbClr val="2AACB8"/>
+                </a:solidFill>
+                <a:effectLst/>
+                <a:latin typeface="JetBrains Mono"/>
+              </a:rPr>
+            </a:br>
+            <a:r>
+              <a:rPr lang="en-GB" sz="1000" dirty="0">
+                <a:solidFill>
+                  <a:srgbClr val="BCBEC4"/>
+                </a:solidFill>
+                <a:effectLst/>
+                <a:latin typeface="JetBrains Mono"/>
+              </a:rPr>
+              <a:t>item = data[</a:t>
+            </a:r>
+            <a:r>
+              <a:rPr lang="en-GB" sz="1000" dirty="0">
+                <a:solidFill>
+                  <a:srgbClr val="2AACB8"/>
+                </a:solidFill>
+                <a:effectLst/>
+                <a:latin typeface="JetBrains Mono"/>
+              </a:rPr>
+              <a:t>0</a:t>
+            </a:r>
+            <a:r>
+              <a:rPr lang="en-GB" sz="1000" dirty="0">
+                <a:solidFill>
+                  <a:srgbClr val="BCBEC4"/>
+                </a:solidFill>
+                <a:effectLst/>
+                <a:latin typeface="JetBrains Mono"/>
+              </a:rPr>
+              <a:t>]</a:t>
+            </a:r>
+            <a:br>
+              <a:rPr lang="en-GB" sz="1000" dirty="0">
+                <a:solidFill>
+                  <a:srgbClr val="BCBEC4"/>
+                </a:solidFill>
+                <a:effectLst/>
+                <a:latin typeface="JetBrains Mono"/>
+              </a:rPr>
+            </a:br>
+            <a:br>
+              <a:rPr lang="en-GB" sz="1000" dirty="0">
+                <a:solidFill>
+                  <a:srgbClr val="BCBEC4"/>
+                </a:solidFill>
+                <a:effectLst/>
+                <a:latin typeface="JetBrains Mono"/>
+              </a:rPr>
+            </a:br>
+            <a:r>
+              <a:rPr lang="en-GB" sz="1000" dirty="0" err="1">
+                <a:solidFill>
+                  <a:srgbClr val="BCBEC4"/>
+                </a:solidFill>
+                <a:effectLst/>
+                <a:latin typeface="JetBrains Mono"/>
+              </a:rPr>
+              <a:t>prompt_ids</a:t>
+            </a:r>
+            <a:r>
+              <a:rPr lang="en-GB" sz="1000" dirty="0">
+                <a:solidFill>
+                  <a:srgbClr val="BCBEC4"/>
+                </a:solidFill>
+                <a:effectLst/>
+                <a:latin typeface="JetBrains Mono"/>
+              </a:rPr>
+              <a:t> =  </a:t>
+            </a:r>
+            <a:r>
+              <a:rPr lang="en-GB" sz="1000" dirty="0" err="1">
+                <a:solidFill>
+                  <a:srgbClr val="BCBEC4"/>
+                </a:solidFill>
+                <a:effectLst/>
+                <a:latin typeface="JetBrains Mono"/>
+              </a:rPr>
+              <a:t>tokenizer.encode</a:t>
+            </a:r>
+            <a:r>
+              <a:rPr lang="en-GB" sz="1000" dirty="0">
+                <a:solidFill>
+                  <a:srgbClr val="BCBEC4"/>
+                </a:solidFill>
+                <a:effectLst/>
+                <a:latin typeface="JetBrains Mono"/>
+              </a:rPr>
+              <a:t>(item[</a:t>
+            </a:r>
+            <a:r>
+              <a:rPr lang="en-GB" sz="1000" dirty="0">
+                <a:solidFill>
+                  <a:srgbClr val="6AAB73"/>
+                </a:solidFill>
+                <a:effectLst/>
+                <a:latin typeface="JetBrains Mono"/>
+              </a:rPr>
+              <a:t>"prompt"</a:t>
+            </a:r>
+            <a:r>
+              <a:rPr lang="en-GB" sz="1000" dirty="0">
+                <a:solidFill>
+                  <a:srgbClr val="BCBEC4"/>
+                </a:solidFill>
+                <a:effectLst/>
+                <a:latin typeface="JetBrains Mono"/>
+              </a:rPr>
+              <a:t>])</a:t>
+            </a:r>
+            <a:br>
+              <a:rPr lang="en-GB" sz="1000" dirty="0">
+                <a:solidFill>
+                  <a:srgbClr val="BCBEC4"/>
+                </a:solidFill>
+                <a:effectLst/>
+                <a:latin typeface="JetBrains Mono"/>
+              </a:rPr>
+            </a:br>
+            <a:r>
+              <a:rPr lang="en-GB" sz="1000" dirty="0" err="1">
+                <a:solidFill>
+                  <a:srgbClr val="BCBEC4"/>
+                </a:solidFill>
+                <a:effectLst/>
+                <a:latin typeface="JetBrains Mono"/>
+              </a:rPr>
+              <a:t>response_ids</a:t>
+            </a:r>
+            <a:r>
+              <a:rPr lang="en-GB" sz="1000" dirty="0">
+                <a:solidFill>
+                  <a:srgbClr val="BCBEC4"/>
+                </a:solidFill>
+                <a:effectLst/>
+                <a:latin typeface="JetBrains Mono"/>
+              </a:rPr>
+              <a:t> =</a:t>
+            </a:r>
+            <a:r>
+              <a:rPr lang="en-GB" sz="1000" dirty="0" err="1">
+                <a:solidFill>
+                  <a:srgbClr val="BCBEC4"/>
+                </a:solidFill>
+                <a:effectLst/>
+                <a:latin typeface="JetBrains Mono"/>
+              </a:rPr>
+              <a:t>tokenizer.encode</a:t>
+            </a:r>
+            <a:r>
+              <a:rPr lang="en-GB" sz="1000" dirty="0">
+                <a:solidFill>
+                  <a:srgbClr val="BCBEC4"/>
+                </a:solidFill>
+                <a:effectLst/>
+                <a:latin typeface="JetBrains Mono"/>
+              </a:rPr>
+              <a:t>(item[</a:t>
+            </a:r>
+            <a:r>
+              <a:rPr lang="en-GB" sz="1000" dirty="0">
+                <a:solidFill>
+                  <a:srgbClr val="6AAB73"/>
+                </a:solidFill>
+                <a:effectLst/>
+                <a:latin typeface="JetBrains Mono"/>
+              </a:rPr>
+              <a:t>"response"</a:t>
+            </a:r>
+            <a:r>
+              <a:rPr lang="en-GB" sz="1000" dirty="0">
+                <a:solidFill>
+                  <a:srgbClr val="BCBEC4"/>
+                </a:solidFill>
+                <a:effectLst/>
+                <a:latin typeface="JetBrains Mono"/>
+              </a:rPr>
+              <a:t>])</a:t>
+            </a:r>
+            <a:br>
+              <a:rPr lang="en-GB" sz="1000" dirty="0">
+                <a:solidFill>
+                  <a:srgbClr val="BCBEC4"/>
+                </a:solidFill>
+                <a:effectLst/>
+                <a:latin typeface="JetBrains Mono"/>
+              </a:rPr>
+            </a:br>
+            <a:br>
+              <a:rPr lang="en-GB" sz="1000" dirty="0">
+                <a:solidFill>
+                  <a:srgbClr val="BCBEC4"/>
+                </a:solidFill>
+                <a:effectLst/>
+                <a:latin typeface="JetBrains Mono"/>
+              </a:rPr>
+            </a:br>
+            <a:r>
+              <a:rPr lang="en-GB" sz="1000" dirty="0">
+                <a:solidFill>
+                  <a:srgbClr val="BCBEC4"/>
+                </a:solidFill>
+                <a:effectLst/>
+                <a:latin typeface="JetBrains Mono"/>
+              </a:rPr>
+              <a:t>tokens = </a:t>
+            </a:r>
+            <a:r>
+              <a:rPr lang="en-GB" sz="1000" dirty="0" err="1">
+                <a:solidFill>
+                  <a:srgbClr val="BCBEC4"/>
+                </a:solidFill>
+                <a:effectLst/>
+                <a:latin typeface="JetBrains Mono"/>
+              </a:rPr>
+              <a:t>prompt_ids</a:t>
+            </a:r>
+            <a:r>
+              <a:rPr lang="en-GB" sz="1000" dirty="0">
+                <a:solidFill>
+                  <a:srgbClr val="BCBEC4"/>
+                </a:solidFill>
+                <a:effectLst/>
+                <a:latin typeface="JetBrains Mono"/>
+              </a:rPr>
+              <a:t> + </a:t>
+            </a:r>
+            <a:r>
+              <a:rPr lang="en-GB" sz="1000" dirty="0" err="1">
+                <a:solidFill>
+                  <a:srgbClr val="BCBEC4"/>
+                </a:solidFill>
+                <a:effectLst/>
+                <a:latin typeface="JetBrains Mono"/>
+              </a:rPr>
+              <a:t>response_ids</a:t>
+            </a:r>
+            <a:br>
+              <a:rPr lang="en-GB" sz="1000" dirty="0">
+                <a:solidFill>
+                  <a:srgbClr val="BCBEC4"/>
+                </a:solidFill>
+                <a:effectLst/>
+                <a:latin typeface="JetBrains Mono"/>
+              </a:rPr>
+            </a:br>
+            <a:br>
+              <a:rPr lang="en-GB" sz="1000" dirty="0">
+                <a:solidFill>
+                  <a:srgbClr val="BCBEC4"/>
+                </a:solidFill>
+                <a:effectLst/>
+                <a:latin typeface="JetBrains Mono"/>
+              </a:rPr>
+            </a:br>
+            <a:r>
+              <a:rPr lang="en-GB" sz="1000" dirty="0">
+                <a:solidFill>
+                  <a:srgbClr val="BCBEC4"/>
+                </a:solidFill>
+                <a:effectLst/>
+                <a:latin typeface="JetBrains Mono"/>
+              </a:rPr>
+              <a:t>tokens = tokens[:</a:t>
+            </a:r>
+            <a:r>
+              <a:rPr lang="en-GB" sz="1000" dirty="0" err="1">
+                <a:solidFill>
+                  <a:srgbClr val="BCBEC4"/>
+                </a:solidFill>
+                <a:effectLst/>
+                <a:latin typeface="JetBrains Mono"/>
+              </a:rPr>
+              <a:t>seq_len</a:t>
+            </a:r>
+            <a:r>
+              <a:rPr lang="en-GB" sz="1000" dirty="0">
+                <a:solidFill>
+                  <a:srgbClr val="BCBEC4"/>
+                </a:solidFill>
+                <a:effectLst/>
+                <a:latin typeface="JetBrains Mono"/>
+              </a:rPr>
+              <a:t> + </a:t>
+            </a:r>
+            <a:r>
+              <a:rPr lang="en-GB" sz="1000" dirty="0">
+                <a:solidFill>
+                  <a:srgbClr val="2AACB8"/>
+                </a:solidFill>
+                <a:effectLst/>
+                <a:latin typeface="JetBrains Mono"/>
+              </a:rPr>
+              <a:t>1</a:t>
+            </a:r>
+            <a:r>
+              <a:rPr lang="en-GB" sz="1000" dirty="0">
+                <a:solidFill>
+                  <a:srgbClr val="BCBEC4"/>
+                </a:solidFill>
+                <a:effectLst/>
+                <a:latin typeface="JetBrains Mono"/>
+              </a:rPr>
+              <a:t>]</a:t>
+            </a:r>
+            <a:br>
+              <a:rPr lang="en-GB" sz="1000" dirty="0">
+                <a:solidFill>
+                  <a:srgbClr val="BCBEC4"/>
+                </a:solidFill>
+                <a:effectLst/>
+                <a:latin typeface="JetBrains Mono"/>
+              </a:rPr>
+            </a:br>
+            <a:br>
+              <a:rPr lang="en-GB" sz="1000" dirty="0">
+                <a:solidFill>
+                  <a:srgbClr val="BCBEC4"/>
+                </a:solidFill>
+                <a:effectLst/>
+                <a:latin typeface="JetBrains Mono"/>
+              </a:rPr>
+            </a:br>
+            <a:r>
+              <a:rPr lang="en-GB" sz="1000" dirty="0" err="1">
+                <a:solidFill>
+                  <a:srgbClr val="BCBEC4"/>
+                </a:solidFill>
+                <a:effectLst/>
+                <a:latin typeface="JetBrains Mono"/>
+              </a:rPr>
+              <a:t>pad_id</a:t>
+            </a:r>
+            <a:r>
+              <a:rPr lang="en-GB" sz="1000" dirty="0">
+                <a:solidFill>
+                  <a:srgbClr val="BCBEC4"/>
+                </a:solidFill>
+                <a:effectLst/>
+                <a:latin typeface="JetBrains Mono"/>
+              </a:rPr>
+              <a:t> = </a:t>
+            </a:r>
+            <a:r>
+              <a:rPr lang="en-GB" sz="1000" dirty="0">
+                <a:solidFill>
+                  <a:srgbClr val="2AACB8"/>
+                </a:solidFill>
+                <a:effectLst/>
+                <a:latin typeface="JetBrains Mono"/>
+              </a:rPr>
+              <a:t>0</a:t>
+            </a:r>
+            <a:br>
+              <a:rPr lang="en-GB" sz="1000" dirty="0">
+                <a:solidFill>
+                  <a:srgbClr val="2AACB8"/>
+                </a:solidFill>
+                <a:effectLst/>
+                <a:latin typeface="JetBrains Mono"/>
+              </a:rPr>
+            </a:br>
+            <a:r>
+              <a:rPr lang="en-GB" sz="1000" dirty="0" err="1">
+                <a:solidFill>
+                  <a:srgbClr val="BCBEC4"/>
+                </a:solidFill>
+                <a:effectLst/>
+                <a:latin typeface="JetBrains Mono"/>
+              </a:rPr>
+              <a:t>pad_len</a:t>
+            </a:r>
+            <a:r>
+              <a:rPr lang="en-GB" sz="1000" dirty="0">
+                <a:solidFill>
+                  <a:srgbClr val="BCBEC4"/>
+                </a:solidFill>
+                <a:effectLst/>
+                <a:latin typeface="JetBrains Mono"/>
+              </a:rPr>
+              <a:t> = (</a:t>
+            </a:r>
+            <a:r>
+              <a:rPr lang="en-GB" sz="1000" dirty="0" err="1">
+                <a:solidFill>
+                  <a:srgbClr val="BCBEC4"/>
+                </a:solidFill>
+                <a:effectLst/>
+                <a:latin typeface="JetBrains Mono"/>
+              </a:rPr>
+              <a:t>seq_len</a:t>
+            </a:r>
+            <a:r>
+              <a:rPr lang="en-GB" sz="1000" dirty="0">
+                <a:solidFill>
+                  <a:srgbClr val="BCBEC4"/>
+                </a:solidFill>
+                <a:effectLst/>
+                <a:latin typeface="JetBrains Mono"/>
+              </a:rPr>
+              <a:t> + </a:t>
+            </a:r>
+            <a:r>
+              <a:rPr lang="en-GB" sz="1000" dirty="0">
+                <a:solidFill>
+                  <a:srgbClr val="2AACB8"/>
+                </a:solidFill>
+                <a:effectLst/>
+                <a:latin typeface="JetBrains Mono"/>
+              </a:rPr>
+              <a:t>1</a:t>
+            </a:r>
+            <a:r>
+              <a:rPr lang="en-GB" sz="1000" dirty="0">
+                <a:solidFill>
+                  <a:srgbClr val="BCBEC4"/>
+                </a:solidFill>
+                <a:effectLst/>
+                <a:latin typeface="JetBrains Mono"/>
+              </a:rPr>
+              <a:t>) - </a:t>
+            </a:r>
+            <a:r>
+              <a:rPr lang="en-GB" sz="1000" dirty="0" err="1">
+                <a:solidFill>
+                  <a:srgbClr val="8888C6"/>
+                </a:solidFill>
+                <a:effectLst/>
+                <a:latin typeface="JetBrains Mono"/>
+              </a:rPr>
+              <a:t>len</a:t>
+            </a:r>
+            <a:r>
+              <a:rPr lang="en-GB" sz="1000" dirty="0">
+                <a:solidFill>
+                  <a:srgbClr val="BCBEC4"/>
+                </a:solidFill>
+                <a:effectLst/>
+                <a:latin typeface="JetBrains Mono"/>
+              </a:rPr>
+              <a:t>(tokens)</a:t>
+            </a:r>
+            <a:br>
+              <a:rPr lang="en-GB" sz="1000" dirty="0">
+                <a:solidFill>
+                  <a:srgbClr val="BCBEC4"/>
+                </a:solidFill>
+                <a:effectLst/>
+                <a:latin typeface="JetBrains Mono"/>
+              </a:rPr>
+            </a:br>
+            <a:r>
+              <a:rPr lang="en-GB" sz="1000" dirty="0">
+                <a:solidFill>
+                  <a:srgbClr val="BCBEC4"/>
+                </a:solidFill>
+                <a:effectLst/>
+                <a:latin typeface="JetBrains Mono"/>
+              </a:rPr>
+              <a:t>tokens = tokens + [</a:t>
+            </a:r>
+            <a:r>
+              <a:rPr lang="en-GB" sz="1000" dirty="0" err="1">
+                <a:solidFill>
+                  <a:srgbClr val="BCBEC4"/>
+                </a:solidFill>
+                <a:effectLst/>
+                <a:latin typeface="JetBrains Mono"/>
+              </a:rPr>
+              <a:t>pad_id</a:t>
+            </a:r>
+            <a:r>
+              <a:rPr lang="en-GB" sz="1000" dirty="0">
+                <a:solidFill>
+                  <a:srgbClr val="BCBEC4"/>
+                </a:solidFill>
+                <a:effectLst/>
+                <a:latin typeface="JetBrains Mono"/>
+              </a:rPr>
+              <a:t>] * </a:t>
+            </a:r>
+            <a:r>
+              <a:rPr lang="en-GB" sz="1000" dirty="0" err="1">
+                <a:solidFill>
+                  <a:srgbClr val="BCBEC4"/>
+                </a:solidFill>
+                <a:effectLst/>
+                <a:latin typeface="JetBrains Mono"/>
+              </a:rPr>
+              <a:t>pad_len</a:t>
+            </a:r>
+            <a:br>
+              <a:rPr lang="en-GB" sz="1000" dirty="0">
+                <a:solidFill>
+                  <a:srgbClr val="BCBEC4"/>
+                </a:solidFill>
+                <a:effectLst/>
+                <a:latin typeface="JetBrains Mono"/>
+              </a:rPr>
+            </a:br>
+            <a:r>
+              <a:rPr lang="en-GB" sz="1000" dirty="0">
+                <a:solidFill>
+                  <a:srgbClr val="8888C6"/>
+                </a:solidFill>
+                <a:effectLst/>
+                <a:latin typeface="JetBrains Mono"/>
+              </a:rPr>
+              <a:t>print</a:t>
+            </a:r>
+            <a:r>
+              <a:rPr lang="en-GB" sz="1000" dirty="0">
+                <a:solidFill>
+                  <a:srgbClr val="BCBEC4"/>
+                </a:solidFill>
+                <a:effectLst/>
+                <a:latin typeface="JetBrains Mono"/>
+              </a:rPr>
+              <a:t>(tokens)</a:t>
+            </a:r>
+            <a:br>
+              <a:rPr lang="en-GB" sz="1000" dirty="0">
+                <a:solidFill>
+                  <a:srgbClr val="BCBEC4"/>
+                </a:solidFill>
+                <a:effectLst/>
+                <a:latin typeface="JetBrains Mono"/>
+              </a:rPr>
+            </a:br>
+            <a:br>
+              <a:rPr lang="en-GB" sz="1000" dirty="0">
+                <a:solidFill>
+                  <a:srgbClr val="BCBEC4"/>
+                </a:solidFill>
+                <a:effectLst/>
+                <a:latin typeface="JetBrains Mono"/>
+              </a:rPr>
+            </a:br>
+            <a:r>
+              <a:rPr lang="en-GB" sz="1000" dirty="0">
+                <a:solidFill>
+                  <a:srgbClr val="BCBEC4"/>
+                </a:solidFill>
+                <a:effectLst/>
+                <a:latin typeface="JetBrains Mono"/>
+              </a:rPr>
+              <a:t>x = tokens[:-</a:t>
+            </a:r>
+            <a:r>
+              <a:rPr lang="en-GB" sz="1000" dirty="0">
+                <a:solidFill>
+                  <a:srgbClr val="2AACB8"/>
+                </a:solidFill>
+                <a:effectLst/>
+                <a:latin typeface="JetBrains Mono"/>
+              </a:rPr>
+              <a:t>1</a:t>
+            </a:r>
+            <a:r>
+              <a:rPr lang="en-GB" sz="1000" dirty="0">
+                <a:solidFill>
+                  <a:srgbClr val="BCBEC4"/>
+                </a:solidFill>
+                <a:effectLst/>
+                <a:latin typeface="JetBrains Mono"/>
+              </a:rPr>
+              <a:t>]</a:t>
+            </a:r>
+            <a:br>
+              <a:rPr lang="en-GB" sz="1000" dirty="0">
+                <a:solidFill>
+                  <a:srgbClr val="BCBEC4"/>
+                </a:solidFill>
+                <a:effectLst/>
+                <a:latin typeface="JetBrains Mono"/>
+              </a:rPr>
+            </a:br>
+            <a:r>
+              <a:rPr lang="en-GB" sz="1000" dirty="0">
+                <a:solidFill>
+                  <a:srgbClr val="BCBEC4"/>
+                </a:solidFill>
+                <a:effectLst/>
+                <a:latin typeface="JetBrains Mono"/>
+              </a:rPr>
+              <a:t>y = tokens[</a:t>
+            </a:r>
+            <a:r>
+              <a:rPr lang="en-GB" sz="1000" dirty="0">
+                <a:solidFill>
+                  <a:srgbClr val="2AACB8"/>
+                </a:solidFill>
+                <a:effectLst/>
+                <a:latin typeface="JetBrains Mono"/>
+              </a:rPr>
+              <a:t>1</a:t>
+            </a:r>
+            <a:r>
+              <a:rPr lang="en-GB" sz="1000" dirty="0">
+                <a:solidFill>
+                  <a:srgbClr val="BCBEC4"/>
+                </a:solidFill>
+                <a:effectLst/>
+                <a:latin typeface="JetBrains Mono"/>
+              </a:rPr>
+              <a:t>:]</a:t>
+            </a:r>
+            <a:br>
+              <a:rPr lang="en-GB" sz="1000" dirty="0">
+                <a:solidFill>
+                  <a:srgbClr val="BCBEC4"/>
+                </a:solidFill>
+                <a:effectLst/>
+                <a:latin typeface="JetBrains Mono"/>
+              </a:rPr>
+            </a:br>
+            <a:br>
+              <a:rPr lang="en-GB" sz="1000" dirty="0">
+                <a:solidFill>
+                  <a:srgbClr val="BCBEC4"/>
+                </a:solidFill>
+                <a:effectLst/>
+                <a:latin typeface="JetBrains Mono"/>
+              </a:rPr>
+            </a:br>
+            <a:r>
+              <a:rPr lang="en-GB" sz="1000" dirty="0">
+                <a:solidFill>
+                  <a:srgbClr val="8888C6"/>
+                </a:solidFill>
+                <a:effectLst/>
+                <a:latin typeface="JetBrains Mono"/>
+              </a:rPr>
+              <a:t>print</a:t>
+            </a:r>
+            <a:r>
+              <a:rPr lang="en-GB" sz="1000" dirty="0">
+                <a:solidFill>
+                  <a:srgbClr val="BCBEC4"/>
+                </a:solidFill>
+                <a:effectLst/>
+                <a:latin typeface="JetBrains Mono"/>
+              </a:rPr>
+              <a:t>(x)</a:t>
+            </a:r>
+            <a:br>
+              <a:rPr lang="en-GB" sz="1000" dirty="0">
+                <a:solidFill>
+                  <a:srgbClr val="BCBEC4"/>
+                </a:solidFill>
+                <a:effectLst/>
+                <a:latin typeface="JetBrains Mono"/>
+              </a:rPr>
+            </a:br>
+            <a:r>
+              <a:rPr lang="en-GB" sz="1000" dirty="0">
+                <a:solidFill>
+                  <a:srgbClr val="8888C6"/>
+                </a:solidFill>
+                <a:effectLst/>
+                <a:latin typeface="JetBrains Mono"/>
+              </a:rPr>
+              <a:t>print</a:t>
+            </a:r>
+            <a:r>
+              <a:rPr lang="en-GB" sz="1000" dirty="0">
+                <a:solidFill>
+                  <a:srgbClr val="BCBEC4"/>
+                </a:solidFill>
+                <a:effectLst/>
+                <a:latin typeface="JetBrains Mono"/>
+              </a:rPr>
+              <a:t>(y)</a:t>
+            </a:r>
+            <a:br>
+              <a:rPr lang="en-GB" sz="1000" dirty="0">
+                <a:solidFill>
+                  <a:srgbClr val="BCBEC4"/>
+                </a:solidFill>
+                <a:effectLst/>
+                <a:latin typeface="JetBrains Mono"/>
+              </a:rPr>
+            </a:br>
+            <a:br>
+              <a:rPr lang="en-GB" sz="1000" dirty="0">
+                <a:solidFill>
+                  <a:srgbClr val="BCBEC4"/>
+                </a:solidFill>
+                <a:effectLst/>
+                <a:latin typeface="JetBrains Mono"/>
+              </a:rPr>
+            </a:br>
+            <a:r>
+              <a:rPr lang="en-GB" sz="1000" dirty="0">
+                <a:solidFill>
+                  <a:srgbClr val="BCBEC4"/>
+                </a:solidFill>
+                <a:effectLst/>
+                <a:latin typeface="JetBrains Mono"/>
+              </a:rPr>
+              <a:t>labels = </a:t>
+            </a:r>
+            <a:r>
+              <a:rPr lang="en-GB" sz="1000" dirty="0" err="1">
+                <a:solidFill>
+                  <a:srgbClr val="BCBEC4"/>
+                </a:solidFill>
+                <a:effectLst/>
+                <a:latin typeface="JetBrains Mono"/>
+              </a:rPr>
+              <a:t>y.copy</a:t>
+            </a:r>
+            <a:r>
+              <a:rPr lang="en-GB" sz="1000" dirty="0">
+                <a:solidFill>
+                  <a:srgbClr val="BCBEC4"/>
+                </a:solidFill>
+                <a:effectLst/>
+                <a:latin typeface="JetBrains Mono"/>
+              </a:rPr>
+              <a:t>()</a:t>
+            </a:r>
+            <a:br>
+              <a:rPr lang="en-GB" sz="1000" dirty="0">
+                <a:solidFill>
+                  <a:srgbClr val="BCBEC4"/>
+                </a:solidFill>
+                <a:effectLst/>
+                <a:latin typeface="JetBrains Mono"/>
+              </a:rPr>
+            </a:br>
+            <a:br>
+              <a:rPr lang="en-GB" sz="1000" dirty="0">
+                <a:solidFill>
+                  <a:srgbClr val="BCBEC4"/>
+                </a:solidFill>
+                <a:effectLst/>
+                <a:latin typeface="JetBrains Mono"/>
+              </a:rPr>
+            </a:br>
+            <a:r>
+              <a:rPr lang="en-GB" sz="1000" dirty="0" err="1">
+                <a:solidFill>
+                  <a:srgbClr val="BCBEC4"/>
+                </a:solidFill>
+                <a:effectLst/>
+                <a:latin typeface="JetBrains Mono"/>
+              </a:rPr>
+              <a:t>prompt_len</a:t>
+            </a:r>
+            <a:r>
+              <a:rPr lang="en-GB" sz="1000" dirty="0">
+                <a:solidFill>
+                  <a:srgbClr val="BCBEC4"/>
+                </a:solidFill>
+                <a:effectLst/>
+                <a:latin typeface="JetBrains Mono"/>
+              </a:rPr>
+              <a:t> = </a:t>
+            </a:r>
+            <a:r>
+              <a:rPr lang="en-GB" sz="1000" dirty="0">
+                <a:solidFill>
+                  <a:srgbClr val="8888C6"/>
+                </a:solidFill>
+                <a:effectLst/>
+                <a:latin typeface="JetBrains Mono"/>
+              </a:rPr>
+              <a:t>min</a:t>
+            </a:r>
+            <a:r>
+              <a:rPr lang="en-GB" sz="1000" dirty="0">
+                <a:solidFill>
+                  <a:srgbClr val="BCBEC4"/>
+                </a:solidFill>
+                <a:effectLst/>
+                <a:latin typeface="JetBrains Mono"/>
+              </a:rPr>
+              <a:t>(</a:t>
+            </a:r>
+            <a:r>
+              <a:rPr lang="en-GB" sz="1000" dirty="0" err="1">
+                <a:solidFill>
+                  <a:srgbClr val="8888C6"/>
+                </a:solidFill>
+                <a:effectLst/>
+                <a:latin typeface="JetBrains Mono"/>
+              </a:rPr>
+              <a:t>len</a:t>
+            </a:r>
+            <a:r>
+              <a:rPr lang="en-GB" sz="1000" dirty="0">
+                <a:solidFill>
+                  <a:srgbClr val="BCBEC4"/>
+                </a:solidFill>
+                <a:effectLst/>
+                <a:latin typeface="JetBrains Mono"/>
+              </a:rPr>
+              <a:t>(</a:t>
+            </a:r>
+            <a:r>
+              <a:rPr lang="en-GB" sz="1000" dirty="0" err="1">
+                <a:solidFill>
+                  <a:srgbClr val="BCBEC4"/>
+                </a:solidFill>
+                <a:effectLst/>
+                <a:latin typeface="JetBrains Mono"/>
+              </a:rPr>
+              <a:t>prompt_ids</a:t>
+            </a:r>
+            <a:r>
+              <a:rPr lang="en-GB" sz="1000" dirty="0">
+                <a:solidFill>
+                  <a:srgbClr val="BCBEC4"/>
+                </a:solidFill>
+                <a:effectLst/>
+                <a:latin typeface="JetBrains Mono"/>
+              </a:rPr>
+              <a:t>),</a:t>
+            </a:r>
+            <a:r>
+              <a:rPr lang="en-GB" sz="1000" dirty="0" err="1">
+                <a:solidFill>
+                  <a:srgbClr val="BCBEC4"/>
+                </a:solidFill>
+                <a:effectLst/>
+                <a:latin typeface="JetBrains Mono"/>
+              </a:rPr>
+              <a:t>seq_len</a:t>
+            </a:r>
+            <a:r>
+              <a:rPr lang="en-GB" sz="1000" dirty="0">
+                <a:solidFill>
+                  <a:srgbClr val="BCBEC4"/>
+                </a:solidFill>
+                <a:effectLst/>
+                <a:latin typeface="JetBrains Mono"/>
+              </a:rPr>
+              <a:t>)</a:t>
+            </a:r>
+            <a:br>
+              <a:rPr lang="en-GB" sz="1000" dirty="0">
+                <a:solidFill>
+                  <a:srgbClr val="BCBEC4"/>
+                </a:solidFill>
+                <a:effectLst/>
+                <a:latin typeface="JetBrains Mono"/>
+              </a:rPr>
+            </a:br>
+            <a:r>
+              <a:rPr lang="en-GB" sz="1000" dirty="0" err="1">
+                <a:solidFill>
+                  <a:srgbClr val="BCBEC4"/>
+                </a:solidFill>
+                <a:effectLst/>
+                <a:latin typeface="JetBrains Mono"/>
+              </a:rPr>
+              <a:t>mask_len</a:t>
+            </a:r>
+            <a:r>
+              <a:rPr lang="en-GB" sz="1000" dirty="0">
+                <a:solidFill>
+                  <a:srgbClr val="BCBEC4"/>
+                </a:solidFill>
+                <a:effectLst/>
+                <a:latin typeface="JetBrains Mono"/>
+              </a:rPr>
+              <a:t> = </a:t>
+            </a:r>
+            <a:r>
+              <a:rPr lang="en-GB" sz="1000" dirty="0">
+                <a:solidFill>
+                  <a:srgbClr val="8888C6"/>
+                </a:solidFill>
+                <a:effectLst/>
+                <a:latin typeface="JetBrains Mono"/>
+              </a:rPr>
+              <a:t>max</a:t>
+            </a:r>
+            <a:r>
+              <a:rPr lang="en-GB" sz="1000" dirty="0">
+                <a:solidFill>
+                  <a:srgbClr val="BCBEC4"/>
+                </a:solidFill>
+                <a:effectLst/>
+                <a:latin typeface="JetBrains Mono"/>
+              </a:rPr>
+              <a:t>(</a:t>
+            </a:r>
+            <a:r>
+              <a:rPr lang="en-GB" sz="1000" dirty="0">
+                <a:solidFill>
+                  <a:srgbClr val="2AACB8"/>
+                </a:solidFill>
+                <a:effectLst/>
+                <a:latin typeface="JetBrains Mono"/>
+              </a:rPr>
+              <a:t>0</a:t>
+            </a:r>
+            <a:r>
+              <a:rPr lang="en-GB" sz="1000" dirty="0">
+                <a:solidFill>
+                  <a:srgbClr val="BCBEC4"/>
+                </a:solidFill>
+                <a:effectLst/>
+                <a:latin typeface="JetBrains Mono"/>
+              </a:rPr>
+              <a:t>, </a:t>
+            </a:r>
+            <a:r>
+              <a:rPr lang="en-GB" sz="1000" dirty="0" err="1">
+                <a:solidFill>
+                  <a:srgbClr val="BCBEC4"/>
+                </a:solidFill>
+                <a:effectLst/>
+                <a:latin typeface="JetBrains Mono"/>
+              </a:rPr>
+              <a:t>prompt_len</a:t>
+            </a:r>
+            <a:r>
+              <a:rPr lang="en-GB" sz="1000" dirty="0">
+                <a:solidFill>
+                  <a:srgbClr val="BCBEC4"/>
+                </a:solidFill>
+                <a:effectLst/>
+                <a:latin typeface="JetBrains Mono"/>
+              </a:rPr>
+              <a:t> - </a:t>
+            </a:r>
+            <a:r>
+              <a:rPr lang="en-GB" sz="1000" dirty="0">
+                <a:solidFill>
+                  <a:srgbClr val="2AACB8"/>
+                </a:solidFill>
+                <a:effectLst/>
+                <a:latin typeface="JetBrains Mono"/>
+              </a:rPr>
+              <a:t>1</a:t>
+            </a:r>
+            <a:r>
+              <a:rPr lang="en-GB" sz="1000" dirty="0">
+                <a:solidFill>
+                  <a:srgbClr val="BCBEC4"/>
+                </a:solidFill>
+                <a:effectLst/>
+                <a:latin typeface="JetBrains Mono"/>
+              </a:rPr>
+              <a:t>)</a:t>
+            </a:r>
+            <a:br>
+              <a:rPr lang="en-GB" sz="1000" dirty="0">
+                <a:solidFill>
+                  <a:srgbClr val="BCBEC4"/>
+                </a:solidFill>
+                <a:effectLst/>
+                <a:latin typeface="JetBrains Mono"/>
+              </a:rPr>
+            </a:br>
+            <a:r>
+              <a:rPr lang="en-GB" sz="1000" dirty="0">
+                <a:solidFill>
+                  <a:srgbClr val="BCBEC4"/>
+                </a:solidFill>
+                <a:effectLst/>
+                <a:latin typeface="JetBrains Mono"/>
+              </a:rPr>
+              <a:t>labels[:</a:t>
+            </a:r>
+            <a:r>
+              <a:rPr lang="en-GB" sz="1000" dirty="0" err="1">
+                <a:solidFill>
+                  <a:srgbClr val="BCBEC4"/>
+                </a:solidFill>
+                <a:effectLst/>
+                <a:latin typeface="JetBrains Mono"/>
+              </a:rPr>
+              <a:t>mask_len</a:t>
+            </a:r>
+            <a:r>
+              <a:rPr lang="en-GB" sz="1000" dirty="0">
+                <a:solidFill>
+                  <a:srgbClr val="BCBEC4"/>
+                </a:solidFill>
+                <a:effectLst/>
+                <a:latin typeface="JetBrains Mono"/>
+              </a:rPr>
+              <a:t>] = [-</a:t>
+            </a:r>
+            <a:r>
+              <a:rPr lang="en-GB" sz="1000" dirty="0">
+                <a:solidFill>
+                  <a:srgbClr val="2AACB8"/>
+                </a:solidFill>
+                <a:effectLst/>
+                <a:latin typeface="JetBrains Mono"/>
+              </a:rPr>
+              <a:t>100</a:t>
+            </a:r>
+            <a:r>
+              <a:rPr lang="en-GB" sz="1000" dirty="0">
+                <a:solidFill>
+                  <a:srgbClr val="BCBEC4"/>
+                </a:solidFill>
+                <a:effectLst/>
+                <a:latin typeface="JetBrains Mono"/>
+              </a:rPr>
+              <a:t>] * </a:t>
+            </a:r>
+            <a:r>
+              <a:rPr lang="en-GB" sz="1000" dirty="0" err="1">
+                <a:solidFill>
+                  <a:srgbClr val="BCBEC4"/>
+                </a:solidFill>
+                <a:effectLst/>
+                <a:latin typeface="JetBrains Mono"/>
+              </a:rPr>
+              <a:t>mask_len</a:t>
+            </a:r>
+            <a:br>
+              <a:rPr lang="en-GB" sz="1000" dirty="0">
+                <a:solidFill>
+                  <a:srgbClr val="BCBEC4"/>
+                </a:solidFill>
+                <a:effectLst/>
+                <a:latin typeface="JetBrains Mono"/>
+              </a:rPr>
+            </a:br>
+            <a:br>
+              <a:rPr lang="en-GB" sz="1000" dirty="0">
+                <a:solidFill>
+                  <a:srgbClr val="BCBEC4"/>
+                </a:solidFill>
+                <a:effectLst/>
+                <a:latin typeface="JetBrains Mono"/>
+              </a:rPr>
+            </a:br>
+            <a:r>
+              <a:rPr lang="en-GB" sz="1000" dirty="0">
+                <a:solidFill>
+                  <a:srgbClr val="8888C6"/>
+                </a:solidFill>
+                <a:effectLst/>
+                <a:latin typeface="JetBrains Mono"/>
+              </a:rPr>
+              <a:t>print</a:t>
+            </a:r>
+            <a:r>
+              <a:rPr lang="en-GB" sz="1000" dirty="0">
+                <a:solidFill>
+                  <a:srgbClr val="BCBEC4"/>
+                </a:solidFill>
+                <a:effectLst/>
+                <a:latin typeface="JetBrains Mono"/>
+              </a:rPr>
+              <a:t>(labels)</a:t>
+            </a:r>
+            <a:br>
+              <a:rPr lang="en-GB" sz="1000" dirty="0">
+                <a:solidFill>
+                  <a:srgbClr val="BCBEC4"/>
+                </a:solidFill>
+                <a:effectLst/>
+                <a:latin typeface="JetBrains Mono"/>
+              </a:rPr>
+            </a:br>
+            <a:br>
+              <a:rPr lang="en-GB" sz="1000" dirty="0">
+                <a:solidFill>
+                  <a:srgbClr val="BCBEC4"/>
+                </a:solidFill>
+                <a:effectLst/>
+                <a:latin typeface="JetBrains Mono"/>
+              </a:rPr>
+            </a:br>
+            <a:r>
+              <a:rPr lang="en-GB" sz="1000" dirty="0" err="1">
+                <a:solidFill>
+                  <a:srgbClr val="BCBEC4"/>
+                </a:solidFill>
+                <a:effectLst/>
+                <a:latin typeface="JetBrains Mono"/>
+              </a:rPr>
+              <a:t>real_len</a:t>
+            </a:r>
+            <a:r>
+              <a:rPr lang="en-GB" sz="1000" dirty="0">
+                <a:solidFill>
+                  <a:srgbClr val="BCBEC4"/>
+                </a:solidFill>
+                <a:effectLst/>
+                <a:latin typeface="JetBrains Mono"/>
+              </a:rPr>
+              <a:t> = </a:t>
+            </a:r>
+            <a:r>
+              <a:rPr lang="en-GB" sz="1000" dirty="0">
+                <a:solidFill>
+                  <a:srgbClr val="8888C6"/>
+                </a:solidFill>
+                <a:effectLst/>
+                <a:latin typeface="JetBrains Mono"/>
+              </a:rPr>
+              <a:t>min</a:t>
+            </a:r>
+            <a:r>
+              <a:rPr lang="en-GB" sz="1000" dirty="0">
+                <a:solidFill>
+                  <a:srgbClr val="BCBEC4"/>
+                </a:solidFill>
+                <a:effectLst/>
+                <a:latin typeface="JetBrains Mono"/>
+              </a:rPr>
+              <a:t>(</a:t>
+            </a:r>
+            <a:r>
+              <a:rPr lang="en-GB" sz="1000" dirty="0" err="1">
+                <a:solidFill>
+                  <a:srgbClr val="8888C6"/>
+                </a:solidFill>
+                <a:effectLst/>
+                <a:latin typeface="JetBrains Mono"/>
+              </a:rPr>
+              <a:t>len</a:t>
+            </a:r>
+            <a:r>
+              <a:rPr lang="en-GB" sz="1000" dirty="0">
+                <a:solidFill>
+                  <a:srgbClr val="BCBEC4"/>
+                </a:solidFill>
+                <a:effectLst/>
+                <a:latin typeface="JetBrains Mono"/>
+              </a:rPr>
+              <a:t>(</a:t>
+            </a:r>
+            <a:r>
+              <a:rPr lang="en-GB" sz="1000" dirty="0" err="1">
+                <a:solidFill>
+                  <a:srgbClr val="BCBEC4"/>
+                </a:solidFill>
+                <a:effectLst/>
+                <a:latin typeface="JetBrains Mono"/>
+              </a:rPr>
+              <a:t>prompt_ids</a:t>
+            </a:r>
+            <a:r>
+              <a:rPr lang="en-GB" sz="1000" dirty="0">
+                <a:solidFill>
+                  <a:srgbClr val="BCBEC4"/>
+                </a:solidFill>
+                <a:effectLst/>
+                <a:latin typeface="JetBrains Mono"/>
+              </a:rPr>
+              <a:t>) + </a:t>
+            </a:r>
+            <a:r>
+              <a:rPr lang="en-GB" sz="1000" dirty="0" err="1">
+                <a:solidFill>
+                  <a:srgbClr val="8888C6"/>
+                </a:solidFill>
+                <a:effectLst/>
+                <a:latin typeface="JetBrains Mono"/>
+              </a:rPr>
+              <a:t>len</a:t>
+            </a:r>
+            <a:r>
+              <a:rPr lang="en-GB" sz="1000" dirty="0">
+                <a:solidFill>
+                  <a:srgbClr val="BCBEC4"/>
+                </a:solidFill>
+                <a:effectLst/>
+                <a:latin typeface="JetBrains Mono"/>
+              </a:rPr>
+              <a:t>(</a:t>
+            </a:r>
+            <a:r>
+              <a:rPr lang="en-GB" sz="1000" dirty="0" err="1">
+                <a:solidFill>
+                  <a:srgbClr val="BCBEC4"/>
+                </a:solidFill>
+                <a:effectLst/>
+                <a:latin typeface="JetBrains Mono"/>
+              </a:rPr>
+              <a:t>response_ids</a:t>
+            </a:r>
+            <a:r>
+              <a:rPr lang="en-GB" sz="1000" dirty="0">
+                <a:solidFill>
+                  <a:srgbClr val="BCBEC4"/>
+                </a:solidFill>
+                <a:effectLst/>
+                <a:latin typeface="JetBrains Mono"/>
+              </a:rPr>
+              <a:t>),</a:t>
+            </a:r>
+            <a:r>
+              <a:rPr lang="en-GB" sz="1000" dirty="0" err="1">
+                <a:solidFill>
+                  <a:srgbClr val="BCBEC4"/>
+                </a:solidFill>
+                <a:effectLst/>
+                <a:latin typeface="JetBrains Mono"/>
+              </a:rPr>
+              <a:t>seq_len</a:t>
+            </a:r>
+            <a:r>
+              <a:rPr lang="en-GB" sz="1000" dirty="0">
+                <a:solidFill>
+                  <a:srgbClr val="BCBEC4"/>
+                </a:solidFill>
+                <a:effectLst/>
+                <a:latin typeface="JetBrains Mono"/>
+              </a:rPr>
+              <a:t> + </a:t>
+            </a:r>
+            <a:r>
+              <a:rPr lang="en-GB" sz="1000" dirty="0">
+                <a:solidFill>
+                  <a:srgbClr val="2AACB8"/>
+                </a:solidFill>
+                <a:effectLst/>
+                <a:latin typeface="JetBrains Mono"/>
+              </a:rPr>
+              <a:t>1</a:t>
+            </a:r>
+            <a:r>
+              <a:rPr lang="en-GB" sz="1000" dirty="0">
+                <a:solidFill>
+                  <a:srgbClr val="BCBEC4"/>
+                </a:solidFill>
+                <a:effectLst/>
+                <a:latin typeface="JetBrains Mono"/>
+              </a:rPr>
+              <a:t>) - </a:t>
+            </a:r>
+            <a:r>
+              <a:rPr lang="en-GB" sz="1000" dirty="0">
+                <a:solidFill>
+                  <a:srgbClr val="2AACB8"/>
+                </a:solidFill>
+                <a:effectLst/>
+                <a:latin typeface="JetBrains Mono"/>
+              </a:rPr>
+              <a:t>1</a:t>
+            </a:r>
+            <a:br>
+              <a:rPr lang="en-GB" sz="1000" dirty="0">
+                <a:solidFill>
+                  <a:srgbClr val="2AACB8"/>
+                </a:solidFill>
+                <a:effectLst/>
+                <a:latin typeface="JetBrains Mono"/>
+              </a:rPr>
+            </a:br>
+            <a:r>
+              <a:rPr lang="en-GB" sz="1000" dirty="0">
+                <a:solidFill>
+                  <a:srgbClr val="BCBEC4"/>
+                </a:solidFill>
+                <a:effectLst/>
+                <a:latin typeface="JetBrains Mono"/>
+              </a:rPr>
+              <a:t>labels[</a:t>
+            </a:r>
+            <a:r>
+              <a:rPr lang="en-GB" sz="1000" dirty="0" err="1">
+                <a:solidFill>
+                  <a:srgbClr val="BCBEC4"/>
+                </a:solidFill>
+                <a:effectLst/>
+                <a:latin typeface="JetBrains Mono"/>
+              </a:rPr>
+              <a:t>real_len</a:t>
+            </a:r>
+            <a:r>
+              <a:rPr lang="en-GB" sz="1000" dirty="0">
+                <a:solidFill>
+                  <a:srgbClr val="BCBEC4"/>
+                </a:solidFill>
+                <a:effectLst/>
+                <a:latin typeface="JetBrains Mono"/>
+              </a:rPr>
+              <a:t>:] = [-</a:t>
+            </a:r>
+            <a:r>
+              <a:rPr lang="en-GB" sz="1000" dirty="0">
+                <a:solidFill>
+                  <a:srgbClr val="2AACB8"/>
+                </a:solidFill>
+                <a:effectLst/>
+                <a:latin typeface="JetBrains Mono"/>
+              </a:rPr>
+              <a:t>100</a:t>
+            </a:r>
+            <a:r>
+              <a:rPr lang="en-GB" sz="1000" dirty="0">
+                <a:solidFill>
+                  <a:srgbClr val="BCBEC4"/>
+                </a:solidFill>
+                <a:effectLst/>
+                <a:latin typeface="JetBrains Mono"/>
+              </a:rPr>
+              <a:t>] * (</a:t>
+            </a:r>
+            <a:r>
+              <a:rPr lang="en-GB" sz="1000" dirty="0" err="1">
+                <a:solidFill>
+                  <a:srgbClr val="BCBEC4"/>
+                </a:solidFill>
+                <a:effectLst/>
+                <a:latin typeface="JetBrains Mono"/>
+              </a:rPr>
+              <a:t>seq_len</a:t>
+            </a:r>
+            <a:r>
+              <a:rPr lang="en-GB" sz="1000" dirty="0">
+                <a:solidFill>
+                  <a:srgbClr val="BCBEC4"/>
+                </a:solidFill>
+                <a:effectLst/>
+                <a:latin typeface="JetBrains Mono"/>
+              </a:rPr>
+              <a:t> - </a:t>
+            </a:r>
+            <a:r>
+              <a:rPr lang="en-GB" sz="1000" dirty="0" err="1">
+                <a:solidFill>
+                  <a:srgbClr val="BCBEC4"/>
+                </a:solidFill>
+                <a:effectLst/>
+                <a:latin typeface="JetBrains Mono"/>
+              </a:rPr>
+              <a:t>real_len</a:t>
+            </a:r>
+            <a:r>
+              <a:rPr lang="en-GB" sz="1000" dirty="0">
+                <a:solidFill>
+                  <a:srgbClr val="BCBEC4"/>
+                </a:solidFill>
+                <a:effectLst/>
+                <a:latin typeface="JetBrains Mono"/>
+              </a:rPr>
+              <a:t>)</a:t>
+            </a:r>
+            <a:br>
+              <a:rPr lang="en-GB" sz="1000" dirty="0">
+                <a:solidFill>
+                  <a:srgbClr val="BCBEC4"/>
+                </a:solidFill>
+                <a:effectLst/>
+                <a:latin typeface="JetBrains Mono"/>
+              </a:rPr>
+            </a:br>
+            <a:br>
+              <a:rPr lang="en-GB" sz="1000" dirty="0">
+                <a:solidFill>
+                  <a:srgbClr val="BCBEC4"/>
+                </a:solidFill>
+                <a:effectLst/>
+                <a:latin typeface="JetBrains Mono"/>
+              </a:rPr>
+            </a:br>
+            <a:r>
+              <a:rPr lang="en-GB" sz="1000" dirty="0">
+                <a:solidFill>
+                  <a:srgbClr val="8888C6"/>
+                </a:solidFill>
+                <a:effectLst/>
+                <a:latin typeface="JetBrains Mono"/>
+              </a:rPr>
+              <a:t>print</a:t>
+            </a:r>
+            <a:r>
+              <a:rPr lang="en-GB" sz="1000" dirty="0">
+                <a:solidFill>
+                  <a:srgbClr val="BCBEC4"/>
+                </a:solidFill>
+                <a:effectLst/>
+                <a:latin typeface="JetBrains Mono"/>
+              </a:rPr>
+              <a:t>(x)</a:t>
+            </a:r>
+            <a:br>
+              <a:rPr lang="en-GB" sz="1000" dirty="0">
+                <a:solidFill>
+                  <a:srgbClr val="BCBEC4"/>
+                </a:solidFill>
+                <a:effectLst/>
+                <a:latin typeface="JetBrains Mono"/>
+              </a:rPr>
+            </a:br>
+            <a:r>
+              <a:rPr lang="en-GB" sz="1000" dirty="0">
+                <a:solidFill>
+                  <a:srgbClr val="8888C6"/>
+                </a:solidFill>
+                <a:effectLst/>
+                <a:latin typeface="JetBrains Mono"/>
+              </a:rPr>
+              <a:t>print</a:t>
+            </a:r>
+            <a:r>
+              <a:rPr lang="en-GB" sz="1000" dirty="0">
+                <a:solidFill>
+                  <a:srgbClr val="BCBEC4"/>
+                </a:solidFill>
+                <a:effectLst/>
+                <a:latin typeface="JetBrains Mono"/>
+              </a:rPr>
+              <a:t>(labels)</a:t>
+            </a:r>
+            <a:br>
+              <a:rPr lang="en-GB" sz="1000" dirty="0">
+                <a:solidFill>
+                  <a:srgbClr val="BCBEC4"/>
+                </a:solidFill>
+                <a:effectLst/>
+                <a:latin typeface="JetBrains Mono"/>
+              </a:rPr>
+            </a:br>
+            <a:endParaRPr lang="en-GB" sz="1000" dirty="0">
+              <a:solidFill>
+                <a:srgbClr val="BCBEC4"/>
+              </a:solidFill>
+              <a:effectLst/>
+              <a:latin typeface="JetBrains Mono"/>
+            </a:endParaRPr>
+          </a:p>
+        </p:txBody>
+      </p:sp>
+      <p:sp>
+        <p:nvSpPr>
+          <p:cNvPr id="6" name="TextBox 5">
+            <a:extLst>
+              <a:ext uri="{FF2B5EF4-FFF2-40B4-BE49-F238E27FC236}">
+                <a16:creationId xmlns:a16="http://schemas.microsoft.com/office/drawing/2014/main" id="{285FC240-8AD0-7E29-422B-AF6815305B73}"/>
               </a:ext>
             </a:extLst>
           </p:cNvPr>
@@ -3792,8 +5663,8 @@
         </p:nvSpPr>
         <p:spPr>
           <a:xfrm>
-            <a:off x="4387262" y="-159306"/>
-            <a:ext cx="6099716" cy="7017306"/>
+            <a:off x="646771" y="189571"/>
+            <a:ext cx="1280607" cy="369332"/>
           </a:xfrm>
           <a:prstGeom prst="rect">
             <a:avLst/>
@@ -3801,325 +5672,14 @@
           <a:noFill/>
         </p:spPr>
         <p:txBody>
-          <a:bodyPr wrap="square">
+          <a:bodyPr wrap="none" rtlCol="0">
             <a:spAutoFit/>
           </a:bodyPr>
           <a:lstStyle/>
           <a:p>
-            <a:endParaRPr lang="en-LK" sz="1000" dirty="0"/>
-          </a:p>
-          <a:p>
-            <a:endParaRPr lang="en-LK" sz="1000" dirty="0"/>
-          </a:p>
-          <a:p>
-            <a:r>
-              <a:rPr lang="en-LK" sz="1000" dirty="0"/>
-              <a:t>class SFTDataset(Dataset):</a:t>
-            </a:r>
-          </a:p>
-          <a:p>
-            <a:r>
-              <a:rPr lang="en-LK" sz="1000" dirty="0"/>
-              <a:t>    def __init__(self, path, tokenizer, seq_len):</a:t>
-            </a:r>
-          </a:p>
-          <a:p>
-            <a:r>
-              <a:rPr lang="en-LK" sz="1000" dirty="0"/>
-              <a:t>        self.data = []</a:t>
-            </a:r>
-          </a:p>
-          <a:p>
-            <a:r>
-              <a:rPr lang="en-LK" sz="1000" dirty="0"/>
-              <a:t>        self.tokenizer = tokenizer</a:t>
-            </a:r>
-          </a:p>
-          <a:p>
-            <a:r>
-              <a:rPr lang="en-LK" sz="1000" dirty="0"/>
-              <a:t>        self.seq_len = seq_len</a:t>
-            </a:r>
-          </a:p>
-          <a:p>
-            <a:endParaRPr lang="en-LK" sz="1000" dirty="0"/>
-          </a:p>
-          <a:p>
-            <a:r>
-              <a:rPr lang="en-LK" sz="1000" dirty="0"/>
-              <a:t>        with open(path, "r") as f:</a:t>
-            </a:r>
-          </a:p>
-          <a:p>
-            <a:r>
-              <a:rPr lang="en-LK" sz="1000" dirty="0"/>
-              <a:t>            for line in f:</a:t>
-            </a:r>
-          </a:p>
-          <a:p>
-            <a:r>
-              <a:rPr lang="en-LK" sz="1000" dirty="0"/>
-              <a:t>                self.data.append(json.loads(line))</a:t>
-            </a:r>
-          </a:p>
-          <a:p>
-            <a:endParaRPr lang="en-LK" sz="1000" dirty="0"/>
-          </a:p>
-          <a:p>
-            <a:r>
-              <a:rPr lang="en-LK" sz="1000" dirty="0"/>
-              <a:t>    def __len__(self):</a:t>
-            </a:r>
-          </a:p>
-          <a:p>
-            <a:r>
-              <a:rPr lang="en-LK" sz="1000" dirty="0"/>
-              <a:t>        return len(self.data)</a:t>
-            </a:r>
-          </a:p>
-          <a:p>
-            <a:endParaRPr lang="en-LK" sz="1000" dirty="0"/>
-          </a:p>
-          <a:p>
-            <a:r>
-              <a:rPr lang="en-LK" sz="1000" dirty="0"/>
-              <a:t>    def __getitem__(self, idx):</a:t>
-            </a:r>
-          </a:p>
-          <a:p>
-            <a:r>
-              <a:rPr lang="en-LK" sz="1000" dirty="0"/>
-              <a:t>        item = self.data[idx]</a:t>
-            </a:r>
-          </a:p>
-          <a:p>
-            <a:endParaRPr lang="en-LK" sz="1000" dirty="0"/>
-          </a:p>
-          <a:p>
-            <a:r>
-              <a:rPr lang="en-LK" sz="1000" dirty="0"/>
-              <a:t>        prompt_ids = self.tokenizer.encode(item["prompt"])</a:t>
-            </a:r>
-          </a:p>
-          <a:p>
-            <a:r>
-              <a:rPr lang="en-LK" sz="1000" dirty="0"/>
-              <a:t>        response_ids = self.tokenizer.encode(item["response"])</a:t>
-            </a:r>
-          </a:p>
-          <a:p>
-            <a:endParaRPr lang="en-LK" sz="1000" dirty="0"/>
-          </a:p>
-          <a:p>
-            <a:r>
-              <a:rPr lang="en-LK" sz="1000" dirty="0"/>
-              <a:t>        tokens = prompt_ids + response_ids</a:t>
-            </a:r>
-          </a:p>
-          <a:p>
-            <a:endParaRPr lang="en-LK" sz="1000" dirty="0"/>
-          </a:p>
-          <a:p>
-            <a:r>
-              <a:rPr lang="en-LK" sz="1000" dirty="0"/>
-              <a:t>        tokens = tokens[:self.seq_len + 1]</a:t>
-            </a:r>
-          </a:p>
-          <a:p>
-            <a:endParaRPr lang="en-LK" sz="1000" dirty="0"/>
-          </a:p>
-          <a:p>
-            <a:r>
-              <a:rPr lang="en-LK" sz="1000" dirty="0"/>
-              <a:t>        pad_id = 0</a:t>
-            </a:r>
-          </a:p>
-          <a:p>
-            <a:r>
-              <a:rPr lang="en-LK" sz="1000" dirty="0"/>
-              <a:t>        pad_len = (self.seq_len + 1) - len(tokens)</a:t>
-            </a:r>
-          </a:p>
-          <a:p>
-            <a:r>
-              <a:rPr lang="en-LK" sz="1000" dirty="0"/>
-              <a:t>        tokens = tokens + [pad_id] * pad_len</a:t>
-            </a:r>
-          </a:p>
-          <a:p>
-            <a:endParaRPr lang="en-LK" sz="1000" dirty="0"/>
-          </a:p>
-          <a:p>
-            <a:r>
-              <a:rPr lang="en-LK" sz="1000" dirty="0"/>
-              <a:t>        x = tokens[:-1]</a:t>
-            </a:r>
-          </a:p>
-          <a:p>
-            <a:r>
-              <a:rPr lang="en-LK" sz="1000" dirty="0"/>
-              <a:t>        y = tokens[1:]</a:t>
-            </a:r>
-          </a:p>
-          <a:p>
-            <a:endParaRPr lang="en-LK" sz="1000" dirty="0"/>
-          </a:p>
-          <a:p>
-            <a:r>
-              <a:rPr lang="en-LK" sz="1000" dirty="0"/>
-              <a:t>        labels = y.copy()</a:t>
-            </a:r>
-          </a:p>
-          <a:p>
-            <a:endParaRPr lang="en-LK" sz="1000" dirty="0"/>
-          </a:p>
-          <a:p>
-            <a:r>
-              <a:rPr lang="en-LK" sz="1000" dirty="0"/>
-              <a:t>        prompt_len = min(len(prompt_ids), self.seq_len)</a:t>
-            </a:r>
-          </a:p>
-          <a:p>
-            <a:r>
-              <a:rPr lang="en-LK" sz="1000" dirty="0"/>
-              <a:t>        mask_len = max(0, prompt_len - 1)</a:t>
-            </a:r>
-          </a:p>
-          <a:p>
-            <a:r>
-              <a:rPr lang="en-LK" sz="1000" dirty="0"/>
-              <a:t>        labels[:mask_len] = [-100] * mask_len</a:t>
-            </a:r>
-          </a:p>
-          <a:p>
-            <a:endParaRPr lang="en-LK" sz="1000" dirty="0"/>
-          </a:p>
-          <a:p>
-            <a:r>
-              <a:rPr lang="en-LK" sz="1000" dirty="0"/>
-              <a:t>        real_len = min(len(prompt_ids) + len(response_ids), self.seq_len + 1) - 1</a:t>
-            </a:r>
-          </a:p>
-          <a:p>
-            <a:r>
-              <a:rPr lang="en-LK" sz="1000" dirty="0"/>
-              <a:t>        labels[real_len:] = [-100] * (self.seq_len - real_len)</a:t>
-            </a:r>
-          </a:p>
-          <a:p>
-            <a:endParaRPr lang="en-LK" sz="1000" dirty="0"/>
-          </a:p>
-          <a:p>
-            <a:r>
-              <a:rPr lang="en-LK" sz="1000" dirty="0"/>
-              <a:t>        return (</a:t>
-            </a:r>
-          </a:p>
-          <a:p>
-            <a:r>
-              <a:rPr lang="en-LK" sz="1000" dirty="0"/>
-              <a:t>            torch.tensor(x, dtype=torch.long),</a:t>
-            </a:r>
-          </a:p>
-          <a:p>
-            <a:r>
-              <a:rPr lang="en-LK" sz="1000" dirty="0"/>
-              <a:t>            torch.tensor(labels, dtype=torch.long)</a:t>
-            </a:r>
-          </a:p>
-          <a:p>
-            <a:r>
-              <a:rPr lang="en-LK" sz="1000" dirty="0"/>
-              <a:t>        )</a:t>
-            </a:r>
-          </a:p>
-        </p:txBody>
-      </p:sp>
-      <p:sp>
-        <p:nvSpPr>
-          <p:cNvPr id="13" name="TextBox 12">
-            <a:extLst>
-              <a:ext uri="{FF2B5EF4-FFF2-40B4-BE49-F238E27FC236}">
-                <a16:creationId xmlns:a16="http://schemas.microsoft.com/office/drawing/2014/main" id="{565671C1-78BB-F3F8-091A-A42A9D5CDE1B}"/>
-              </a:ext>
-            </a:extLst>
-          </p:cNvPr>
-          <p:cNvSpPr txBox="1"/>
-          <p:nvPr/>
-        </p:nvSpPr>
-        <p:spPr>
-          <a:xfrm>
-            <a:off x="518531" y="705718"/>
-            <a:ext cx="6956474" cy="1785104"/>
-          </a:xfrm>
-          <a:prstGeom prst="rect">
-            <a:avLst/>
-          </a:prstGeom>
-          <a:noFill/>
-        </p:spPr>
-        <p:txBody>
-          <a:bodyPr wrap="square">
-            <a:spAutoFit/>
-          </a:bodyPr>
-          <a:lstStyle/>
-          <a:p>
-            <a:r>
-              <a:rPr lang="en-LK" sz="1000" dirty="0"/>
-              <a:t>import torch</a:t>
-            </a:r>
-          </a:p>
-          <a:p>
-            <a:r>
-              <a:rPr lang="en-LK" sz="1000" dirty="0"/>
-              <a:t>import torch.nn.functional as F</a:t>
-            </a:r>
-          </a:p>
-          <a:p>
-            <a:r>
-              <a:rPr lang="en-LK" sz="1000" dirty="0"/>
-              <a:t>import json</a:t>
-            </a:r>
-          </a:p>
-          <a:p>
-            <a:r>
-              <a:rPr lang="en-LK" sz="1000" dirty="0"/>
-              <a:t>import os</a:t>
-            </a:r>
-          </a:p>
-          <a:p>
-            <a:r>
-              <a:rPr lang="en-LK" sz="1000" dirty="0"/>
-              <a:t>import time</a:t>
-            </a:r>
-          </a:p>
-          <a:p>
-            <a:endParaRPr lang="en-LK" sz="1000" dirty="0"/>
-          </a:p>
-          <a:p>
-            <a:r>
-              <a:rPr lang="en-LK" sz="1000" dirty="0"/>
-              <a:t>from torch.utils.data import Dataset, DataLoader</a:t>
-            </a:r>
-          </a:p>
-          <a:p>
-            <a:endParaRPr lang="en-LK" sz="1000" dirty="0"/>
-          </a:p>
-          <a:p>
-            <a:r>
-              <a:rPr lang="en-LK" sz="1000" dirty="0"/>
-              <a:t>from config import GPTConfig</a:t>
-            </a:r>
-          </a:p>
-          <a:p>
-            <a:r>
-              <a:rPr lang="en-LK" sz="1000" dirty="0"/>
-              <a:t>from model import GPT</a:t>
-            </a:r>
-          </a:p>
-          <a:p>
-            <a:r>
-              <a:rPr lang="en-LK" sz="1000" dirty="0"/>
-              <a:t>from tokenizer import Tokenizer</a:t>
+            <a:r>
+              <a:rPr lang="en-LK" dirty="0"/>
+              <a:t>Pure logic -</a:t>
             </a:r>
           </a:p>
         </p:txBody>
@@ -4127,7 +5687,7 @@
     </p:spTree>
     <p:extLst>
       <p:ext uri="{BB962C8B-B14F-4D97-AF65-F5344CB8AC3E}">
-        <p14:creationId xmlns:p14="http://schemas.microsoft.com/office/powerpoint/2010/main" val="3462763545"/>
+        <p14:creationId xmlns:p14="http://schemas.microsoft.com/office/powerpoint/2010/main" val="3498353759"/>
       </p:ext>
     </p:extLst>
   </p:cSld>
@@ -4156,10 +5716,10 @@
       </p:grpSpPr>
       <p:sp>
         <p:nvSpPr>
-          <p:cNvPr id="6" name="TextBox 5">
-            <a:extLst>
-              <a:ext uri="{FF2B5EF4-FFF2-40B4-BE49-F238E27FC236}">
-                <a16:creationId xmlns:a16="http://schemas.microsoft.com/office/drawing/2014/main" id="{C9CE574C-AEB6-E784-D75D-2BF1D3942C5B}"/>
+          <p:cNvPr id="5" name="TextBox 4">
+            <a:extLst>
+              <a:ext uri="{FF2B5EF4-FFF2-40B4-BE49-F238E27FC236}">
+                <a16:creationId xmlns:a16="http://schemas.microsoft.com/office/drawing/2014/main" id="{6DC971D7-6B19-BDAA-C1B2-9AF9FA1FD74C}"/>
               </a:ext>
             </a:extLst>
           </p:cNvPr>
@@ -4168,8 +5728,8 @@
         </p:nvSpPr>
         <p:spPr>
           <a:xfrm>
-            <a:off x="228599" y="0"/>
-            <a:ext cx="12826218" cy="5632311"/>
+            <a:off x="518531" y="88540"/>
+            <a:ext cx="6099716" cy="369332"/>
           </a:xfrm>
           <a:prstGeom prst="rect">
             <a:avLst/>
@@ -4182,199 +5742,25 @@
           </a:bodyPr>
           <a:lstStyle/>
           <a:p>
-            <a:endParaRPr lang="en-LK" sz="1000" dirty="0"/>
-          </a:p>
-          <a:p>
-            <a:endParaRPr lang="en-LK" sz="1000" dirty="0"/>
-          </a:p>
-          <a:p>
-            <a:r>
-              <a:rPr lang="en-LK" sz="1000" dirty="0"/>
-              <a:t>def get_loader(path, tokenizer, seq_len, batch_size):</a:t>
-            </a:r>
-          </a:p>
-          <a:p>
-            <a:r>
-              <a:rPr lang="en-LK" sz="1000" dirty="0"/>
-              <a:t>    dataset = SFTDataset(path, tokenizer, seq_len)</a:t>
-            </a:r>
-          </a:p>
-          <a:p>
-            <a:endParaRPr lang="en-LK" sz="1000" dirty="0"/>
-          </a:p>
-          <a:p>
-            <a:r>
-              <a:rPr lang="en-LK" sz="1000" dirty="0"/>
-              <a:t>    return DataLoader(</a:t>
-            </a:r>
-          </a:p>
-          <a:p>
-            <a:r>
-              <a:rPr lang="en-LK" sz="1000" dirty="0"/>
-              <a:t>        dataset,</a:t>
-            </a:r>
-          </a:p>
-          <a:p>
-            <a:r>
-              <a:rPr lang="en-LK" sz="1000" dirty="0"/>
-              <a:t>        batch_size=batch_size,</a:t>
-            </a:r>
-          </a:p>
-          <a:p>
-            <a:r>
-              <a:rPr lang="en-LK" sz="1000" dirty="0"/>
-              <a:t>        shuffle=True,</a:t>
-            </a:r>
-          </a:p>
-          <a:p>
-            <a:r>
-              <a:rPr lang="en-LK" sz="1000" dirty="0"/>
-              <a:t>        drop_last=True</a:t>
-            </a:r>
-          </a:p>
-          <a:p>
-            <a:r>
-              <a:rPr lang="en-LK" sz="1000" dirty="0"/>
-              <a:t>    )</a:t>
-            </a:r>
-          </a:p>
-          <a:p>
-            <a:endParaRPr lang="en-LK" sz="1000" dirty="0"/>
-          </a:p>
-          <a:p>
-            <a:endParaRPr lang="en-LK" sz="1000" dirty="0"/>
-          </a:p>
-          <a:p>
-            <a:r>
-              <a:rPr lang="en-LK" sz="1000" dirty="0"/>
-              <a:t>cfg = GPTConfig(</a:t>
-            </a:r>
-          </a:p>
-          <a:p>
-            <a:r>
-              <a:rPr lang="en-LK" sz="1000" dirty="0"/>
-              <a:t>    vocab_size = 50257,</a:t>
-            </a:r>
-          </a:p>
-          <a:p>
-            <a:r>
-              <a:rPr lang="en-LK" sz="1000" dirty="0"/>
-              <a:t>    seq_len    = 128,</a:t>
-            </a:r>
-          </a:p>
-          <a:p>
-            <a:r>
-              <a:rPr lang="en-LK" sz="1000" dirty="0"/>
-              <a:t>    d_model    = 128,</a:t>
-            </a:r>
-          </a:p>
-          <a:p>
-            <a:r>
-              <a:rPr lang="en-LK" sz="1000" dirty="0"/>
-              <a:t>    n_heads    = 8,</a:t>
-            </a:r>
-          </a:p>
-          <a:p>
-            <a:r>
-              <a:rPr lang="en-LK" sz="1000" dirty="0"/>
-              <a:t>    n_layers   = 4,</a:t>
-            </a:r>
-          </a:p>
-          <a:p>
-            <a:r>
-              <a:rPr lang="en-LK" sz="1000" dirty="0"/>
-              <a:t>    d_ff       = 512,</a:t>
-            </a:r>
-          </a:p>
-          <a:p>
-            <a:r>
-              <a:rPr lang="en-LK" sz="1000" dirty="0"/>
-              <a:t>    dropout    = 0.1,</a:t>
-            </a:r>
-          </a:p>
-          <a:p>
-            <a:r>
-              <a:rPr lang="en-LK" sz="1000" dirty="0"/>
-              <a:t>    batch_size = 16,</a:t>
-            </a:r>
-          </a:p>
-          <a:p>
-            <a:r>
-              <a:rPr lang="en-LK" sz="1000" dirty="0"/>
-              <a:t>    lr         = 8e-3,</a:t>
-            </a:r>
-          </a:p>
-          <a:p>
-            <a:r>
-              <a:rPr lang="en-LK" sz="1000" dirty="0"/>
-              <a:t>    max_iters  = 10000,</a:t>
-            </a:r>
-          </a:p>
-          <a:p>
-            <a:r>
-              <a:rPr lang="en-LK" sz="1000" dirty="0"/>
-              <a:t>)</a:t>
-            </a:r>
-          </a:p>
-          <a:p>
-            <a:endParaRPr lang="en-LK" sz="1000" dirty="0"/>
-          </a:p>
-          <a:p>
-            <a:r>
-              <a:rPr lang="en-LK" sz="1000" dirty="0"/>
-              <a:t>device = cfg.device</a:t>
-            </a:r>
-          </a:p>
-          <a:p>
-            <a:endParaRPr lang="en-LK" sz="1000" dirty="0"/>
-          </a:p>
-          <a:p>
-            <a:r>
-              <a:rPr lang="en-LK" sz="1000" dirty="0"/>
-              <a:t>tokenizer = Tokenizer()</a:t>
-            </a:r>
-          </a:p>
-          <a:p>
-            <a:endParaRPr lang="en-LK" sz="1000" dirty="0"/>
-          </a:p>
-          <a:p>
-            <a:r>
-              <a:rPr lang="en-LK" sz="1000" dirty="0"/>
-              <a:t>model = GPT(cfg).to(device)</a:t>
-            </a:r>
-          </a:p>
-          <a:p>
-            <a:endParaRPr lang="en-LK" sz="1000" dirty="0"/>
-          </a:p>
-          <a:p>
-            <a:r>
-              <a:rPr lang="en-LK" sz="1000" dirty="0"/>
-              <a:t>ckpt = torch.load("checkpoints/gpt_step_6000.pt", map_location=device)</a:t>
-            </a:r>
-          </a:p>
-          <a:p>
-            <a:r>
-              <a:rPr lang="en-LK" sz="1000" dirty="0"/>
-              <a:t>model.load_state_dict(ckpt["model"])</a:t>
-            </a:r>
-          </a:p>
-          <a:p>
-            <a:r>
-              <a:rPr lang="en-LK" sz="1000" dirty="0"/>
-              <a:t>print("Loaded pretrained model")</a:t>
-            </a:r>
-          </a:p>
-          <a:p>
-            <a:endParaRPr lang="en-LK" sz="1000" dirty="0"/>
-          </a:p>
-        </p:txBody>
-      </p:sp>
-      <p:sp>
-        <p:nvSpPr>
-          <p:cNvPr id="9" name="TextBox 8">
-            <a:extLst>
-              <a:ext uri="{FF2B5EF4-FFF2-40B4-BE49-F238E27FC236}">
-                <a16:creationId xmlns:a16="http://schemas.microsoft.com/office/drawing/2014/main" id="{C5041B14-51DE-F3F2-B134-D312FBEFAFCA}"/>
+            <a:pPr>
+              <a:buNone/>
+            </a:pPr>
+            <a:r>
+              <a:rPr lang="en-GB" b="1" dirty="0" err="1">
+                <a:latin typeface="Courier New" panose="02070309020205020404" pitchFamily="49" charset="0"/>
+              </a:rPr>
+              <a:t>sft.py</a:t>
+            </a:r>
+            <a:endParaRPr lang="en-GB" b="1" dirty="0"/>
+          </a:p>
+        </p:txBody>
+      </p:sp>
+      <p:sp>
+        <p:nvSpPr>
+          <p:cNvPr id="11" name="TextBox 10">
+            <a:extLst>
+              <a:ext uri="{FF2B5EF4-FFF2-40B4-BE49-F238E27FC236}">
+                <a16:creationId xmlns:a16="http://schemas.microsoft.com/office/drawing/2014/main" id="{C0EACF66-B793-7AD0-0119-A03B5969B876}"/>
               </a:ext>
             </a:extLst>
           </p:cNvPr>
@@ -4383,8 +5769,8 @@
         </p:nvSpPr>
         <p:spPr>
           <a:xfrm>
-            <a:off x="5077707" y="186342"/>
-            <a:ext cx="6956474" cy="2246769"/>
+            <a:off x="4387262" y="-159306"/>
+            <a:ext cx="6099716" cy="7017306"/>
           </a:xfrm>
           <a:prstGeom prst="rect">
             <a:avLst/>
@@ -4400,78 +5786,317 @@
             <a:endParaRPr lang="en-LK" sz="1000" dirty="0"/>
           </a:p>
           <a:p>
-            <a:r>
-              <a:rPr lang="en-LK" sz="1000" dirty="0"/>
-              <a:t>optimizer = torch.optim.AdamW(</a:t>
-            </a:r>
-          </a:p>
-          <a:p>
-            <a:r>
-              <a:rPr lang="en-LK" sz="1000" dirty="0"/>
-              <a:t>    model.parameters(),</a:t>
-            </a:r>
-          </a:p>
-          <a:p>
-            <a:r>
-              <a:rPr lang="en-LK" sz="1000" dirty="0"/>
-              <a:t>    lr=cfg.lr,</a:t>
-            </a:r>
-          </a:p>
-          <a:p>
-            <a:r>
-              <a:rPr lang="en-LK" sz="1000" dirty="0"/>
-              <a:t>    weight_decay=0.1,</a:t>
-            </a:r>
-          </a:p>
-          <a:p>
-            <a:r>
-              <a:rPr lang="en-LK" sz="1000" dirty="0"/>
-              <a:t>    betas=(0.9, 0.95),</a:t>
-            </a:r>
-          </a:p>
-          <a:p>
-            <a:r>
-              <a:rPr lang="en-LK" sz="1000" dirty="0"/>
-              <a:t>)</a:t>
-            </a:r>
-          </a:p>
-          <a:p>
             <a:endParaRPr lang="en-LK" sz="1000" dirty="0"/>
           </a:p>
           <a:p>
             <a:r>
               <a:rPr lang="en-LK" sz="1000" dirty="0"/>
-              <a:t>loader = get_loader(</a:t>
-            </a:r>
-          </a:p>
-          <a:p>
-            <a:r>
-              <a:rPr lang="en-LK" sz="1000" dirty="0"/>
-              <a:t>    "sft_data.jsonl",</a:t>
-            </a:r>
-          </a:p>
-          <a:p>
-            <a:r>
-              <a:rPr lang="en-LK" sz="1000" dirty="0"/>
-              <a:t>    tokenizer,</a:t>
-            </a:r>
-          </a:p>
-          <a:p>
-            <a:r>
-              <a:rPr lang="en-LK" sz="1000" dirty="0"/>
-              <a:t>    cfg.seq_len,</a:t>
-            </a:r>
-          </a:p>
-          <a:p>
-            <a:r>
-              <a:rPr lang="en-LK" sz="1000" dirty="0"/>
-              <a:t>    cfg.batch_size</a:t>
-            </a:r>
-          </a:p>
-          <a:p>
-            <a:r>
-              <a:rPr lang="en-LK" sz="1000" dirty="0"/>
-              <a:t>)</a:t>
+              <a:t>class SFTDataset(Dataset):</a:t>
+            </a:r>
+          </a:p>
+          <a:p>
+            <a:r>
+              <a:rPr lang="en-LK" sz="1000" dirty="0"/>
+              <a:t>    def __init__(self, path, tokenizer, seq_len):</a:t>
+            </a:r>
+          </a:p>
+          <a:p>
+            <a:r>
+              <a:rPr lang="en-LK" sz="1000" dirty="0"/>
+              <a:t>        self.data = []</a:t>
+            </a:r>
+          </a:p>
+          <a:p>
+            <a:r>
+              <a:rPr lang="en-LK" sz="1000" dirty="0"/>
+              <a:t>        self.tokenizer = tokenizer</a:t>
+            </a:r>
+          </a:p>
+          <a:p>
+            <a:r>
+              <a:rPr lang="en-LK" sz="1000" dirty="0"/>
+              <a:t>        self.seq_len = seq_len</a:t>
+            </a:r>
+          </a:p>
+          <a:p>
+            <a:endParaRPr lang="en-LK" sz="1000" dirty="0"/>
+          </a:p>
+          <a:p>
+            <a:r>
+              <a:rPr lang="en-LK" sz="1000" dirty="0"/>
+              <a:t>        with open(path, "r") as f:</a:t>
+            </a:r>
+          </a:p>
+          <a:p>
+            <a:r>
+              <a:rPr lang="en-LK" sz="1000" dirty="0"/>
+              <a:t>            for line in f:</a:t>
+            </a:r>
+          </a:p>
+          <a:p>
+            <a:r>
+              <a:rPr lang="en-LK" sz="1000" dirty="0"/>
+              <a:t>                self.data.append(json.loads(line))</a:t>
+            </a:r>
+          </a:p>
+          <a:p>
+            <a:endParaRPr lang="en-LK" sz="1000" dirty="0"/>
+          </a:p>
+          <a:p>
+            <a:r>
+              <a:rPr lang="en-LK" sz="1000" dirty="0"/>
+              <a:t>    def __len__(self):</a:t>
+            </a:r>
+          </a:p>
+          <a:p>
+            <a:r>
+              <a:rPr lang="en-LK" sz="1000" dirty="0"/>
+              <a:t>        return len(self.data)</a:t>
+            </a:r>
+          </a:p>
+          <a:p>
+            <a:endParaRPr lang="en-LK" sz="1000" dirty="0"/>
+          </a:p>
+          <a:p>
+            <a:r>
+              <a:rPr lang="en-LK" sz="1000" dirty="0"/>
+              <a:t>    def __getitem__(self, idx):</a:t>
+            </a:r>
+          </a:p>
+          <a:p>
+            <a:r>
+              <a:rPr lang="en-LK" sz="1000" dirty="0"/>
+              <a:t>        item = self.data[idx]</a:t>
+            </a:r>
+          </a:p>
+          <a:p>
+            <a:endParaRPr lang="en-LK" sz="1000" dirty="0"/>
+          </a:p>
+          <a:p>
+            <a:r>
+              <a:rPr lang="en-LK" sz="1000" dirty="0"/>
+              <a:t>        prompt_ids = self.tokenizer.encode(item["prompt"])</a:t>
+            </a:r>
+          </a:p>
+          <a:p>
+            <a:r>
+              <a:rPr lang="en-LK" sz="1000" dirty="0"/>
+              <a:t>        response_ids = self.tokenizer.encode(item["response"])</a:t>
+            </a:r>
+          </a:p>
+          <a:p>
+            <a:endParaRPr lang="en-LK" sz="1000" dirty="0"/>
+          </a:p>
+          <a:p>
+            <a:r>
+              <a:rPr lang="en-LK" sz="1000" dirty="0"/>
+              <a:t>        tokens = prompt_ids + response_ids</a:t>
+            </a:r>
+          </a:p>
+          <a:p>
+            <a:endParaRPr lang="en-LK" sz="1000" dirty="0"/>
+          </a:p>
+          <a:p>
+            <a:r>
+              <a:rPr lang="en-LK" sz="1000" dirty="0"/>
+              <a:t>        tokens = tokens[:self.seq_len + 1]</a:t>
+            </a:r>
+          </a:p>
+          <a:p>
+            <a:endParaRPr lang="en-LK" sz="1000" dirty="0"/>
+          </a:p>
+          <a:p>
+            <a:r>
+              <a:rPr lang="en-LK" sz="1000" dirty="0"/>
+              <a:t>        pad_id = 0</a:t>
+            </a:r>
+          </a:p>
+          <a:p>
+            <a:r>
+              <a:rPr lang="en-LK" sz="1000" dirty="0"/>
+              <a:t>        pad_len = (self.seq_len + 1) - len(tokens)</a:t>
+            </a:r>
+          </a:p>
+          <a:p>
+            <a:r>
+              <a:rPr lang="en-LK" sz="1000" dirty="0"/>
+              <a:t>        tokens = tokens + [pad_id] * pad_len</a:t>
+            </a:r>
+          </a:p>
+          <a:p>
+            <a:endParaRPr lang="en-LK" sz="1000" dirty="0"/>
+          </a:p>
+          <a:p>
+            <a:r>
+              <a:rPr lang="en-LK" sz="1000" dirty="0"/>
+              <a:t>        x = tokens[:-1]</a:t>
+            </a:r>
+          </a:p>
+          <a:p>
+            <a:r>
+              <a:rPr lang="en-LK" sz="1000" dirty="0"/>
+              <a:t>        y = tokens[1:]</a:t>
+            </a:r>
+          </a:p>
+          <a:p>
+            <a:endParaRPr lang="en-LK" sz="1000" dirty="0"/>
+          </a:p>
+          <a:p>
+            <a:r>
+              <a:rPr lang="en-LK" sz="1000" dirty="0"/>
+              <a:t>        labels = y.copy()</a:t>
+            </a:r>
+          </a:p>
+          <a:p>
+            <a:endParaRPr lang="en-LK" sz="1000" dirty="0"/>
+          </a:p>
+          <a:p>
+            <a:r>
+              <a:rPr lang="en-LK" sz="1000" dirty="0"/>
+              <a:t>        prompt_len = min(len(prompt_ids), self.seq_len)</a:t>
+            </a:r>
+          </a:p>
+          <a:p>
+            <a:r>
+              <a:rPr lang="en-LK" sz="1000" dirty="0"/>
+              <a:t>        mask_len = max(0, prompt_len - 1)</a:t>
+            </a:r>
+          </a:p>
+          <a:p>
+            <a:r>
+              <a:rPr lang="en-LK" sz="1000" dirty="0"/>
+              <a:t>        labels[:mask_len] = [-100] * mask_len</a:t>
+            </a:r>
+          </a:p>
+          <a:p>
+            <a:endParaRPr lang="en-LK" sz="1000" dirty="0"/>
+          </a:p>
+          <a:p>
+            <a:r>
+              <a:rPr lang="en-LK" sz="1000" dirty="0"/>
+              <a:t>        real_len = min(len(prompt_ids) + len(response_ids), self.seq_len + 1) - 1</a:t>
+            </a:r>
+          </a:p>
+          <a:p>
+            <a:r>
+              <a:rPr lang="en-LK" sz="1000" dirty="0"/>
+              <a:t>        labels[real_len:] = [-100] * (self.seq_len - real_len)</a:t>
+            </a:r>
+          </a:p>
+          <a:p>
+            <a:endParaRPr lang="en-LK" sz="1000" dirty="0"/>
+          </a:p>
+          <a:p>
+            <a:r>
+              <a:rPr lang="en-LK" sz="1000" dirty="0"/>
+              <a:t>        return (</a:t>
+            </a:r>
+          </a:p>
+          <a:p>
+            <a:r>
+              <a:rPr lang="en-LK" sz="1000" dirty="0"/>
+              <a:t>            torch.tensor(x, dtype=torch.long),</a:t>
+            </a:r>
+          </a:p>
+          <a:p>
+            <a:r>
+              <a:rPr lang="en-LK" sz="1000" dirty="0"/>
+              <a:t>            torch.tensor(labels, dtype=torch.long)</a:t>
+            </a:r>
+          </a:p>
+          <a:p>
+            <a:r>
+              <a:rPr lang="en-LK" sz="1000" dirty="0"/>
+              <a:t>        )</a:t>
+            </a:r>
+          </a:p>
+        </p:txBody>
+      </p:sp>
+      <p:sp>
+        <p:nvSpPr>
+          <p:cNvPr id="13" name="TextBox 12">
+            <a:extLst>
+              <a:ext uri="{FF2B5EF4-FFF2-40B4-BE49-F238E27FC236}">
+                <a16:creationId xmlns:a16="http://schemas.microsoft.com/office/drawing/2014/main" id="{565671C1-78BB-F3F8-091A-A42A9D5CDE1B}"/>
+              </a:ext>
+            </a:extLst>
+          </p:cNvPr>
+          <p:cNvSpPr txBox="1"/>
+          <p:nvPr/>
+        </p:nvSpPr>
+        <p:spPr>
+          <a:xfrm>
+            <a:off x="518531" y="705718"/>
+            <a:ext cx="6956474" cy="1785104"/>
+          </a:xfrm>
+          <a:prstGeom prst="rect">
+            <a:avLst/>
+          </a:prstGeom>
+          <a:noFill/>
+        </p:spPr>
+        <p:txBody>
+          <a:bodyPr wrap="square">
+            <a:spAutoFit/>
+          </a:bodyPr>
+          <a:lstStyle/>
+          <a:p>
+            <a:r>
+              <a:rPr lang="en-LK" sz="1000" dirty="0"/>
+              <a:t>import torch</a:t>
+            </a:r>
+          </a:p>
+          <a:p>
+            <a:r>
+              <a:rPr lang="en-LK" sz="1000" dirty="0"/>
+              <a:t>import torch.nn.functional as F</a:t>
+            </a:r>
+          </a:p>
+          <a:p>
+            <a:r>
+              <a:rPr lang="en-LK" sz="1000" dirty="0"/>
+              <a:t>import json</a:t>
+            </a:r>
+          </a:p>
+          <a:p>
+            <a:r>
+              <a:rPr lang="en-LK" sz="1000" dirty="0"/>
+              <a:t>import os</a:t>
+            </a:r>
+          </a:p>
+          <a:p>
+            <a:r>
+              <a:rPr lang="en-LK" sz="1000" dirty="0"/>
+              <a:t>import time</a:t>
+            </a:r>
+          </a:p>
+          <a:p>
+            <a:endParaRPr lang="en-LK" sz="1000" dirty="0"/>
+          </a:p>
+          <a:p>
+            <a:r>
+              <a:rPr lang="en-LK" sz="1000" dirty="0"/>
+              <a:t>from torch.utils.data import Dataset, DataLoader</a:t>
+            </a:r>
+          </a:p>
+          <a:p>
+            <a:endParaRPr lang="en-LK" sz="1000" dirty="0"/>
+          </a:p>
+          <a:p>
+            <a:r>
+              <a:rPr lang="en-LK" sz="1000" dirty="0"/>
+              <a:t>from config import GPTConfig</a:t>
+            </a:r>
+          </a:p>
+          <a:p>
+            <a:r>
+              <a:rPr lang="en-LK" sz="1000" dirty="0"/>
+              <a:t>from model import GPT</a:t>
+            </a:r>
+          </a:p>
+          <a:p>
+            <a:r>
+              <a:rPr lang="en-LK" sz="1000" dirty="0"/>
+              <a:t>from tokenizer import Tokenizer</a:t>
             </a:r>
           </a:p>
         </p:txBody>
@@ -4479,7 +6104,7 @@
     </p:spTree>
     <p:extLst>
       <p:ext uri="{BB962C8B-B14F-4D97-AF65-F5344CB8AC3E}">
-        <p14:creationId xmlns:p14="http://schemas.microsoft.com/office/powerpoint/2010/main" val="3336233075"/>
+        <p14:creationId xmlns:p14="http://schemas.microsoft.com/office/powerpoint/2010/main" val="3462763545"/>
       </p:ext>
     </p:extLst>
   </p:cSld>
@@ -4508,10 +6133,10 @@
       </p:grpSpPr>
       <p:sp>
         <p:nvSpPr>
-          <p:cNvPr id="4" name="TextBox 3">
-            <a:extLst>
-              <a:ext uri="{FF2B5EF4-FFF2-40B4-BE49-F238E27FC236}">
-                <a16:creationId xmlns:a16="http://schemas.microsoft.com/office/drawing/2014/main" id="{844D67CC-80ED-A82E-BB67-6C67CFC37DD1}"/>
+          <p:cNvPr id="6" name="TextBox 5">
+            <a:extLst>
+              <a:ext uri="{FF2B5EF4-FFF2-40B4-BE49-F238E27FC236}">
+                <a16:creationId xmlns:a16="http://schemas.microsoft.com/office/drawing/2014/main" id="{C9CE574C-AEB6-E784-D75D-2BF1D3942C5B}"/>
               </a:ext>
             </a:extLst>
           </p:cNvPr>
@@ -4520,8 +6145,8 @@
         </p:nvSpPr>
         <p:spPr>
           <a:xfrm>
-            <a:off x="438000" y="0"/>
-            <a:ext cx="10697021" cy="5940088"/>
+            <a:off x="228599" y="0"/>
+            <a:ext cx="12826218" cy="5632311"/>
           </a:xfrm>
           <a:prstGeom prst="rect">
             <a:avLst/>
@@ -4542,25 +6167,13 @@
           <a:p>
             <a:r>
               <a:rPr lang="en-LK" sz="1000" dirty="0"/>
-              <a:t>def train():</a:t>
-            </a:r>
-          </a:p>
-          <a:p>
-            <a:r>
-              <a:rPr lang="en-LK" sz="1000" dirty="0"/>
-              <a:t>    model.train()</a:t>
-            </a:r>
-          </a:p>
-          <a:p>
-            <a:r>
-              <a:rPr lang="en-LK" sz="1000" dirty="0"/>
-              <a:t>    step = 0</a:t>
-            </a:r>
-          </a:p>
-          <a:p>
-            <a:r>
-              <a:rPr lang="en-LK" sz="1000" dirty="0"/>
-              <a:t>    start_time = time.time()</a:t>
+              <a:t>def get_loader(path, tokenizer, seq_len, batch_size):</a:t>
+            </a:r>
+          </a:p>
+          <a:p>
+            <a:r>
+              <a:rPr lang="en-LK" sz="1000" dirty="0"/>
+              <a:t>    dataset = SFTDataset(path, tokenizer, seq_len)</a:t>
             </a:r>
           </a:p>
           <a:p>
@@ -4569,37 +6182,115 @@
           <a:p>
             <a:r>
               <a:rPr lang="en-LK" sz="1000" dirty="0"/>
-              <a:t>    for epoch in range(1000):</a:t>
-            </a:r>
-          </a:p>
-          <a:p>
-            <a:r>
-              <a:rPr lang="en-LK" sz="1000" dirty="0"/>
-              <a:t>        for x, y in loader:</a:t>
+              <a:t>    return DataLoader(</a:t>
+            </a:r>
+          </a:p>
+          <a:p>
+            <a:r>
+              <a:rPr lang="en-LK" sz="1000" dirty="0"/>
+              <a:t>        dataset,</a:t>
+            </a:r>
+          </a:p>
+          <a:p>
+            <a:r>
+              <a:rPr lang="en-LK" sz="1000" dirty="0"/>
+              <a:t>        batch_size=batch_size,</a:t>
+            </a:r>
+          </a:p>
+          <a:p>
+            <a:r>
+              <a:rPr lang="en-LK" sz="1000" dirty="0"/>
+              <a:t>        shuffle=True,</a:t>
+            </a:r>
+          </a:p>
+          <a:p>
+            <a:r>
+              <a:rPr lang="en-LK" sz="1000" dirty="0"/>
+              <a:t>        drop_last=True</a:t>
+            </a:r>
+          </a:p>
+          <a:p>
+            <a:r>
+              <a:rPr lang="en-LK" sz="1000" dirty="0"/>
+              <a:t>    )</a:t>
             </a:r>
           </a:p>
           <a:p>
             <a:endParaRPr lang="en-LK" sz="1000" dirty="0"/>
           </a:p>
           <a:p>
-            <a:r>
-              <a:rPr lang="en-LK" sz="1000" dirty="0"/>
-              <a:t>            x = x.to(device)</a:t>
-            </a:r>
-          </a:p>
-          <a:p>
-            <a:r>
-              <a:rPr lang="en-LK" sz="1000" dirty="0"/>
-              <a:t>            y = y.to(device)</a:t>
-            </a:r>
-          </a:p>
-          <a:p>
             <a:endParaRPr lang="en-LK" sz="1000" dirty="0"/>
           </a:p>
           <a:p>
             <a:r>
               <a:rPr lang="en-LK" sz="1000" dirty="0"/>
-              <a:t>            logits = model(x)</a:t>
+              <a:t>cfg = GPTConfig(</a:t>
+            </a:r>
+          </a:p>
+          <a:p>
+            <a:r>
+              <a:rPr lang="en-LK" sz="1000" dirty="0"/>
+              <a:t>    vocab_size = 50257,</a:t>
+            </a:r>
+          </a:p>
+          <a:p>
+            <a:r>
+              <a:rPr lang="en-LK" sz="1000" dirty="0"/>
+              <a:t>    seq_len    = 128,</a:t>
+            </a:r>
+          </a:p>
+          <a:p>
+            <a:r>
+              <a:rPr lang="en-LK" sz="1000" dirty="0"/>
+              <a:t>    d_model    = 128,</a:t>
+            </a:r>
+          </a:p>
+          <a:p>
+            <a:r>
+              <a:rPr lang="en-LK" sz="1000" dirty="0"/>
+              <a:t>    n_heads    = 8,</a:t>
+            </a:r>
+          </a:p>
+          <a:p>
+            <a:r>
+              <a:rPr lang="en-LK" sz="1000" dirty="0"/>
+              <a:t>    n_layers   = 4,</a:t>
+            </a:r>
+          </a:p>
+          <a:p>
+            <a:r>
+              <a:rPr lang="en-LK" sz="1000" dirty="0"/>
+              <a:t>    d_ff       = 512,</a:t>
+            </a:r>
+          </a:p>
+          <a:p>
+            <a:r>
+              <a:rPr lang="en-LK" sz="1000" dirty="0"/>
+              <a:t>    dropout    = 0.1,</a:t>
+            </a:r>
+          </a:p>
+          <a:p>
+            <a:r>
+              <a:rPr lang="en-LK" sz="1000" dirty="0"/>
+              <a:t>    batch_size = 16,</a:t>
+            </a:r>
+          </a:p>
+          <a:p>
+            <a:r>
+              <a:rPr lang="en-LK" sz="1000" dirty="0"/>
+              <a:t>    lr         = 8e-3,</a:t>
+            </a:r>
+          </a:p>
+          <a:p>
+            <a:r>
+              <a:rPr lang="en-LK" sz="1000" dirty="0"/>
+              <a:t>    max_iters  = 10000,</a:t>
+            </a:r>
+          </a:p>
+          <a:p>
+            <a:r>
+              <a:rPr lang="en-LK" sz="1000" dirty="0"/>
+              <a:t>)</a:t>
             </a:r>
           </a:p>
           <a:p>
@@ -4608,31 +6299,7 @@
           <a:p>
             <a:r>
               <a:rPr lang="en-LK" sz="1000" dirty="0"/>
-              <a:t>            loss = F.cross_entropy(</a:t>
-            </a:r>
-          </a:p>
-          <a:p>
-            <a:r>
-              <a:rPr lang="en-LK" sz="1000" dirty="0"/>
-              <a:t>                logits.view(-1, logits.size(-1)),</a:t>
-            </a:r>
-          </a:p>
-          <a:p>
-            <a:r>
-              <a:rPr lang="en-LK" sz="1000" dirty="0"/>
-              <a:t>                y.view(-1),</a:t>
-            </a:r>
-          </a:p>
-          <a:p>
-            <a:r>
-              <a:rPr lang="en-LK" sz="1000" dirty="0"/>
-              <a:t>                ignore_index=-100</a:t>
-            </a:r>
-          </a:p>
-          <a:p>
-            <a:r>
-              <a:rPr lang="en-LK" sz="1000" dirty="0"/>
-              <a:t>            )</a:t>
+              <a:t>device = cfg.device</a:t>
             </a:r>
           </a:p>
           <a:p>
@@ -4641,13 +6308,7 @@
           <a:p>
             <a:r>
               <a:rPr lang="en-LK" sz="1000" dirty="0"/>
-              <a:t>            optimizer.zero_grad()</a:t>
-            </a:r>
-          </a:p>
-          <a:p>
-            <a:r>
-              <a:rPr lang="en-LK" sz="1000" dirty="0"/>
-              <a:t>            loss.backward()</a:t>
+              <a:t>tokenizer = Tokenizer()</a:t>
             </a:r>
           </a:p>
           <a:p>
@@ -4656,7 +6317,7 @@
           <a:p>
             <a:r>
               <a:rPr lang="en-LK" sz="1000" dirty="0"/>
-              <a:t>            torch.nn.utils.clip_grad_norm_(model.parameters(), 1.0)</a:t>
+              <a:t>model = GPT(cfg).to(device)</a:t>
             </a:r>
           </a:p>
           <a:p>
@@ -4665,68 +6326,32 @@
           <a:p>
             <a:r>
               <a:rPr lang="en-LK" sz="1000" dirty="0"/>
-              <a:t>            optimizer.step()</a:t>
+              <a:t>ckpt = torch.load("checkpoints/gpt_step_6000.pt", map_location=device)</a:t>
+            </a:r>
+          </a:p>
+          <a:p>
+            <a:r>
+              <a:rPr lang="en-LK" sz="1000" dirty="0"/>
+              <a:t>model.load_state_dict(ckpt["model"])</a:t>
+            </a:r>
+          </a:p>
+          <a:p>
+            <a:r>
+              <a:rPr lang="en-LK" sz="1000" dirty="0"/>
+              <a:t>print("Loaded pretrained model")</a:t>
             </a:r>
           </a:p>
           <a:p>
             <a:endParaRPr lang="en-LK" sz="1000" dirty="0"/>
           </a:p>
-          <a:p>
-            <a:r>
-              <a:rPr lang="en-LK" sz="1000" dirty="0"/>
-              <a:t>            step += 1</a:t>
-            </a:r>
-          </a:p>
-          <a:p>
-            <a:endParaRPr lang="en-LK" sz="1000" dirty="0"/>
-          </a:p>
-          <a:p>
-            <a:r>
-              <a:rPr lang="en-LK" sz="1000" dirty="0"/>
-              <a:t>            if step % 10 == 0:</a:t>
-            </a:r>
-          </a:p>
-          <a:p>
-            <a:r>
-              <a:rPr lang="en-LK" sz="1000" dirty="0"/>
-              <a:t>                elapsed = time.time() - start_time</a:t>
-            </a:r>
-          </a:p>
-          <a:p>
-            <a:r>
-              <a:rPr lang="en-LK" sz="1000" dirty="0"/>
-              <a:t>                print(f"Step {step} | Loss: {loss.item():.4f} | Time: {elapsed:.2f}s")</a:t>
-            </a:r>
-          </a:p>
-          <a:p>
-            <a:endParaRPr lang="en-LK" sz="1000" dirty="0"/>
-          </a:p>
-          <a:p>
-            <a:r>
-              <a:rPr lang="en-LK" sz="1000" dirty="0"/>
-              <a:t>            if step % 200 == 0:</a:t>
-            </a:r>
-          </a:p>
-          <a:p>
-            <a:r>
-              <a:rPr lang="en-LK" sz="1000" dirty="0"/>
-              <a:t>                save_checkpoint(step)</a:t>
-            </a:r>
-          </a:p>
-          <a:p>
-            <a:endParaRPr lang="en-LK" sz="1000" dirty="0"/>
-          </a:p>
-          <a:p>
-            <a:endParaRPr lang="en-LK" sz="1000" dirty="0"/>
-          </a:p>
-        </p:txBody>
-      </p:sp>
-      <p:sp>
-        <p:nvSpPr>
-          <p:cNvPr id="6" name="TextBox 5">
-            <a:extLst>
-              <a:ext uri="{FF2B5EF4-FFF2-40B4-BE49-F238E27FC236}">
-                <a16:creationId xmlns:a16="http://schemas.microsoft.com/office/drawing/2014/main" id="{7290FD2D-A1A8-408F-E94A-CF961C007FF5}"/>
+        </p:txBody>
+      </p:sp>
+      <p:sp>
+        <p:nvSpPr>
+          <p:cNvPr id="9" name="TextBox 8">
+            <a:extLst>
+              <a:ext uri="{FF2B5EF4-FFF2-40B4-BE49-F238E27FC236}">
+                <a16:creationId xmlns:a16="http://schemas.microsoft.com/office/drawing/2014/main" id="{C5041B14-51DE-F3F2-B134-D312FBEFAFCA}"/>
               </a:ext>
             </a:extLst>
           </p:cNvPr>
@@ -4735,8 +6360,8 @@
         </p:nvSpPr>
         <p:spPr>
           <a:xfrm>
-            <a:off x="5786510" y="390104"/>
-            <a:ext cx="6098344" cy="2092881"/>
+            <a:off x="5077707" y="186342"/>
+            <a:ext cx="6956474" cy="2246769"/>
           </a:xfrm>
           <a:prstGeom prst="rect">
             <a:avLst/>
@@ -4749,72 +6374,81 @@
           </a:bodyPr>
           <a:lstStyle/>
           <a:p>
-            <a:r>
-              <a:rPr lang="en-LK" sz="1000" dirty="0"/>
-              <a:t>def save_checkpoint(step):</a:t>
-            </a:r>
-          </a:p>
-          <a:p>
-            <a:r>
-              <a:rPr lang="en-LK" sz="1000" dirty="0"/>
-              <a:t>    os.makedirs("checkpoints", exist_ok=True)</a:t>
-            </a:r>
-          </a:p>
-          <a:p>
             <a:endParaRPr lang="en-LK" sz="1000" dirty="0"/>
           </a:p>
           <a:p>
             <a:r>
               <a:rPr lang="en-LK" sz="1000" dirty="0"/>
-              <a:t>    torch.save({</a:t>
-            </a:r>
-          </a:p>
-          <a:p>
-            <a:r>
-              <a:rPr lang="en-LK" sz="1000" dirty="0"/>
-              <a:t>        "model": model.state_dict(),</a:t>
-            </a:r>
-          </a:p>
-          <a:p>
-            <a:r>
-              <a:rPr lang="en-LK" sz="1000" dirty="0"/>
-              <a:t>        "optimizer": optimizer.state_dict(),</a:t>
-            </a:r>
-          </a:p>
-          <a:p>
-            <a:r>
-              <a:rPr lang="en-LK" sz="1000" dirty="0"/>
-              <a:t>        "step": step,</a:t>
-            </a:r>
-          </a:p>
-          <a:p>
-            <a:r>
-              <a:rPr lang="en-LK" sz="1000" dirty="0"/>
-              <a:t>        "config": cfg.__dict__,</a:t>
-            </a:r>
-          </a:p>
-          <a:p>
-            <a:r>
-              <a:rPr lang="en-LK" sz="1000" dirty="0"/>
-              <a:t>    }, f"checkpoints/sft_step_{step}.pt")</a:t>
+              <a:t>optimizer = torch.optim.AdamW(</a:t>
+            </a:r>
+          </a:p>
+          <a:p>
+            <a:r>
+              <a:rPr lang="en-LK" sz="1000" dirty="0"/>
+              <a:t>    model.parameters(),</a:t>
+            </a:r>
+          </a:p>
+          <a:p>
+            <a:r>
+              <a:rPr lang="en-LK" sz="1000" dirty="0"/>
+              <a:t>    lr=cfg.lr,</a:t>
+            </a:r>
+          </a:p>
+          <a:p>
+            <a:r>
+              <a:rPr lang="en-LK" sz="1000" dirty="0"/>
+              <a:t>    weight_decay=0.1,</a:t>
+            </a:r>
+          </a:p>
+          <a:p>
+            <a:r>
+              <a:rPr lang="en-LK" sz="1000" dirty="0"/>
+              <a:t>    betas=(0.9, 0.95),</a:t>
+            </a:r>
+          </a:p>
+          <a:p>
+            <a:r>
+              <a:rPr lang="en-LK" sz="1000" dirty="0"/>
+              <a:t>)</a:t>
             </a:r>
           </a:p>
           <a:p>
             <a:endParaRPr lang="en-LK" sz="1000" dirty="0"/>
           </a:p>
           <a:p>
-            <a:endParaRPr lang="en-LK" sz="1000" dirty="0"/>
-          </a:p>
-          <a:p>
-            <a:r>
-              <a:rPr lang="en-LK" sz="1000" dirty="0"/>
-              <a:t>if __name__ == "__main__":</a:t>
-            </a:r>
-          </a:p>
-          <a:p>
-            <a:r>
-              <a:rPr lang="en-LK" sz="1000" dirty="0"/>
-              <a:t>    train()</a:t>
+            <a:r>
+              <a:rPr lang="en-LK" sz="1000" dirty="0"/>
+              <a:t>loader = get_loader(</a:t>
+            </a:r>
+          </a:p>
+          <a:p>
+            <a:r>
+              <a:rPr lang="en-LK" sz="1000" dirty="0"/>
+              <a:t>    "sft_data.jsonl",</a:t>
+            </a:r>
+          </a:p>
+          <a:p>
+            <a:r>
+              <a:rPr lang="en-LK" sz="1000" dirty="0"/>
+              <a:t>    tokenizer,</a:t>
+            </a:r>
+          </a:p>
+          <a:p>
+            <a:r>
+              <a:rPr lang="en-LK" sz="1000" dirty="0"/>
+              <a:t>    cfg.seq_len,</a:t>
+            </a:r>
+          </a:p>
+          <a:p>
+            <a:r>
+              <a:rPr lang="en-LK" sz="1000" dirty="0"/>
+              <a:t>    cfg.batch_size</a:t>
+            </a:r>
+          </a:p>
+          <a:p>
+            <a:r>
+              <a:rPr lang="en-LK" sz="1000" dirty="0"/>
+              <a:t>)</a:t>
             </a:r>
           </a:p>
         </p:txBody>
@@ -4822,7 +6456,7 @@
     </p:spTree>
     <p:extLst>
       <p:ext uri="{BB962C8B-B14F-4D97-AF65-F5344CB8AC3E}">
-        <p14:creationId xmlns:p14="http://schemas.microsoft.com/office/powerpoint/2010/main" val="353873191"/>
+        <p14:creationId xmlns:p14="http://schemas.microsoft.com/office/powerpoint/2010/main" val="3336233075"/>
       </p:ext>
     </p:extLst>
   </p:cSld>
@@ -4854,6 +6488,349 @@
           <p:cNvPr id="4" name="TextBox 3">
             <a:extLst>
               <a:ext uri="{FF2B5EF4-FFF2-40B4-BE49-F238E27FC236}">
+                <a16:creationId xmlns:a16="http://schemas.microsoft.com/office/drawing/2014/main" id="{844D67CC-80ED-A82E-BB67-6C67CFC37DD1}"/>
+              </a:ext>
+            </a:extLst>
+          </p:cNvPr>
+          <p:cNvSpPr txBox="1"/>
+          <p:nvPr/>
+        </p:nvSpPr>
+        <p:spPr>
+          <a:xfrm>
+            <a:off x="438000" y="0"/>
+            <a:ext cx="10697021" cy="5940088"/>
+          </a:xfrm>
+          <a:prstGeom prst="rect">
+            <a:avLst/>
+          </a:prstGeom>
+          <a:noFill/>
+        </p:spPr>
+        <p:txBody>
+          <a:bodyPr wrap="square">
+            <a:spAutoFit/>
+          </a:bodyPr>
+          <a:lstStyle/>
+          <a:p>
+            <a:endParaRPr lang="en-LK" sz="1000" dirty="0"/>
+          </a:p>
+          <a:p>
+            <a:endParaRPr lang="en-LK" sz="1000" dirty="0"/>
+          </a:p>
+          <a:p>
+            <a:r>
+              <a:rPr lang="en-LK" sz="1000" dirty="0"/>
+              <a:t>def train():</a:t>
+            </a:r>
+          </a:p>
+          <a:p>
+            <a:r>
+              <a:rPr lang="en-LK" sz="1000" dirty="0"/>
+              <a:t>    model.train()</a:t>
+            </a:r>
+          </a:p>
+          <a:p>
+            <a:r>
+              <a:rPr lang="en-LK" sz="1000" dirty="0"/>
+              <a:t>    step = 0</a:t>
+            </a:r>
+          </a:p>
+          <a:p>
+            <a:r>
+              <a:rPr lang="en-LK" sz="1000" dirty="0"/>
+              <a:t>    start_time = time.time()</a:t>
+            </a:r>
+          </a:p>
+          <a:p>
+            <a:endParaRPr lang="en-LK" sz="1000" dirty="0"/>
+          </a:p>
+          <a:p>
+            <a:r>
+              <a:rPr lang="en-LK" sz="1000" dirty="0"/>
+              <a:t>    for epoch in range(1000):</a:t>
+            </a:r>
+          </a:p>
+          <a:p>
+            <a:r>
+              <a:rPr lang="en-LK" sz="1000" dirty="0"/>
+              <a:t>        for x, y in loader:</a:t>
+            </a:r>
+          </a:p>
+          <a:p>
+            <a:endParaRPr lang="en-LK" sz="1000" dirty="0"/>
+          </a:p>
+          <a:p>
+            <a:r>
+              <a:rPr lang="en-LK" sz="1000" dirty="0"/>
+              <a:t>            x = x.to(device)</a:t>
+            </a:r>
+          </a:p>
+          <a:p>
+            <a:r>
+              <a:rPr lang="en-LK" sz="1000" dirty="0"/>
+              <a:t>            y = y.to(device)</a:t>
+            </a:r>
+          </a:p>
+          <a:p>
+            <a:endParaRPr lang="en-LK" sz="1000" dirty="0"/>
+          </a:p>
+          <a:p>
+            <a:r>
+              <a:rPr lang="en-LK" sz="1000" dirty="0"/>
+              <a:t>            logits = model(x)</a:t>
+            </a:r>
+          </a:p>
+          <a:p>
+            <a:endParaRPr lang="en-LK" sz="1000" dirty="0"/>
+          </a:p>
+          <a:p>
+            <a:r>
+              <a:rPr lang="en-LK" sz="1000" dirty="0"/>
+              <a:t>            loss = F.cross_entropy(</a:t>
+            </a:r>
+          </a:p>
+          <a:p>
+            <a:r>
+              <a:rPr lang="en-LK" sz="1000" dirty="0"/>
+              <a:t>                logits.view(-1, logits.size(-1)),</a:t>
+            </a:r>
+          </a:p>
+          <a:p>
+            <a:r>
+              <a:rPr lang="en-LK" sz="1000" dirty="0"/>
+              <a:t>                y.view(-1),</a:t>
+            </a:r>
+          </a:p>
+          <a:p>
+            <a:r>
+              <a:rPr lang="en-LK" sz="1000" dirty="0"/>
+              <a:t>                ignore_index=-100</a:t>
+            </a:r>
+          </a:p>
+          <a:p>
+            <a:r>
+              <a:rPr lang="en-LK" sz="1000" dirty="0"/>
+              <a:t>            )</a:t>
+            </a:r>
+          </a:p>
+          <a:p>
+            <a:endParaRPr lang="en-LK" sz="1000" dirty="0"/>
+          </a:p>
+          <a:p>
+            <a:r>
+              <a:rPr lang="en-LK" sz="1000" dirty="0"/>
+              <a:t>            optimizer.zero_grad()</a:t>
+            </a:r>
+          </a:p>
+          <a:p>
+            <a:r>
+              <a:rPr lang="en-LK" sz="1000" dirty="0"/>
+              <a:t>            loss.backward()</a:t>
+            </a:r>
+          </a:p>
+          <a:p>
+            <a:endParaRPr lang="en-LK" sz="1000" dirty="0"/>
+          </a:p>
+          <a:p>
+            <a:r>
+              <a:rPr lang="en-LK" sz="1000" dirty="0"/>
+              <a:t>            torch.nn.utils.clip_grad_norm_(model.parameters(), 1.0)</a:t>
+            </a:r>
+          </a:p>
+          <a:p>
+            <a:endParaRPr lang="en-LK" sz="1000" dirty="0"/>
+          </a:p>
+          <a:p>
+            <a:r>
+              <a:rPr lang="en-LK" sz="1000" dirty="0"/>
+              <a:t>            optimizer.step()</a:t>
+            </a:r>
+          </a:p>
+          <a:p>
+            <a:endParaRPr lang="en-LK" sz="1000" dirty="0"/>
+          </a:p>
+          <a:p>
+            <a:r>
+              <a:rPr lang="en-LK" sz="1000" dirty="0"/>
+              <a:t>            step += 1</a:t>
+            </a:r>
+          </a:p>
+          <a:p>
+            <a:endParaRPr lang="en-LK" sz="1000" dirty="0"/>
+          </a:p>
+          <a:p>
+            <a:r>
+              <a:rPr lang="en-LK" sz="1000" dirty="0"/>
+              <a:t>            if step % 10 == 0:</a:t>
+            </a:r>
+          </a:p>
+          <a:p>
+            <a:r>
+              <a:rPr lang="en-LK" sz="1000" dirty="0"/>
+              <a:t>                elapsed = time.time() - start_time</a:t>
+            </a:r>
+          </a:p>
+          <a:p>
+            <a:r>
+              <a:rPr lang="en-LK" sz="1000" dirty="0"/>
+              <a:t>                print(f"Step {step} | Loss: {loss.item():.4f} | Time: {elapsed:.2f}s")</a:t>
+            </a:r>
+          </a:p>
+          <a:p>
+            <a:endParaRPr lang="en-LK" sz="1000" dirty="0"/>
+          </a:p>
+          <a:p>
+            <a:r>
+              <a:rPr lang="en-LK" sz="1000" dirty="0"/>
+              <a:t>            if step % 200 == 0:</a:t>
+            </a:r>
+          </a:p>
+          <a:p>
+            <a:r>
+              <a:rPr lang="en-LK" sz="1000" dirty="0"/>
+              <a:t>                save_checkpoint(step)</a:t>
+            </a:r>
+          </a:p>
+          <a:p>
+            <a:endParaRPr lang="en-LK" sz="1000" dirty="0"/>
+          </a:p>
+          <a:p>
+            <a:endParaRPr lang="en-LK" sz="1000" dirty="0"/>
+          </a:p>
+        </p:txBody>
+      </p:sp>
+      <p:sp>
+        <p:nvSpPr>
+          <p:cNvPr id="6" name="TextBox 5">
+            <a:extLst>
+              <a:ext uri="{FF2B5EF4-FFF2-40B4-BE49-F238E27FC236}">
+                <a16:creationId xmlns:a16="http://schemas.microsoft.com/office/drawing/2014/main" id="{7290FD2D-A1A8-408F-E94A-CF961C007FF5}"/>
+              </a:ext>
+            </a:extLst>
+          </p:cNvPr>
+          <p:cNvSpPr txBox="1"/>
+          <p:nvPr/>
+        </p:nvSpPr>
+        <p:spPr>
+          <a:xfrm>
+            <a:off x="5786510" y="390104"/>
+            <a:ext cx="6098344" cy="2092881"/>
+          </a:xfrm>
+          <a:prstGeom prst="rect">
+            <a:avLst/>
+          </a:prstGeom>
+          <a:noFill/>
+        </p:spPr>
+        <p:txBody>
+          <a:bodyPr wrap="square">
+            <a:spAutoFit/>
+          </a:bodyPr>
+          <a:lstStyle/>
+          <a:p>
+            <a:r>
+              <a:rPr lang="en-LK" sz="1000" dirty="0"/>
+              <a:t>def save_checkpoint(step):</a:t>
+            </a:r>
+          </a:p>
+          <a:p>
+            <a:r>
+              <a:rPr lang="en-LK" sz="1000" dirty="0"/>
+              <a:t>    os.makedirs("checkpoints", exist_ok=True)</a:t>
+            </a:r>
+          </a:p>
+          <a:p>
+            <a:endParaRPr lang="en-LK" sz="1000" dirty="0"/>
+          </a:p>
+          <a:p>
+            <a:r>
+              <a:rPr lang="en-LK" sz="1000" dirty="0"/>
+              <a:t>    torch.save({</a:t>
+            </a:r>
+          </a:p>
+          <a:p>
+            <a:r>
+              <a:rPr lang="en-LK" sz="1000" dirty="0"/>
+              <a:t>        "model": model.state_dict(),</a:t>
+            </a:r>
+          </a:p>
+          <a:p>
+            <a:r>
+              <a:rPr lang="en-LK" sz="1000" dirty="0"/>
+              <a:t>        "optimizer": optimizer.state_dict(),</a:t>
+            </a:r>
+          </a:p>
+          <a:p>
+            <a:r>
+              <a:rPr lang="en-LK" sz="1000" dirty="0"/>
+              <a:t>        "step": step,</a:t>
+            </a:r>
+          </a:p>
+          <a:p>
+            <a:r>
+              <a:rPr lang="en-LK" sz="1000" dirty="0"/>
+              <a:t>        "config": cfg.__dict__,</a:t>
+            </a:r>
+          </a:p>
+          <a:p>
+            <a:r>
+              <a:rPr lang="en-LK" sz="1000" dirty="0"/>
+              <a:t>    }, f"checkpoints/sft_step_{step}.pt")</a:t>
+            </a:r>
+          </a:p>
+          <a:p>
+            <a:endParaRPr lang="en-LK" sz="1000" dirty="0"/>
+          </a:p>
+          <a:p>
+            <a:endParaRPr lang="en-LK" sz="1000" dirty="0"/>
+          </a:p>
+          <a:p>
+            <a:r>
+              <a:rPr lang="en-LK" sz="1000" dirty="0"/>
+              <a:t>if __name__ == "__main__":</a:t>
+            </a:r>
+          </a:p>
+          <a:p>
+            <a:r>
+              <a:rPr lang="en-LK" sz="1000" dirty="0"/>
+              <a:t>    train()</a:t>
+            </a:r>
+          </a:p>
+        </p:txBody>
+      </p:sp>
+    </p:spTree>
+    <p:extLst>
+      <p:ext uri="{BB962C8B-B14F-4D97-AF65-F5344CB8AC3E}">
+        <p14:creationId xmlns:p14="http://schemas.microsoft.com/office/powerpoint/2010/main" val="353873191"/>
+      </p:ext>
+    </p:extLst>
+  </p:cSld>
+  <p:clrMapOvr>
+    <a:masterClrMapping/>
+  </p:clrMapOvr>
+</p:sld>
+</file>
+
+<file path=ppt/slides/slide7.xml><?xml version="1.0" encoding="utf-8"?>
+<p:sld xmlns:a="http://schemas.openxmlformats.org/drawingml/2006/main" xmlns:r="http://schemas.openxmlformats.org/officeDocument/2006/relationships" xmlns:p="http://schemas.openxmlformats.org/presentationml/2006/main">
+  <p:cSld>
+    <p:spTree>
+      <p:nvGrpSpPr>
+        <p:cNvPr id="1" name=""/>
+        <p:cNvGrpSpPr/>
+        <p:nvPr/>
+      </p:nvGrpSpPr>
+      <p:grpSpPr>
+        <a:xfrm>
+          <a:off x="0" y="0"/>
+          <a:ext cx="0" cy="0"/>
+          <a:chOff x="0" y="0"/>
+          <a:chExt cx="0" cy="0"/>
+        </a:xfrm>
+      </p:grpSpPr>
+      <p:sp>
+        <p:nvSpPr>
+          <p:cNvPr id="4" name="TextBox 3">
+            <a:extLst>
+              <a:ext uri="{FF2B5EF4-FFF2-40B4-BE49-F238E27FC236}">
                 <a16:creationId xmlns:a16="http://schemas.microsoft.com/office/drawing/2014/main" id="{DCF2F77B-F423-E120-88BA-D5FE919FE26F}"/>
               </a:ext>
             </a:extLst>
@@ -5214,7 +7191,7 @@
 </p:sld>
 </file>
 
-<file path=ppt/slides/slide7.xml><?xml version="1.0" encoding="utf-8"?>
+<file path=ppt/slides/slide8.xml><?xml version="1.0" encoding="utf-8"?>
 <p:sld xmlns:a="http://schemas.openxmlformats.org/drawingml/2006/main" xmlns:r="http://schemas.openxmlformats.org/officeDocument/2006/relationships" xmlns:p="http://schemas.openxmlformats.org/presentationml/2006/main">
   <p:cSld>
     <p:spTree>

--- a/Day 5 - Supervised finetuning and building a chat bot/sft.pptx
+++ b/Day 5 - Supervised finetuning and building a chat bot/sft.pptx
@@ -7,12 +7,13 @@
   <p:sldIdLst>
     <p:sldId id="257" r:id="rId2"/>
     <p:sldId id="258" r:id="rId3"/>
-    <p:sldId id="264" r:id="rId4"/>
-    <p:sldId id="259" r:id="rId5"/>
-    <p:sldId id="260" r:id="rId6"/>
-    <p:sldId id="261" r:id="rId7"/>
-    <p:sldId id="262" r:id="rId8"/>
-    <p:sldId id="263" r:id="rId9"/>
+    <p:sldId id="265" r:id="rId4"/>
+    <p:sldId id="264" r:id="rId5"/>
+    <p:sldId id="259" r:id="rId6"/>
+    <p:sldId id="260" r:id="rId7"/>
+    <p:sldId id="261" r:id="rId8"/>
+    <p:sldId id="262" r:id="rId9"/>
+    <p:sldId id="263" r:id="rId10"/>
   </p:sldIdLst>
   <p:sldSz cx="12192000" cy="6858000"/>
   <p:notesSz cx="6858000" cy="9144000"/>
@@ -3745,10 +3746,10 @@
       </p:grpSpPr>
       <p:sp>
         <p:nvSpPr>
-          <p:cNvPr id="5" name="TextBox 4">
-            <a:extLst>
-              <a:ext uri="{FF2B5EF4-FFF2-40B4-BE49-F238E27FC236}">
-                <a16:creationId xmlns:a16="http://schemas.microsoft.com/office/drawing/2014/main" id="{71D67B28-5576-AA61-67CE-9F181054D28C}"/>
+          <p:cNvPr id="4" name="TextBox 3">
+            <a:extLst>
+              <a:ext uri="{FF2B5EF4-FFF2-40B4-BE49-F238E27FC236}">
+                <a16:creationId xmlns:a16="http://schemas.microsoft.com/office/drawing/2014/main" id="{276C6339-35C5-1D64-354C-CACB4E95A368}"/>
               </a:ext>
             </a:extLst>
           </p:cNvPr>
@@ -3757,8 +3758,47 @@
         </p:nvSpPr>
         <p:spPr>
           <a:xfrm>
-            <a:off x="3417848" y="-99726"/>
-            <a:ext cx="9662531" cy="7325082"/>
+            <a:off x="530578" y="191911"/>
+            <a:ext cx="2285819" cy="369332"/>
+          </a:xfrm>
+          <a:prstGeom prst="rect">
+            <a:avLst/>
+          </a:prstGeom>
+          <a:noFill/>
+        </p:spPr>
+        <p:txBody>
+          <a:bodyPr wrap="none" rtlCol="0">
+            <a:spAutoFit/>
+          </a:bodyPr>
+          <a:lstStyle/>
+          <a:p>
+            <a:r>
+              <a:rPr lang="en-GB" dirty="0"/>
+              <a:t>M</a:t>
+            </a:r>
+            <a:r>
+              <a:rPr lang="en-LK" dirty="0"/>
+              <a:t>odified tokenizer.py</a:t>
+            </a:r>
+          </a:p>
+        </p:txBody>
+      </p:sp>
+      <p:sp>
+        <p:nvSpPr>
+          <p:cNvPr id="6" name="TextBox 5">
+            <a:extLst>
+              <a:ext uri="{FF2B5EF4-FFF2-40B4-BE49-F238E27FC236}">
+                <a16:creationId xmlns:a16="http://schemas.microsoft.com/office/drawing/2014/main" id="{1310FC23-21AE-8E10-3185-F7C0B0CADDE9}"/>
+              </a:ext>
+            </a:extLst>
+          </p:cNvPr>
+          <p:cNvSpPr txBox="1"/>
+          <p:nvPr/>
+        </p:nvSpPr>
+        <p:spPr>
+          <a:xfrm>
+            <a:off x="530578" y="889843"/>
+            <a:ext cx="6096000" cy="4801314"/>
           </a:xfrm>
           <a:prstGeom prst="rect">
             <a:avLst/>
@@ -3771,1915 +3811,87 @@
           </a:bodyPr>
           <a:lstStyle/>
           <a:p>
-            <a:pPr>
-              <a:buNone/>
-            </a:pPr>
-            <a:br>
-              <a:rPr lang="en-GB" sz="1000" dirty="0">
-                <a:solidFill>
-                  <a:srgbClr val="BCBEC4"/>
-                </a:solidFill>
-                <a:effectLst/>
-                <a:latin typeface="JetBrains Mono"/>
-              </a:rPr>
-            </a:br>
-            <a:r>
-              <a:rPr lang="en-GB" sz="1000" dirty="0">
-                <a:solidFill>
-                  <a:srgbClr val="CF8E6D"/>
-                </a:solidFill>
-                <a:effectLst/>
-                <a:latin typeface="JetBrains Mono"/>
-              </a:rPr>
-              <a:t>import </a:t>
-            </a:r>
-            <a:r>
-              <a:rPr lang="en-GB" sz="1000" dirty="0" err="1">
-                <a:solidFill>
-                  <a:srgbClr val="BCBEC4"/>
-                </a:solidFill>
-                <a:effectLst/>
-                <a:latin typeface="JetBrains Mono"/>
-              </a:rPr>
-              <a:t>json</a:t>
-            </a:r>
-            <a:br>
-              <a:rPr lang="en-GB" sz="1000" dirty="0">
-                <a:solidFill>
-                  <a:srgbClr val="BCBEC4"/>
-                </a:solidFill>
-                <a:effectLst/>
-                <a:latin typeface="JetBrains Mono"/>
-              </a:rPr>
-            </a:br>
-            <a:r>
-              <a:rPr lang="en-GB" sz="1000" dirty="0">
-                <a:solidFill>
-                  <a:srgbClr val="BCBEC4"/>
-                </a:solidFill>
-                <a:effectLst/>
-                <a:latin typeface="JetBrains Mono"/>
-              </a:rPr>
-              <a:t>data = []</a:t>
-            </a:r>
-            <a:br>
-              <a:rPr lang="en-GB" sz="1000" dirty="0">
-                <a:solidFill>
-                  <a:srgbClr val="BCBEC4"/>
-                </a:solidFill>
-                <a:effectLst/>
-                <a:latin typeface="JetBrains Mono"/>
-              </a:rPr>
-            </a:br>
-            <a:r>
-              <a:rPr lang="en-GB" sz="1000" dirty="0">
-                <a:solidFill>
-                  <a:srgbClr val="CF8E6D"/>
-                </a:solidFill>
-                <a:effectLst/>
-                <a:latin typeface="JetBrains Mono"/>
-              </a:rPr>
-              <a:t>from </a:t>
-            </a:r>
-            <a:r>
-              <a:rPr lang="en-GB" sz="1000" dirty="0">
-                <a:solidFill>
-                  <a:srgbClr val="BCBEC4"/>
-                </a:solidFill>
-                <a:effectLst/>
-                <a:latin typeface="JetBrains Mono"/>
-              </a:rPr>
-              <a:t>tokenizer </a:t>
-            </a:r>
-            <a:r>
-              <a:rPr lang="en-GB" sz="1000" dirty="0">
-                <a:solidFill>
-                  <a:srgbClr val="CF8E6D"/>
-                </a:solidFill>
-                <a:effectLst/>
-                <a:latin typeface="JetBrains Mono"/>
-              </a:rPr>
-              <a:t>import </a:t>
-            </a:r>
-            <a:r>
-              <a:rPr lang="en-GB" sz="1000" dirty="0">
-                <a:solidFill>
-                  <a:srgbClr val="BCBEC4"/>
-                </a:solidFill>
-                <a:effectLst/>
-                <a:latin typeface="JetBrains Mono"/>
-              </a:rPr>
-              <a:t>Tokenizer</a:t>
-            </a:r>
-            <a:br>
-              <a:rPr lang="en-GB" sz="1000" dirty="0">
-                <a:solidFill>
-                  <a:srgbClr val="BCBEC4"/>
-                </a:solidFill>
-                <a:effectLst/>
-                <a:latin typeface="JetBrains Mono"/>
-              </a:rPr>
-            </a:br>
-            <a:r>
-              <a:rPr lang="en-GB" sz="1000" dirty="0">
-                <a:solidFill>
-                  <a:srgbClr val="BCBEC4"/>
-                </a:solidFill>
-                <a:effectLst/>
-                <a:latin typeface="JetBrains Mono"/>
-              </a:rPr>
-              <a:t>tokenizer = Tokenizer()</a:t>
-            </a:r>
-            <a:br>
-              <a:rPr lang="en-GB" sz="1000" dirty="0">
-                <a:solidFill>
-                  <a:srgbClr val="BCBEC4"/>
-                </a:solidFill>
-                <a:effectLst/>
-                <a:latin typeface="JetBrains Mono"/>
-              </a:rPr>
-            </a:br>
-            <a:br>
-              <a:rPr lang="en-GB" sz="1000" dirty="0">
-                <a:solidFill>
-                  <a:srgbClr val="BCBEC4"/>
-                </a:solidFill>
-                <a:effectLst/>
-                <a:latin typeface="JetBrains Mono"/>
-              </a:rPr>
-            </a:br>
-            <a:r>
-              <a:rPr lang="en-GB" sz="1000" dirty="0">
-                <a:solidFill>
-                  <a:srgbClr val="CF8E6D"/>
-                </a:solidFill>
-                <a:effectLst/>
-                <a:latin typeface="JetBrains Mono"/>
-              </a:rPr>
-              <a:t>with </a:t>
-            </a:r>
-            <a:r>
-              <a:rPr lang="en-GB" sz="1000" dirty="0">
-                <a:solidFill>
-                  <a:srgbClr val="8888C6"/>
-                </a:solidFill>
-                <a:effectLst/>
-                <a:latin typeface="JetBrains Mono"/>
-              </a:rPr>
-              <a:t>open</a:t>
-            </a:r>
-            <a:r>
-              <a:rPr lang="en-GB" sz="1000" dirty="0">
-                <a:solidFill>
-                  <a:srgbClr val="BCBEC4"/>
-                </a:solidFill>
-                <a:effectLst/>
-                <a:latin typeface="JetBrains Mono"/>
-              </a:rPr>
-              <a:t>(</a:t>
-            </a:r>
-            <a:r>
-              <a:rPr lang="en-GB" sz="1000" dirty="0">
-                <a:solidFill>
-                  <a:srgbClr val="6AAB73"/>
-                </a:solidFill>
-                <a:effectLst/>
-                <a:latin typeface="JetBrains Mono"/>
-              </a:rPr>
-              <a:t>'</a:t>
-            </a:r>
-            <a:r>
-              <a:rPr lang="en-GB" sz="1000" dirty="0" err="1">
-                <a:solidFill>
-                  <a:srgbClr val="6AAB73"/>
-                </a:solidFill>
-                <a:effectLst/>
-                <a:latin typeface="JetBrains Mono"/>
-              </a:rPr>
-              <a:t>sft_data.jsonl</a:t>
-            </a:r>
-            <a:r>
-              <a:rPr lang="en-GB" sz="1000" dirty="0">
-                <a:solidFill>
-                  <a:srgbClr val="6AAB73"/>
-                </a:solidFill>
-                <a:effectLst/>
-                <a:latin typeface="JetBrains Mono"/>
-              </a:rPr>
-              <a:t>'</a:t>
-            </a:r>
-            <a:r>
-              <a:rPr lang="en-GB" sz="1000" dirty="0">
-                <a:solidFill>
-                  <a:srgbClr val="BCBEC4"/>
-                </a:solidFill>
-                <a:effectLst/>
-                <a:latin typeface="JetBrains Mono"/>
-              </a:rPr>
-              <a:t>, </a:t>
-            </a:r>
-            <a:r>
-              <a:rPr lang="en-GB" sz="1000" dirty="0">
-                <a:solidFill>
-                  <a:srgbClr val="6AAB73"/>
-                </a:solidFill>
-                <a:effectLst/>
-                <a:latin typeface="JetBrains Mono"/>
-              </a:rPr>
-              <a:t>"r"</a:t>
-            </a:r>
-            <a:r>
-              <a:rPr lang="en-GB" sz="1000" dirty="0">
-                <a:solidFill>
-                  <a:srgbClr val="BCBEC4"/>
-                </a:solidFill>
-                <a:effectLst/>
-                <a:latin typeface="JetBrains Mono"/>
-              </a:rPr>
-              <a:t>) </a:t>
-            </a:r>
-            <a:r>
-              <a:rPr lang="en-GB" sz="1000" dirty="0">
-                <a:solidFill>
-                  <a:srgbClr val="CF8E6D"/>
-                </a:solidFill>
-                <a:effectLst/>
-                <a:latin typeface="JetBrains Mono"/>
-              </a:rPr>
-              <a:t>as </a:t>
-            </a:r>
-            <a:r>
-              <a:rPr lang="en-GB" sz="1000" dirty="0">
-                <a:solidFill>
-                  <a:srgbClr val="BCBEC4"/>
-                </a:solidFill>
-                <a:effectLst/>
-                <a:latin typeface="JetBrains Mono"/>
-              </a:rPr>
-              <a:t>f:</a:t>
-            </a:r>
-            <a:br>
-              <a:rPr lang="en-GB" sz="1000" dirty="0">
-                <a:solidFill>
-                  <a:srgbClr val="BCBEC4"/>
-                </a:solidFill>
-                <a:effectLst/>
-                <a:latin typeface="JetBrains Mono"/>
-              </a:rPr>
-            </a:br>
-            <a:r>
-              <a:rPr lang="en-GB" sz="1000" dirty="0">
-                <a:solidFill>
-                  <a:srgbClr val="BCBEC4"/>
-                </a:solidFill>
-                <a:effectLst/>
-                <a:latin typeface="JetBrains Mono"/>
-              </a:rPr>
-              <a:t>    </a:t>
-            </a:r>
-            <a:r>
-              <a:rPr lang="en-GB" sz="1000" dirty="0">
-                <a:solidFill>
-                  <a:srgbClr val="CF8E6D"/>
-                </a:solidFill>
-                <a:effectLst/>
-                <a:latin typeface="JetBrains Mono"/>
-              </a:rPr>
-              <a:t>for </a:t>
-            </a:r>
-            <a:r>
-              <a:rPr lang="en-GB" sz="1000" dirty="0">
-                <a:solidFill>
-                  <a:srgbClr val="BCBEC4"/>
-                </a:solidFill>
-                <a:effectLst/>
-                <a:latin typeface="JetBrains Mono"/>
-              </a:rPr>
-              <a:t>line </a:t>
-            </a:r>
-            <a:r>
-              <a:rPr lang="en-GB" sz="1000" dirty="0">
-                <a:solidFill>
-                  <a:srgbClr val="CF8E6D"/>
-                </a:solidFill>
-                <a:effectLst/>
-                <a:latin typeface="JetBrains Mono"/>
-              </a:rPr>
-              <a:t>in </a:t>
-            </a:r>
-            <a:r>
-              <a:rPr lang="en-GB" sz="1000" dirty="0">
-                <a:solidFill>
-                  <a:srgbClr val="BCBEC4"/>
-                </a:solidFill>
-                <a:effectLst/>
-                <a:latin typeface="JetBrains Mono"/>
-              </a:rPr>
-              <a:t>f:</a:t>
-            </a:r>
-            <a:br>
-              <a:rPr lang="en-GB" sz="1000" dirty="0">
-                <a:solidFill>
-                  <a:srgbClr val="BCBEC4"/>
-                </a:solidFill>
-                <a:effectLst/>
-                <a:latin typeface="JetBrains Mono"/>
-              </a:rPr>
-            </a:br>
-            <a:r>
-              <a:rPr lang="en-GB" sz="1000" dirty="0">
-                <a:solidFill>
-                  <a:srgbClr val="BCBEC4"/>
-                </a:solidFill>
-                <a:effectLst/>
-                <a:latin typeface="JetBrains Mono"/>
-              </a:rPr>
-              <a:t>        </a:t>
-            </a:r>
-            <a:r>
-              <a:rPr lang="en-GB" sz="1000" dirty="0" err="1">
-                <a:solidFill>
-                  <a:srgbClr val="BCBEC4"/>
-                </a:solidFill>
-                <a:effectLst/>
-                <a:latin typeface="JetBrains Mono"/>
-              </a:rPr>
-              <a:t>data.append</a:t>
-            </a:r>
-            <a:r>
-              <a:rPr lang="en-GB" sz="1000" dirty="0">
-                <a:solidFill>
-                  <a:srgbClr val="BCBEC4"/>
-                </a:solidFill>
-                <a:effectLst/>
-                <a:latin typeface="JetBrains Mono"/>
-              </a:rPr>
-              <a:t>(</a:t>
-            </a:r>
-            <a:r>
-              <a:rPr lang="en-GB" sz="1000" dirty="0" err="1">
-                <a:solidFill>
-                  <a:srgbClr val="BCBEC4"/>
-                </a:solidFill>
-                <a:effectLst/>
-                <a:latin typeface="JetBrains Mono"/>
-              </a:rPr>
-              <a:t>json.loads</a:t>
-            </a:r>
-            <a:r>
-              <a:rPr lang="en-GB" sz="1000" dirty="0">
-                <a:solidFill>
-                  <a:srgbClr val="BCBEC4"/>
-                </a:solidFill>
-                <a:effectLst/>
-                <a:latin typeface="JetBrains Mono"/>
-              </a:rPr>
-              <a:t>(line))</a:t>
-            </a:r>
-            <a:br>
-              <a:rPr lang="en-GB" sz="1000" dirty="0">
-                <a:solidFill>
-                  <a:srgbClr val="BCBEC4"/>
-                </a:solidFill>
-                <a:effectLst/>
-                <a:latin typeface="JetBrains Mono"/>
-              </a:rPr>
-            </a:br>
-            <a:br>
-              <a:rPr lang="en-GB" sz="1000" dirty="0">
-                <a:solidFill>
-                  <a:srgbClr val="BCBEC4"/>
-                </a:solidFill>
-                <a:effectLst/>
-                <a:latin typeface="JetBrains Mono"/>
-              </a:rPr>
-            </a:br>
-            <a:r>
-              <a:rPr lang="en-GB" sz="1000" dirty="0">
-                <a:solidFill>
-                  <a:srgbClr val="8888C6"/>
-                </a:solidFill>
-                <a:effectLst/>
-                <a:latin typeface="JetBrains Mono"/>
-              </a:rPr>
-              <a:t>print</a:t>
-            </a:r>
-            <a:r>
-              <a:rPr lang="en-GB" sz="1000" dirty="0">
-                <a:solidFill>
-                  <a:srgbClr val="BCBEC4"/>
-                </a:solidFill>
-                <a:effectLst/>
-                <a:latin typeface="JetBrains Mono"/>
-              </a:rPr>
-              <a:t>(data)</a:t>
-            </a:r>
-            <a:br>
-              <a:rPr lang="en-GB" sz="1000" dirty="0">
-                <a:solidFill>
-                  <a:srgbClr val="BCBEC4"/>
-                </a:solidFill>
-                <a:effectLst/>
-                <a:latin typeface="JetBrains Mono"/>
-              </a:rPr>
-            </a:br>
-            <a:r>
-              <a:rPr lang="en-GB" sz="1000" dirty="0" err="1">
-                <a:solidFill>
-                  <a:srgbClr val="BCBEC4"/>
-                </a:solidFill>
-                <a:effectLst/>
-                <a:latin typeface="JetBrains Mono"/>
-              </a:rPr>
-              <a:t>seq_len</a:t>
-            </a:r>
-            <a:r>
-              <a:rPr lang="en-GB" sz="1000" dirty="0">
-                <a:solidFill>
-                  <a:srgbClr val="BCBEC4"/>
-                </a:solidFill>
-                <a:effectLst/>
-                <a:latin typeface="JetBrains Mono"/>
-              </a:rPr>
-              <a:t> = </a:t>
-            </a:r>
-            <a:r>
-              <a:rPr lang="en-GB" sz="1000" dirty="0">
-                <a:solidFill>
-                  <a:srgbClr val="2AACB8"/>
-                </a:solidFill>
-                <a:effectLst/>
-                <a:latin typeface="JetBrains Mono"/>
-              </a:rPr>
-              <a:t>30</a:t>
-            </a:r>
-            <a:br>
-              <a:rPr lang="en-GB" sz="1000" dirty="0">
-                <a:solidFill>
-                  <a:srgbClr val="2AACB8"/>
-                </a:solidFill>
-                <a:effectLst/>
-                <a:latin typeface="JetBrains Mono"/>
-              </a:rPr>
-            </a:br>
-            <a:r>
-              <a:rPr lang="en-GB" sz="1000" dirty="0">
-                <a:solidFill>
-                  <a:srgbClr val="BCBEC4"/>
-                </a:solidFill>
-                <a:effectLst/>
-                <a:latin typeface="JetBrains Mono"/>
-              </a:rPr>
-              <a:t>item = data[</a:t>
-            </a:r>
-            <a:r>
-              <a:rPr lang="en-GB" sz="1000" dirty="0">
-                <a:solidFill>
-                  <a:srgbClr val="2AACB8"/>
-                </a:solidFill>
-                <a:effectLst/>
-                <a:latin typeface="JetBrains Mono"/>
-              </a:rPr>
-              <a:t>0</a:t>
-            </a:r>
-            <a:r>
-              <a:rPr lang="en-GB" sz="1000" dirty="0">
-                <a:solidFill>
-                  <a:srgbClr val="BCBEC4"/>
-                </a:solidFill>
-                <a:effectLst/>
-                <a:latin typeface="JetBrains Mono"/>
-              </a:rPr>
-              <a:t>]</a:t>
-            </a:r>
-            <a:br>
-              <a:rPr lang="en-GB" sz="1000" dirty="0">
-                <a:solidFill>
-                  <a:srgbClr val="BCBEC4"/>
-                </a:solidFill>
-                <a:effectLst/>
-                <a:latin typeface="JetBrains Mono"/>
-              </a:rPr>
-            </a:br>
-            <a:br>
-              <a:rPr lang="en-GB" sz="1000" dirty="0">
-                <a:solidFill>
-                  <a:srgbClr val="BCBEC4"/>
-                </a:solidFill>
-                <a:effectLst/>
-                <a:latin typeface="JetBrains Mono"/>
-              </a:rPr>
-            </a:br>
-            <a:r>
-              <a:rPr lang="en-GB" sz="1000" dirty="0" err="1">
-                <a:solidFill>
-                  <a:srgbClr val="BCBEC4"/>
-                </a:solidFill>
-                <a:effectLst/>
-                <a:latin typeface="JetBrains Mono"/>
-              </a:rPr>
-              <a:t>prompt_ids</a:t>
-            </a:r>
-            <a:r>
-              <a:rPr lang="en-GB" sz="1000" dirty="0">
-                <a:solidFill>
-                  <a:srgbClr val="BCBEC4"/>
-                </a:solidFill>
-                <a:effectLst/>
-                <a:latin typeface="JetBrains Mono"/>
-              </a:rPr>
-              <a:t> =  </a:t>
-            </a:r>
-            <a:r>
-              <a:rPr lang="en-GB" sz="1000" dirty="0" err="1">
-                <a:solidFill>
-                  <a:srgbClr val="BCBEC4"/>
-                </a:solidFill>
-                <a:effectLst/>
-                <a:latin typeface="JetBrains Mono"/>
-              </a:rPr>
-              <a:t>tokenizer.encode</a:t>
-            </a:r>
-            <a:r>
-              <a:rPr lang="en-GB" sz="1000" dirty="0">
-                <a:solidFill>
-                  <a:srgbClr val="BCBEC4"/>
-                </a:solidFill>
-                <a:effectLst/>
-                <a:latin typeface="JetBrains Mono"/>
-              </a:rPr>
-              <a:t>(item[</a:t>
-            </a:r>
-            <a:r>
-              <a:rPr lang="en-GB" sz="1000" dirty="0">
-                <a:solidFill>
-                  <a:srgbClr val="6AAB73"/>
-                </a:solidFill>
-                <a:effectLst/>
-                <a:latin typeface="JetBrains Mono"/>
-              </a:rPr>
-              <a:t>"prompt"</a:t>
-            </a:r>
-            <a:r>
-              <a:rPr lang="en-GB" sz="1000" dirty="0">
-                <a:solidFill>
-                  <a:srgbClr val="BCBEC4"/>
-                </a:solidFill>
-                <a:effectLst/>
-                <a:latin typeface="JetBrains Mono"/>
-              </a:rPr>
-              <a:t>])</a:t>
-            </a:r>
-            <a:br>
-              <a:rPr lang="en-GB" sz="1000" dirty="0">
-                <a:solidFill>
-                  <a:srgbClr val="BCBEC4"/>
-                </a:solidFill>
-                <a:effectLst/>
-                <a:latin typeface="JetBrains Mono"/>
-              </a:rPr>
-            </a:br>
-            <a:r>
-              <a:rPr lang="en-GB" sz="1000" dirty="0" err="1">
-                <a:solidFill>
-                  <a:srgbClr val="BCBEC4"/>
-                </a:solidFill>
-                <a:effectLst/>
-                <a:latin typeface="JetBrains Mono"/>
-              </a:rPr>
-              <a:t>response_ids</a:t>
-            </a:r>
-            <a:r>
-              <a:rPr lang="en-GB" sz="1000" dirty="0">
-                <a:solidFill>
-                  <a:srgbClr val="BCBEC4"/>
-                </a:solidFill>
-                <a:effectLst/>
-                <a:latin typeface="JetBrains Mono"/>
-              </a:rPr>
-              <a:t> =</a:t>
-            </a:r>
-            <a:r>
-              <a:rPr lang="en-GB" sz="1000" dirty="0" err="1">
-                <a:solidFill>
-                  <a:srgbClr val="BCBEC4"/>
-                </a:solidFill>
-                <a:effectLst/>
-                <a:latin typeface="JetBrains Mono"/>
-              </a:rPr>
-              <a:t>tokenizer.encode</a:t>
-            </a:r>
-            <a:r>
-              <a:rPr lang="en-GB" sz="1000" dirty="0">
-                <a:solidFill>
-                  <a:srgbClr val="BCBEC4"/>
-                </a:solidFill>
-                <a:effectLst/>
-                <a:latin typeface="JetBrains Mono"/>
-              </a:rPr>
-              <a:t>(item[</a:t>
-            </a:r>
-            <a:r>
-              <a:rPr lang="en-GB" sz="1000" dirty="0">
-                <a:solidFill>
-                  <a:srgbClr val="6AAB73"/>
-                </a:solidFill>
-                <a:effectLst/>
-                <a:latin typeface="JetBrains Mono"/>
-              </a:rPr>
-              <a:t>"response"</a:t>
-            </a:r>
-            <a:r>
-              <a:rPr lang="en-GB" sz="1000" dirty="0">
-                <a:solidFill>
-                  <a:srgbClr val="BCBEC4"/>
-                </a:solidFill>
-                <a:effectLst/>
-                <a:latin typeface="JetBrains Mono"/>
-              </a:rPr>
-              <a:t>])</a:t>
-            </a:r>
-            <a:br>
-              <a:rPr lang="en-GB" sz="1000" dirty="0">
-                <a:solidFill>
-                  <a:srgbClr val="BCBEC4"/>
-                </a:solidFill>
-                <a:effectLst/>
-                <a:latin typeface="JetBrains Mono"/>
-              </a:rPr>
-            </a:br>
-            <a:br>
-              <a:rPr lang="en-GB" sz="1000" dirty="0">
-                <a:solidFill>
-                  <a:srgbClr val="BCBEC4"/>
-                </a:solidFill>
-                <a:effectLst/>
-                <a:latin typeface="JetBrains Mono"/>
-              </a:rPr>
-            </a:br>
-            <a:r>
-              <a:rPr lang="en-GB" sz="1000" dirty="0">
-                <a:solidFill>
-                  <a:srgbClr val="BCBEC4"/>
-                </a:solidFill>
-                <a:effectLst/>
-                <a:latin typeface="JetBrains Mono"/>
-              </a:rPr>
-              <a:t>tokens = </a:t>
-            </a:r>
-            <a:r>
-              <a:rPr lang="en-GB" sz="1000" dirty="0" err="1">
-                <a:solidFill>
-                  <a:srgbClr val="BCBEC4"/>
-                </a:solidFill>
-                <a:effectLst/>
-                <a:latin typeface="JetBrains Mono"/>
-              </a:rPr>
-              <a:t>prompt_ids</a:t>
-            </a:r>
-            <a:r>
-              <a:rPr lang="en-GB" sz="1000" dirty="0">
-                <a:solidFill>
-                  <a:srgbClr val="BCBEC4"/>
-                </a:solidFill>
-                <a:effectLst/>
-                <a:latin typeface="JetBrains Mono"/>
-              </a:rPr>
-              <a:t> + </a:t>
-            </a:r>
-            <a:r>
-              <a:rPr lang="en-GB" sz="1000" dirty="0" err="1">
-                <a:solidFill>
-                  <a:srgbClr val="BCBEC4"/>
-                </a:solidFill>
-                <a:effectLst/>
-                <a:latin typeface="JetBrains Mono"/>
-              </a:rPr>
-              <a:t>response_ids</a:t>
-            </a:r>
-            <a:br>
-              <a:rPr lang="en-GB" sz="1000" dirty="0">
-                <a:solidFill>
-                  <a:srgbClr val="BCBEC4"/>
-                </a:solidFill>
-                <a:effectLst/>
-                <a:latin typeface="JetBrains Mono"/>
-              </a:rPr>
-            </a:br>
-            <a:br>
-              <a:rPr lang="en-GB" sz="1000" dirty="0">
-                <a:solidFill>
-                  <a:srgbClr val="BCBEC4"/>
-                </a:solidFill>
-                <a:effectLst/>
-                <a:latin typeface="JetBrains Mono"/>
-              </a:rPr>
-            </a:br>
-            <a:r>
-              <a:rPr lang="en-GB" sz="1000" dirty="0">
-                <a:solidFill>
-                  <a:srgbClr val="BCBEC4"/>
-                </a:solidFill>
-                <a:effectLst/>
-                <a:latin typeface="JetBrains Mono"/>
-              </a:rPr>
-              <a:t>tokens = tokens[:</a:t>
-            </a:r>
-            <a:r>
-              <a:rPr lang="en-GB" sz="1000" dirty="0" err="1">
-                <a:solidFill>
-                  <a:srgbClr val="BCBEC4"/>
-                </a:solidFill>
-                <a:effectLst/>
-                <a:latin typeface="JetBrains Mono"/>
-              </a:rPr>
-              <a:t>seq_len</a:t>
-            </a:r>
-            <a:r>
-              <a:rPr lang="en-GB" sz="1000" dirty="0">
-                <a:solidFill>
-                  <a:srgbClr val="BCBEC4"/>
-                </a:solidFill>
-                <a:effectLst/>
-                <a:latin typeface="JetBrains Mono"/>
-              </a:rPr>
-              <a:t> + </a:t>
-            </a:r>
-            <a:r>
-              <a:rPr lang="en-GB" sz="1000" dirty="0">
-                <a:solidFill>
-                  <a:srgbClr val="2AACB8"/>
-                </a:solidFill>
-                <a:effectLst/>
-                <a:latin typeface="JetBrains Mono"/>
-              </a:rPr>
-              <a:t>1</a:t>
-            </a:r>
-            <a:r>
-              <a:rPr lang="en-GB" sz="1000" dirty="0">
-                <a:solidFill>
-                  <a:srgbClr val="BCBEC4"/>
-                </a:solidFill>
-                <a:effectLst/>
-                <a:latin typeface="JetBrains Mono"/>
-              </a:rPr>
-              <a:t>]</a:t>
-            </a:r>
-            <a:br>
-              <a:rPr lang="en-GB" sz="1000" dirty="0">
-                <a:solidFill>
-                  <a:srgbClr val="BCBEC4"/>
-                </a:solidFill>
-                <a:effectLst/>
-                <a:latin typeface="JetBrains Mono"/>
-              </a:rPr>
-            </a:br>
-            <a:br>
-              <a:rPr lang="en-GB" sz="1000" dirty="0">
-                <a:solidFill>
-                  <a:srgbClr val="BCBEC4"/>
-                </a:solidFill>
-                <a:effectLst/>
-                <a:latin typeface="JetBrains Mono"/>
-              </a:rPr>
-            </a:br>
-            <a:r>
-              <a:rPr lang="en-GB" sz="1000" dirty="0" err="1">
-                <a:solidFill>
-                  <a:srgbClr val="BCBEC4"/>
-                </a:solidFill>
-                <a:effectLst/>
-                <a:latin typeface="JetBrains Mono"/>
-              </a:rPr>
-              <a:t>pad_id</a:t>
-            </a:r>
-            <a:r>
-              <a:rPr lang="en-GB" sz="1000" dirty="0">
-                <a:solidFill>
-                  <a:srgbClr val="BCBEC4"/>
-                </a:solidFill>
-                <a:effectLst/>
-                <a:latin typeface="JetBrains Mono"/>
-              </a:rPr>
-              <a:t> = </a:t>
-            </a:r>
-            <a:r>
-              <a:rPr lang="en-GB" sz="1000" dirty="0">
-                <a:solidFill>
-                  <a:srgbClr val="2AACB8"/>
-                </a:solidFill>
-                <a:effectLst/>
-                <a:latin typeface="JetBrains Mono"/>
-              </a:rPr>
-              <a:t>0</a:t>
-            </a:r>
-            <a:br>
-              <a:rPr lang="en-GB" sz="1000" dirty="0">
-                <a:solidFill>
-                  <a:srgbClr val="2AACB8"/>
-                </a:solidFill>
-                <a:effectLst/>
-                <a:latin typeface="JetBrains Mono"/>
-              </a:rPr>
-            </a:br>
-            <a:r>
-              <a:rPr lang="en-GB" sz="1000" dirty="0" err="1">
-                <a:solidFill>
-                  <a:srgbClr val="BCBEC4"/>
-                </a:solidFill>
-                <a:effectLst/>
-                <a:latin typeface="JetBrains Mono"/>
-              </a:rPr>
-              <a:t>pad_len</a:t>
-            </a:r>
-            <a:r>
-              <a:rPr lang="en-GB" sz="1000" dirty="0">
-                <a:solidFill>
-                  <a:srgbClr val="BCBEC4"/>
-                </a:solidFill>
-                <a:effectLst/>
-                <a:latin typeface="JetBrains Mono"/>
-              </a:rPr>
-              <a:t> = (</a:t>
-            </a:r>
-            <a:r>
-              <a:rPr lang="en-GB" sz="1000" dirty="0" err="1">
-                <a:solidFill>
-                  <a:srgbClr val="BCBEC4"/>
-                </a:solidFill>
-                <a:effectLst/>
-                <a:latin typeface="JetBrains Mono"/>
-              </a:rPr>
-              <a:t>seq_len</a:t>
-            </a:r>
-            <a:r>
-              <a:rPr lang="en-GB" sz="1000" dirty="0">
-                <a:solidFill>
-                  <a:srgbClr val="BCBEC4"/>
-                </a:solidFill>
-                <a:effectLst/>
-                <a:latin typeface="JetBrains Mono"/>
-              </a:rPr>
-              <a:t> + </a:t>
-            </a:r>
-            <a:r>
-              <a:rPr lang="en-GB" sz="1000" dirty="0">
-                <a:solidFill>
-                  <a:srgbClr val="2AACB8"/>
-                </a:solidFill>
-                <a:effectLst/>
-                <a:latin typeface="JetBrains Mono"/>
-              </a:rPr>
-              <a:t>1</a:t>
-            </a:r>
-            <a:r>
-              <a:rPr lang="en-GB" sz="1000" dirty="0">
-                <a:solidFill>
-                  <a:srgbClr val="BCBEC4"/>
-                </a:solidFill>
-                <a:effectLst/>
-                <a:latin typeface="JetBrains Mono"/>
-              </a:rPr>
-              <a:t>) - </a:t>
-            </a:r>
-            <a:r>
-              <a:rPr lang="en-GB" sz="1000" dirty="0" err="1">
-                <a:solidFill>
-                  <a:srgbClr val="8888C6"/>
-                </a:solidFill>
-                <a:effectLst/>
-                <a:latin typeface="JetBrains Mono"/>
-              </a:rPr>
-              <a:t>len</a:t>
-            </a:r>
-            <a:r>
-              <a:rPr lang="en-GB" sz="1000" dirty="0">
-                <a:solidFill>
-                  <a:srgbClr val="BCBEC4"/>
-                </a:solidFill>
-                <a:effectLst/>
-                <a:latin typeface="JetBrains Mono"/>
-              </a:rPr>
-              <a:t>(tokens)</a:t>
-            </a:r>
-            <a:br>
-              <a:rPr lang="en-GB" sz="1000" dirty="0">
-                <a:solidFill>
-                  <a:srgbClr val="BCBEC4"/>
-                </a:solidFill>
-                <a:effectLst/>
-                <a:latin typeface="JetBrains Mono"/>
-              </a:rPr>
-            </a:br>
-            <a:r>
-              <a:rPr lang="en-GB" sz="1000" dirty="0">
-                <a:solidFill>
-                  <a:srgbClr val="BCBEC4"/>
-                </a:solidFill>
-                <a:effectLst/>
-                <a:latin typeface="JetBrains Mono"/>
-              </a:rPr>
-              <a:t>tokens = tokens + [</a:t>
-            </a:r>
-            <a:r>
-              <a:rPr lang="en-GB" sz="1000" dirty="0" err="1">
-                <a:solidFill>
-                  <a:srgbClr val="BCBEC4"/>
-                </a:solidFill>
-                <a:effectLst/>
-                <a:latin typeface="JetBrains Mono"/>
-              </a:rPr>
-              <a:t>pad_id</a:t>
-            </a:r>
-            <a:r>
-              <a:rPr lang="en-GB" sz="1000" dirty="0">
-                <a:solidFill>
-                  <a:srgbClr val="BCBEC4"/>
-                </a:solidFill>
-                <a:effectLst/>
-                <a:latin typeface="JetBrains Mono"/>
-              </a:rPr>
-              <a:t>] * </a:t>
-            </a:r>
-            <a:r>
-              <a:rPr lang="en-GB" sz="1000" dirty="0" err="1">
-                <a:solidFill>
-                  <a:srgbClr val="BCBEC4"/>
-                </a:solidFill>
-                <a:effectLst/>
-                <a:latin typeface="JetBrains Mono"/>
-              </a:rPr>
-              <a:t>pad_len</a:t>
-            </a:r>
-            <a:br>
-              <a:rPr lang="en-GB" sz="1000" dirty="0">
-                <a:solidFill>
-                  <a:srgbClr val="BCBEC4"/>
-                </a:solidFill>
-                <a:effectLst/>
-                <a:latin typeface="JetBrains Mono"/>
-              </a:rPr>
-            </a:br>
-            <a:r>
-              <a:rPr lang="en-GB" sz="1000" dirty="0">
-                <a:solidFill>
-                  <a:srgbClr val="8888C6"/>
-                </a:solidFill>
-                <a:effectLst/>
-                <a:latin typeface="JetBrains Mono"/>
-              </a:rPr>
-              <a:t>print</a:t>
-            </a:r>
-            <a:r>
-              <a:rPr lang="en-GB" sz="1000" dirty="0">
-                <a:solidFill>
-                  <a:srgbClr val="BCBEC4"/>
-                </a:solidFill>
-                <a:effectLst/>
-                <a:latin typeface="JetBrains Mono"/>
-              </a:rPr>
-              <a:t>(tokens)</a:t>
-            </a:r>
-            <a:br>
-              <a:rPr lang="en-GB" sz="1000" dirty="0">
-                <a:solidFill>
-                  <a:srgbClr val="BCBEC4"/>
-                </a:solidFill>
-                <a:effectLst/>
-                <a:latin typeface="JetBrains Mono"/>
-              </a:rPr>
-            </a:br>
-            <a:br>
-              <a:rPr lang="en-GB" sz="1000" dirty="0">
-                <a:solidFill>
-                  <a:srgbClr val="BCBEC4"/>
-                </a:solidFill>
-                <a:effectLst/>
-                <a:latin typeface="JetBrains Mono"/>
-              </a:rPr>
-            </a:br>
-            <a:r>
-              <a:rPr lang="en-GB" sz="1000" dirty="0">
-                <a:solidFill>
-                  <a:srgbClr val="BCBEC4"/>
-                </a:solidFill>
-                <a:effectLst/>
-                <a:latin typeface="JetBrains Mono"/>
-              </a:rPr>
-              <a:t>x = tokens[:-</a:t>
-            </a:r>
-            <a:r>
-              <a:rPr lang="en-GB" sz="1000" dirty="0">
-                <a:solidFill>
-                  <a:srgbClr val="2AACB8"/>
-                </a:solidFill>
-                <a:effectLst/>
-                <a:latin typeface="JetBrains Mono"/>
-              </a:rPr>
-              <a:t>1</a:t>
-            </a:r>
-            <a:r>
-              <a:rPr lang="en-GB" sz="1000" dirty="0">
-                <a:solidFill>
-                  <a:srgbClr val="BCBEC4"/>
-                </a:solidFill>
-                <a:effectLst/>
-                <a:latin typeface="JetBrains Mono"/>
-              </a:rPr>
-              <a:t>]</a:t>
-            </a:r>
-            <a:br>
-              <a:rPr lang="en-GB" sz="1000" dirty="0">
-                <a:solidFill>
-                  <a:srgbClr val="BCBEC4"/>
-                </a:solidFill>
-                <a:effectLst/>
-                <a:latin typeface="JetBrains Mono"/>
-              </a:rPr>
-            </a:br>
-            <a:r>
-              <a:rPr lang="en-GB" sz="1000" dirty="0">
-                <a:solidFill>
-                  <a:srgbClr val="BCBEC4"/>
-                </a:solidFill>
-                <a:effectLst/>
-                <a:latin typeface="JetBrains Mono"/>
-              </a:rPr>
-              <a:t>y = tokens[</a:t>
-            </a:r>
-            <a:r>
-              <a:rPr lang="en-GB" sz="1000" dirty="0">
-                <a:solidFill>
-                  <a:srgbClr val="2AACB8"/>
-                </a:solidFill>
-                <a:effectLst/>
-                <a:latin typeface="JetBrains Mono"/>
-              </a:rPr>
-              <a:t>1</a:t>
-            </a:r>
-            <a:r>
-              <a:rPr lang="en-GB" sz="1000" dirty="0">
-                <a:solidFill>
-                  <a:srgbClr val="BCBEC4"/>
-                </a:solidFill>
-                <a:effectLst/>
-                <a:latin typeface="JetBrains Mono"/>
-              </a:rPr>
-              <a:t>:]</a:t>
-            </a:r>
-            <a:br>
-              <a:rPr lang="en-GB" sz="1000" dirty="0">
-                <a:solidFill>
-                  <a:srgbClr val="BCBEC4"/>
-                </a:solidFill>
-                <a:effectLst/>
-                <a:latin typeface="JetBrains Mono"/>
-              </a:rPr>
-            </a:br>
-            <a:br>
-              <a:rPr lang="en-GB" sz="1000" dirty="0">
-                <a:solidFill>
-                  <a:srgbClr val="BCBEC4"/>
-                </a:solidFill>
-                <a:effectLst/>
-                <a:latin typeface="JetBrains Mono"/>
-              </a:rPr>
-            </a:br>
-            <a:r>
-              <a:rPr lang="en-GB" sz="1000" dirty="0">
-                <a:solidFill>
-                  <a:srgbClr val="8888C6"/>
-                </a:solidFill>
-                <a:effectLst/>
-                <a:latin typeface="JetBrains Mono"/>
-              </a:rPr>
-              <a:t>print</a:t>
-            </a:r>
-            <a:r>
-              <a:rPr lang="en-GB" sz="1000" dirty="0">
-                <a:solidFill>
-                  <a:srgbClr val="BCBEC4"/>
-                </a:solidFill>
-                <a:effectLst/>
-                <a:latin typeface="JetBrains Mono"/>
-              </a:rPr>
-              <a:t>(x)</a:t>
-            </a:r>
-            <a:br>
-              <a:rPr lang="en-GB" sz="1000" dirty="0">
-                <a:solidFill>
-                  <a:srgbClr val="BCBEC4"/>
-                </a:solidFill>
-                <a:effectLst/>
-                <a:latin typeface="JetBrains Mono"/>
-              </a:rPr>
-            </a:br>
-            <a:r>
-              <a:rPr lang="en-GB" sz="1000" dirty="0">
-                <a:solidFill>
-                  <a:srgbClr val="8888C6"/>
-                </a:solidFill>
-                <a:effectLst/>
-                <a:latin typeface="JetBrains Mono"/>
-              </a:rPr>
-              <a:t>print</a:t>
-            </a:r>
-            <a:r>
-              <a:rPr lang="en-GB" sz="1000" dirty="0">
-                <a:solidFill>
-                  <a:srgbClr val="BCBEC4"/>
-                </a:solidFill>
-                <a:effectLst/>
-                <a:latin typeface="JetBrains Mono"/>
-              </a:rPr>
-              <a:t>(y)</a:t>
-            </a:r>
-            <a:br>
-              <a:rPr lang="en-GB" sz="1000" dirty="0">
-                <a:solidFill>
-                  <a:srgbClr val="BCBEC4"/>
-                </a:solidFill>
-                <a:effectLst/>
-                <a:latin typeface="JetBrains Mono"/>
-              </a:rPr>
-            </a:br>
-            <a:br>
-              <a:rPr lang="en-GB" sz="1000" dirty="0">
-                <a:solidFill>
-                  <a:srgbClr val="BCBEC4"/>
-                </a:solidFill>
-                <a:effectLst/>
-                <a:latin typeface="JetBrains Mono"/>
-              </a:rPr>
-            </a:br>
-            <a:r>
-              <a:rPr lang="en-GB" sz="1000" dirty="0">
-                <a:solidFill>
-                  <a:srgbClr val="BCBEC4"/>
-                </a:solidFill>
-                <a:effectLst/>
-                <a:latin typeface="JetBrains Mono"/>
-              </a:rPr>
-              <a:t>labels = </a:t>
-            </a:r>
-            <a:r>
-              <a:rPr lang="en-GB" sz="1000" dirty="0" err="1">
-                <a:solidFill>
-                  <a:srgbClr val="BCBEC4"/>
-                </a:solidFill>
-                <a:effectLst/>
-                <a:latin typeface="JetBrains Mono"/>
-              </a:rPr>
-              <a:t>y.copy</a:t>
-            </a:r>
-            <a:r>
-              <a:rPr lang="en-GB" sz="1000" dirty="0">
-                <a:solidFill>
-                  <a:srgbClr val="BCBEC4"/>
-                </a:solidFill>
-                <a:effectLst/>
-                <a:latin typeface="JetBrains Mono"/>
-              </a:rPr>
-              <a:t>()</a:t>
-            </a:r>
-            <a:br>
-              <a:rPr lang="en-GB" sz="1000" dirty="0">
-                <a:solidFill>
-                  <a:srgbClr val="BCBEC4"/>
-                </a:solidFill>
-                <a:effectLst/>
-                <a:latin typeface="JetBrains Mono"/>
-              </a:rPr>
-            </a:br>
-            <a:br>
-              <a:rPr lang="en-GB" sz="1000" dirty="0">
-                <a:solidFill>
-                  <a:srgbClr val="BCBEC4"/>
-                </a:solidFill>
-                <a:effectLst/>
-                <a:latin typeface="JetBrains Mono"/>
-              </a:rPr>
-            </a:br>
-            <a:r>
-              <a:rPr lang="en-GB" sz="1000" dirty="0" err="1">
-                <a:solidFill>
-                  <a:srgbClr val="BCBEC4"/>
-                </a:solidFill>
-                <a:effectLst/>
-                <a:latin typeface="JetBrains Mono"/>
-              </a:rPr>
-              <a:t>prompt_len</a:t>
-            </a:r>
-            <a:r>
-              <a:rPr lang="en-GB" sz="1000" dirty="0">
-                <a:solidFill>
-                  <a:srgbClr val="BCBEC4"/>
-                </a:solidFill>
-                <a:effectLst/>
-                <a:latin typeface="JetBrains Mono"/>
-              </a:rPr>
-              <a:t> = </a:t>
-            </a:r>
-            <a:r>
-              <a:rPr lang="en-GB" sz="1000" dirty="0">
-                <a:solidFill>
-                  <a:srgbClr val="8888C6"/>
-                </a:solidFill>
-                <a:effectLst/>
-                <a:latin typeface="JetBrains Mono"/>
-              </a:rPr>
-              <a:t>min</a:t>
-            </a:r>
-            <a:r>
-              <a:rPr lang="en-GB" sz="1000" dirty="0">
-                <a:solidFill>
-                  <a:srgbClr val="BCBEC4"/>
-                </a:solidFill>
-                <a:effectLst/>
-                <a:latin typeface="JetBrains Mono"/>
-              </a:rPr>
-              <a:t>(</a:t>
-            </a:r>
-            <a:r>
-              <a:rPr lang="en-GB" sz="1000" dirty="0" err="1">
-                <a:solidFill>
-                  <a:srgbClr val="8888C6"/>
-                </a:solidFill>
-                <a:effectLst/>
-                <a:latin typeface="JetBrains Mono"/>
-              </a:rPr>
-              <a:t>len</a:t>
-            </a:r>
-            <a:r>
-              <a:rPr lang="en-GB" sz="1000" dirty="0">
-                <a:solidFill>
-                  <a:srgbClr val="BCBEC4"/>
-                </a:solidFill>
-                <a:effectLst/>
-                <a:latin typeface="JetBrains Mono"/>
-              </a:rPr>
-              <a:t>(</a:t>
-            </a:r>
-            <a:r>
-              <a:rPr lang="en-GB" sz="1000" dirty="0" err="1">
-                <a:solidFill>
-                  <a:srgbClr val="BCBEC4"/>
-                </a:solidFill>
-                <a:effectLst/>
-                <a:latin typeface="JetBrains Mono"/>
-              </a:rPr>
-              <a:t>prompt_ids</a:t>
-            </a:r>
-            <a:r>
-              <a:rPr lang="en-GB" sz="1000" dirty="0">
-                <a:solidFill>
-                  <a:srgbClr val="BCBEC4"/>
-                </a:solidFill>
-                <a:effectLst/>
-                <a:latin typeface="JetBrains Mono"/>
-              </a:rPr>
-              <a:t>),</a:t>
-            </a:r>
-            <a:r>
-              <a:rPr lang="en-GB" sz="1000" dirty="0" err="1">
-                <a:solidFill>
-                  <a:srgbClr val="BCBEC4"/>
-                </a:solidFill>
-                <a:effectLst/>
-                <a:latin typeface="JetBrains Mono"/>
-              </a:rPr>
-              <a:t>seq_len</a:t>
-            </a:r>
-            <a:r>
-              <a:rPr lang="en-GB" sz="1000" dirty="0">
-                <a:solidFill>
-                  <a:srgbClr val="BCBEC4"/>
-                </a:solidFill>
-                <a:effectLst/>
-                <a:latin typeface="JetBrains Mono"/>
-              </a:rPr>
-              <a:t>)</a:t>
-            </a:r>
-            <a:br>
-              <a:rPr lang="en-GB" sz="1000" dirty="0">
-                <a:solidFill>
-                  <a:srgbClr val="BCBEC4"/>
-                </a:solidFill>
-                <a:effectLst/>
-                <a:latin typeface="JetBrains Mono"/>
-              </a:rPr>
-            </a:br>
-            <a:r>
-              <a:rPr lang="en-GB" sz="1000" dirty="0" err="1">
-                <a:solidFill>
-                  <a:srgbClr val="BCBEC4"/>
-                </a:solidFill>
-                <a:effectLst/>
-                <a:latin typeface="JetBrains Mono"/>
-              </a:rPr>
-              <a:t>mask_len</a:t>
-            </a:r>
-            <a:r>
-              <a:rPr lang="en-GB" sz="1000" dirty="0">
-                <a:solidFill>
-                  <a:srgbClr val="BCBEC4"/>
-                </a:solidFill>
-                <a:effectLst/>
-                <a:latin typeface="JetBrains Mono"/>
-              </a:rPr>
-              <a:t> = </a:t>
-            </a:r>
-            <a:r>
-              <a:rPr lang="en-GB" sz="1000" dirty="0">
-                <a:solidFill>
-                  <a:srgbClr val="8888C6"/>
-                </a:solidFill>
-                <a:effectLst/>
-                <a:latin typeface="JetBrains Mono"/>
-              </a:rPr>
-              <a:t>max</a:t>
-            </a:r>
-            <a:r>
-              <a:rPr lang="en-GB" sz="1000" dirty="0">
-                <a:solidFill>
-                  <a:srgbClr val="BCBEC4"/>
-                </a:solidFill>
-                <a:effectLst/>
-                <a:latin typeface="JetBrains Mono"/>
-              </a:rPr>
-              <a:t>(</a:t>
-            </a:r>
-            <a:r>
-              <a:rPr lang="en-GB" sz="1000" dirty="0">
-                <a:solidFill>
-                  <a:srgbClr val="2AACB8"/>
-                </a:solidFill>
-                <a:effectLst/>
-                <a:latin typeface="JetBrains Mono"/>
-              </a:rPr>
-              <a:t>0</a:t>
-            </a:r>
-            <a:r>
-              <a:rPr lang="en-GB" sz="1000" dirty="0">
-                <a:solidFill>
-                  <a:srgbClr val="BCBEC4"/>
-                </a:solidFill>
-                <a:effectLst/>
-                <a:latin typeface="JetBrains Mono"/>
-              </a:rPr>
-              <a:t>, </a:t>
-            </a:r>
-            <a:r>
-              <a:rPr lang="en-GB" sz="1000" dirty="0" err="1">
-                <a:solidFill>
-                  <a:srgbClr val="BCBEC4"/>
-                </a:solidFill>
-                <a:effectLst/>
-                <a:latin typeface="JetBrains Mono"/>
-              </a:rPr>
-              <a:t>prompt_len</a:t>
-            </a:r>
-            <a:r>
-              <a:rPr lang="en-GB" sz="1000" dirty="0">
-                <a:solidFill>
-                  <a:srgbClr val="BCBEC4"/>
-                </a:solidFill>
-                <a:effectLst/>
-                <a:latin typeface="JetBrains Mono"/>
-              </a:rPr>
-              <a:t> - </a:t>
-            </a:r>
-            <a:r>
-              <a:rPr lang="en-GB" sz="1000" dirty="0">
-                <a:solidFill>
-                  <a:srgbClr val="2AACB8"/>
-                </a:solidFill>
-                <a:effectLst/>
-                <a:latin typeface="JetBrains Mono"/>
-              </a:rPr>
-              <a:t>1</a:t>
-            </a:r>
-            <a:r>
-              <a:rPr lang="en-GB" sz="1000" dirty="0">
-                <a:solidFill>
-                  <a:srgbClr val="BCBEC4"/>
-                </a:solidFill>
-                <a:effectLst/>
-                <a:latin typeface="JetBrains Mono"/>
-              </a:rPr>
-              <a:t>)</a:t>
-            </a:r>
-            <a:br>
-              <a:rPr lang="en-GB" sz="1000" dirty="0">
-                <a:solidFill>
-                  <a:srgbClr val="BCBEC4"/>
-                </a:solidFill>
-                <a:effectLst/>
-                <a:latin typeface="JetBrains Mono"/>
-              </a:rPr>
-            </a:br>
-            <a:r>
-              <a:rPr lang="en-GB" sz="1000" dirty="0">
-                <a:solidFill>
-                  <a:srgbClr val="BCBEC4"/>
-                </a:solidFill>
-                <a:effectLst/>
-                <a:latin typeface="JetBrains Mono"/>
-              </a:rPr>
-              <a:t>labels[:</a:t>
-            </a:r>
-            <a:r>
-              <a:rPr lang="en-GB" sz="1000" dirty="0" err="1">
-                <a:solidFill>
-                  <a:srgbClr val="BCBEC4"/>
-                </a:solidFill>
-                <a:effectLst/>
-                <a:latin typeface="JetBrains Mono"/>
-              </a:rPr>
-              <a:t>mask_len</a:t>
-            </a:r>
-            <a:r>
-              <a:rPr lang="en-GB" sz="1000" dirty="0">
-                <a:solidFill>
-                  <a:srgbClr val="BCBEC4"/>
-                </a:solidFill>
-                <a:effectLst/>
-                <a:latin typeface="JetBrains Mono"/>
-              </a:rPr>
-              <a:t>] = [-</a:t>
-            </a:r>
-            <a:r>
-              <a:rPr lang="en-GB" sz="1000" dirty="0">
-                <a:solidFill>
-                  <a:srgbClr val="2AACB8"/>
-                </a:solidFill>
-                <a:effectLst/>
-                <a:latin typeface="JetBrains Mono"/>
-              </a:rPr>
-              <a:t>100</a:t>
-            </a:r>
-            <a:r>
-              <a:rPr lang="en-GB" sz="1000" dirty="0">
-                <a:solidFill>
-                  <a:srgbClr val="BCBEC4"/>
-                </a:solidFill>
-                <a:effectLst/>
-                <a:latin typeface="JetBrains Mono"/>
-              </a:rPr>
-              <a:t>] * </a:t>
-            </a:r>
-            <a:r>
-              <a:rPr lang="en-GB" sz="1000" dirty="0" err="1">
-                <a:solidFill>
-                  <a:srgbClr val="BCBEC4"/>
-                </a:solidFill>
-                <a:effectLst/>
-                <a:latin typeface="JetBrains Mono"/>
-              </a:rPr>
-              <a:t>mask_len</a:t>
-            </a:r>
-            <a:br>
-              <a:rPr lang="en-GB" sz="1000" dirty="0">
-                <a:solidFill>
-                  <a:srgbClr val="BCBEC4"/>
-                </a:solidFill>
-                <a:effectLst/>
-                <a:latin typeface="JetBrains Mono"/>
-              </a:rPr>
-            </a:br>
-            <a:br>
-              <a:rPr lang="en-GB" sz="1000" dirty="0">
-                <a:solidFill>
-                  <a:srgbClr val="BCBEC4"/>
-                </a:solidFill>
-                <a:effectLst/>
-                <a:latin typeface="JetBrains Mono"/>
-              </a:rPr>
-            </a:br>
-            <a:r>
-              <a:rPr lang="en-GB" sz="1000" dirty="0">
-                <a:solidFill>
-                  <a:srgbClr val="8888C6"/>
-                </a:solidFill>
-                <a:effectLst/>
-                <a:latin typeface="JetBrains Mono"/>
-              </a:rPr>
-              <a:t>print</a:t>
-            </a:r>
-            <a:r>
-              <a:rPr lang="en-GB" sz="1000" dirty="0">
-                <a:solidFill>
-                  <a:srgbClr val="BCBEC4"/>
-                </a:solidFill>
-                <a:effectLst/>
-                <a:latin typeface="JetBrains Mono"/>
-              </a:rPr>
-              <a:t>(labels)</a:t>
-            </a:r>
-            <a:br>
-              <a:rPr lang="en-GB" sz="1000" dirty="0">
-                <a:solidFill>
-                  <a:srgbClr val="BCBEC4"/>
-                </a:solidFill>
-                <a:effectLst/>
-                <a:latin typeface="JetBrains Mono"/>
-              </a:rPr>
-            </a:br>
-            <a:br>
-              <a:rPr lang="en-GB" sz="1000" dirty="0">
-                <a:solidFill>
-                  <a:srgbClr val="BCBEC4"/>
-                </a:solidFill>
-                <a:effectLst/>
-                <a:latin typeface="JetBrains Mono"/>
-              </a:rPr>
-            </a:br>
-            <a:r>
-              <a:rPr lang="en-GB" sz="1000" dirty="0" err="1">
-                <a:solidFill>
-                  <a:srgbClr val="BCBEC4"/>
-                </a:solidFill>
-                <a:effectLst/>
-                <a:latin typeface="JetBrains Mono"/>
-              </a:rPr>
-              <a:t>real_len</a:t>
-            </a:r>
-            <a:r>
-              <a:rPr lang="en-GB" sz="1000" dirty="0">
-                <a:solidFill>
-                  <a:srgbClr val="BCBEC4"/>
-                </a:solidFill>
-                <a:effectLst/>
-                <a:latin typeface="JetBrains Mono"/>
-              </a:rPr>
-              <a:t> = </a:t>
-            </a:r>
-            <a:r>
-              <a:rPr lang="en-GB" sz="1000" dirty="0">
-                <a:solidFill>
-                  <a:srgbClr val="8888C6"/>
-                </a:solidFill>
-                <a:effectLst/>
-                <a:latin typeface="JetBrains Mono"/>
-              </a:rPr>
-              <a:t>min</a:t>
-            </a:r>
-            <a:r>
-              <a:rPr lang="en-GB" sz="1000" dirty="0">
-                <a:solidFill>
-                  <a:srgbClr val="BCBEC4"/>
-                </a:solidFill>
-                <a:effectLst/>
-                <a:latin typeface="JetBrains Mono"/>
-              </a:rPr>
-              <a:t>(</a:t>
-            </a:r>
-            <a:r>
-              <a:rPr lang="en-GB" sz="1000" dirty="0" err="1">
-                <a:solidFill>
-                  <a:srgbClr val="8888C6"/>
-                </a:solidFill>
-                <a:effectLst/>
-                <a:latin typeface="JetBrains Mono"/>
-              </a:rPr>
-              <a:t>len</a:t>
-            </a:r>
-            <a:r>
-              <a:rPr lang="en-GB" sz="1000" dirty="0">
-                <a:solidFill>
-                  <a:srgbClr val="BCBEC4"/>
-                </a:solidFill>
-                <a:effectLst/>
-                <a:latin typeface="JetBrains Mono"/>
-              </a:rPr>
-              <a:t>(</a:t>
-            </a:r>
-            <a:r>
-              <a:rPr lang="en-GB" sz="1000" dirty="0" err="1">
-                <a:solidFill>
-                  <a:srgbClr val="BCBEC4"/>
-                </a:solidFill>
-                <a:effectLst/>
-                <a:latin typeface="JetBrains Mono"/>
-              </a:rPr>
-              <a:t>prompt_ids</a:t>
-            </a:r>
-            <a:r>
-              <a:rPr lang="en-GB" sz="1000" dirty="0">
-                <a:solidFill>
-                  <a:srgbClr val="BCBEC4"/>
-                </a:solidFill>
-                <a:effectLst/>
-                <a:latin typeface="JetBrains Mono"/>
-              </a:rPr>
-              <a:t>) + </a:t>
-            </a:r>
-            <a:r>
-              <a:rPr lang="en-GB" sz="1000" dirty="0" err="1">
-                <a:solidFill>
-                  <a:srgbClr val="8888C6"/>
-                </a:solidFill>
-                <a:effectLst/>
-                <a:latin typeface="JetBrains Mono"/>
-              </a:rPr>
-              <a:t>len</a:t>
-            </a:r>
-            <a:r>
-              <a:rPr lang="en-GB" sz="1000" dirty="0">
-                <a:solidFill>
-                  <a:srgbClr val="BCBEC4"/>
-                </a:solidFill>
-                <a:effectLst/>
-                <a:latin typeface="JetBrains Mono"/>
-              </a:rPr>
-              <a:t>(</a:t>
-            </a:r>
-            <a:r>
-              <a:rPr lang="en-GB" sz="1000" dirty="0" err="1">
-                <a:solidFill>
-                  <a:srgbClr val="BCBEC4"/>
-                </a:solidFill>
-                <a:effectLst/>
-                <a:latin typeface="JetBrains Mono"/>
-              </a:rPr>
-              <a:t>response_ids</a:t>
-            </a:r>
-            <a:r>
-              <a:rPr lang="en-GB" sz="1000" dirty="0">
-                <a:solidFill>
-                  <a:srgbClr val="BCBEC4"/>
-                </a:solidFill>
-                <a:effectLst/>
-                <a:latin typeface="JetBrains Mono"/>
-              </a:rPr>
-              <a:t>),</a:t>
-            </a:r>
-            <a:r>
-              <a:rPr lang="en-GB" sz="1000" dirty="0" err="1">
-                <a:solidFill>
-                  <a:srgbClr val="BCBEC4"/>
-                </a:solidFill>
-                <a:effectLst/>
-                <a:latin typeface="JetBrains Mono"/>
-              </a:rPr>
-              <a:t>seq_len</a:t>
-            </a:r>
-            <a:r>
-              <a:rPr lang="en-GB" sz="1000" dirty="0">
-                <a:solidFill>
-                  <a:srgbClr val="BCBEC4"/>
-                </a:solidFill>
-                <a:effectLst/>
-                <a:latin typeface="JetBrains Mono"/>
-              </a:rPr>
-              <a:t> + </a:t>
-            </a:r>
-            <a:r>
-              <a:rPr lang="en-GB" sz="1000" dirty="0">
-                <a:solidFill>
-                  <a:srgbClr val="2AACB8"/>
-                </a:solidFill>
-                <a:effectLst/>
-                <a:latin typeface="JetBrains Mono"/>
-              </a:rPr>
-              <a:t>1</a:t>
-            </a:r>
-            <a:r>
-              <a:rPr lang="en-GB" sz="1000" dirty="0">
-                <a:solidFill>
-                  <a:srgbClr val="BCBEC4"/>
-                </a:solidFill>
-                <a:effectLst/>
-                <a:latin typeface="JetBrains Mono"/>
-              </a:rPr>
-              <a:t>) - </a:t>
-            </a:r>
-            <a:r>
-              <a:rPr lang="en-GB" sz="1000" dirty="0">
-                <a:solidFill>
-                  <a:srgbClr val="2AACB8"/>
-                </a:solidFill>
-                <a:effectLst/>
-                <a:latin typeface="JetBrains Mono"/>
-              </a:rPr>
-              <a:t>1</a:t>
-            </a:r>
-            <a:br>
-              <a:rPr lang="en-GB" sz="1000" dirty="0">
-                <a:solidFill>
-                  <a:srgbClr val="2AACB8"/>
-                </a:solidFill>
-                <a:effectLst/>
-                <a:latin typeface="JetBrains Mono"/>
-              </a:rPr>
-            </a:br>
-            <a:r>
-              <a:rPr lang="en-GB" sz="1000" dirty="0">
-                <a:solidFill>
-                  <a:srgbClr val="BCBEC4"/>
-                </a:solidFill>
-                <a:effectLst/>
-                <a:latin typeface="JetBrains Mono"/>
-              </a:rPr>
-              <a:t>labels[</a:t>
-            </a:r>
-            <a:r>
-              <a:rPr lang="en-GB" sz="1000" dirty="0" err="1">
-                <a:solidFill>
-                  <a:srgbClr val="BCBEC4"/>
-                </a:solidFill>
-                <a:effectLst/>
-                <a:latin typeface="JetBrains Mono"/>
-              </a:rPr>
-              <a:t>real_len</a:t>
-            </a:r>
-            <a:r>
-              <a:rPr lang="en-GB" sz="1000" dirty="0">
-                <a:solidFill>
-                  <a:srgbClr val="BCBEC4"/>
-                </a:solidFill>
-                <a:effectLst/>
-                <a:latin typeface="JetBrains Mono"/>
-              </a:rPr>
-              <a:t>:] = [-</a:t>
-            </a:r>
-            <a:r>
-              <a:rPr lang="en-GB" sz="1000" dirty="0">
-                <a:solidFill>
-                  <a:srgbClr val="2AACB8"/>
-                </a:solidFill>
-                <a:effectLst/>
-                <a:latin typeface="JetBrains Mono"/>
-              </a:rPr>
-              <a:t>100</a:t>
-            </a:r>
-            <a:r>
-              <a:rPr lang="en-GB" sz="1000" dirty="0">
-                <a:solidFill>
-                  <a:srgbClr val="BCBEC4"/>
-                </a:solidFill>
-                <a:effectLst/>
-                <a:latin typeface="JetBrains Mono"/>
-              </a:rPr>
-              <a:t>] * (</a:t>
-            </a:r>
-            <a:r>
-              <a:rPr lang="en-GB" sz="1000" dirty="0" err="1">
-                <a:solidFill>
-                  <a:srgbClr val="BCBEC4"/>
-                </a:solidFill>
-                <a:effectLst/>
-                <a:latin typeface="JetBrains Mono"/>
-              </a:rPr>
-              <a:t>seq_len</a:t>
-            </a:r>
-            <a:r>
-              <a:rPr lang="en-GB" sz="1000" dirty="0">
-                <a:solidFill>
-                  <a:srgbClr val="BCBEC4"/>
-                </a:solidFill>
-                <a:effectLst/>
-                <a:latin typeface="JetBrains Mono"/>
-              </a:rPr>
-              <a:t> - </a:t>
-            </a:r>
-            <a:r>
-              <a:rPr lang="en-GB" sz="1000" dirty="0" err="1">
-                <a:solidFill>
-                  <a:srgbClr val="BCBEC4"/>
-                </a:solidFill>
-                <a:effectLst/>
-                <a:latin typeface="JetBrains Mono"/>
-              </a:rPr>
-              <a:t>real_len</a:t>
-            </a:r>
-            <a:r>
-              <a:rPr lang="en-GB" sz="1000" dirty="0">
-                <a:solidFill>
-                  <a:srgbClr val="BCBEC4"/>
-                </a:solidFill>
-                <a:effectLst/>
-                <a:latin typeface="JetBrains Mono"/>
-              </a:rPr>
-              <a:t>)</a:t>
-            </a:r>
-            <a:br>
-              <a:rPr lang="en-GB" sz="1000" dirty="0">
-                <a:solidFill>
-                  <a:srgbClr val="BCBEC4"/>
-                </a:solidFill>
-                <a:effectLst/>
-                <a:latin typeface="JetBrains Mono"/>
-              </a:rPr>
-            </a:br>
-            <a:br>
-              <a:rPr lang="en-GB" sz="1000" dirty="0">
-                <a:solidFill>
-                  <a:srgbClr val="BCBEC4"/>
-                </a:solidFill>
-                <a:effectLst/>
-                <a:latin typeface="JetBrains Mono"/>
-              </a:rPr>
-            </a:br>
-            <a:r>
-              <a:rPr lang="en-GB" sz="1000" dirty="0">
-                <a:solidFill>
-                  <a:srgbClr val="8888C6"/>
-                </a:solidFill>
-                <a:effectLst/>
-                <a:latin typeface="JetBrains Mono"/>
-              </a:rPr>
-              <a:t>print</a:t>
-            </a:r>
-            <a:r>
-              <a:rPr lang="en-GB" sz="1000" dirty="0">
-                <a:solidFill>
-                  <a:srgbClr val="BCBEC4"/>
-                </a:solidFill>
-                <a:effectLst/>
-                <a:latin typeface="JetBrains Mono"/>
-              </a:rPr>
-              <a:t>(x)</a:t>
-            </a:r>
-            <a:br>
-              <a:rPr lang="en-GB" sz="1000" dirty="0">
-                <a:solidFill>
-                  <a:srgbClr val="BCBEC4"/>
-                </a:solidFill>
-                <a:effectLst/>
-                <a:latin typeface="JetBrains Mono"/>
-              </a:rPr>
-            </a:br>
-            <a:r>
-              <a:rPr lang="en-GB" sz="1000" dirty="0">
-                <a:solidFill>
-                  <a:srgbClr val="8888C6"/>
-                </a:solidFill>
-                <a:effectLst/>
-                <a:latin typeface="JetBrains Mono"/>
-              </a:rPr>
-              <a:t>print</a:t>
-            </a:r>
-            <a:r>
-              <a:rPr lang="en-GB" sz="1000" dirty="0">
-                <a:solidFill>
-                  <a:srgbClr val="BCBEC4"/>
-                </a:solidFill>
-                <a:effectLst/>
-                <a:latin typeface="JetBrains Mono"/>
-              </a:rPr>
-              <a:t>(labels)</a:t>
-            </a:r>
-            <a:br>
-              <a:rPr lang="en-GB" sz="1000" dirty="0">
-                <a:solidFill>
-                  <a:srgbClr val="BCBEC4"/>
-                </a:solidFill>
-                <a:effectLst/>
-                <a:latin typeface="JetBrains Mono"/>
-              </a:rPr>
-            </a:br>
-            <a:endParaRPr lang="en-GB" sz="1000" dirty="0">
-              <a:solidFill>
-                <a:srgbClr val="BCBEC4"/>
-              </a:solidFill>
-              <a:effectLst/>
-              <a:latin typeface="JetBrains Mono"/>
-            </a:endParaRPr>
-          </a:p>
-        </p:txBody>
-      </p:sp>
-      <p:sp>
-        <p:nvSpPr>
-          <p:cNvPr id="6" name="TextBox 5">
-            <a:extLst>
-              <a:ext uri="{FF2B5EF4-FFF2-40B4-BE49-F238E27FC236}">
-                <a16:creationId xmlns:a16="http://schemas.microsoft.com/office/drawing/2014/main" id="{285FC240-8AD0-7E29-422B-AF6815305B73}"/>
-              </a:ext>
-            </a:extLst>
-          </p:cNvPr>
-          <p:cNvSpPr txBox="1"/>
-          <p:nvPr/>
-        </p:nvSpPr>
-        <p:spPr>
-          <a:xfrm>
-            <a:off x="646771" y="189571"/>
-            <a:ext cx="1280607" cy="369332"/>
-          </a:xfrm>
-          <a:prstGeom prst="rect">
-            <a:avLst/>
-          </a:prstGeom>
-          <a:noFill/>
-        </p:spPr>
-        <p:txBody>
-          <a:bodyPr wrap="none" rtlCol="0">
-            <a:spAutoFit/>
-          </a:bodyPr>
-          <a:lstStyle/>
-          <a:p>
             <a:r>
               <a:rPr lang="en-LK" dirty="0"/>
-              <a:t>Pure logic -</a:t>
+              <a:t>import tiktoken</a:t>
+            </a:r>
+          </a:p>
+          <a:p>
+            <a:endParaRPr lang="en-LK" dirty="0"/>
+          </a:p>
+          <a:p>
+            <a:r>
+              <a:rPr lang="en-LK" dirty="0"/>
+              <a:t>class Tokenizer:</a:t>
+            </a:r>
+          </a:p>
+          <a:p>
+            <a:endParaRPr lang="en-LK" dirty="0"/>
+          </a:p>
+          <a:p>
+            <a:r>
+              <a:rPr lang="en-LK" dirty="0"/>
+              <a:t>    def __init__(self):</a:t>
+            </a:r>
+          </a:p>
+          <a:p>
+            <a:r>
+              <a:rPr lang="en-LK" dirty="0"/>
+              <a:t>        self.enc = tiktoken.get_encoding("gpt2")</a:t>
+            </a:r>
+          </a:p>
+          <a:p>
+            <a:endParaRPr lang="en-LK" dirty="0"/>
+          </a:p>
+          <a:p>
+            <a:r>
+              <a:rPr lang="en-LK" dirty="0"/>
+              <a:t>    def encode(self, text):</a:t>
+            </a:r>
+          </a:p>
+          <a:p>
+            <a:endParaRPr lang="en-LK" dirty="0"/>
+          </a:p>
+          <a:p>
+            <a:r>
+              <a:rPr lang="en-LK" dirty="0"/>
+              <a:t>        return self.enc.encode(</a:t>
+            </a:r>
+          </a:p>
+          <a:p>
+            <a:r>
+              <a:rPr lang="en-LK" dirty="0"/>
+              <a:t>            text,</a:t>
+            </a:r>
+          </a:p>
+          <a:p>
+            <a:r>
+              <a:rPr lang="en-LK" dirty="0"/>
+              <a:t>            allowed_special={"&lt;|endoftext|&gt;"}</a:t>
+            </a:r>
+          </a:p>
+          <a:p>
+            <a:r>
+              <a:rPr lang="en-LK" dirty="0"/>
+              <a:t>        )</a:t>
+            </a:r>
+          </a:p>
+          <a:p>
+            <a:endParaRPr lang="en-LK" dirty="0"/>
+          </a:p>
+          <a:p>
+            <a:r>
+              <a:rPr lang="en-LK" dirty="0"/>
+              <a:t>    def decode(self, ids):</a:t>
+            </a:r>
+          </a:p>
+          <a:p>
+            <a:endParaRPr lang="en-LK" dirty="0"/>
+          </a:p>
+          <a:p>
+            <a:r>
+              <a:rPr lang="en-LK" dirty="0"/>
+              <a:t>        return self.enc.decode(ids)</a:t>
             </a:r>
           </a:p>
         </p:txBody>
@@ -5687,7 +3899,7 @@
     </p:spTree>
     <p:extLst>
       <p:ext uri="{BB962C8B-B14F-4D97-AF65-F5344CB8AC3E}">
-        <p14:creationId xmlns:p14="http://schemas.microsoft.com/office/powerpoint/2010/main" val="3498353759"/>
+        <p14:creationId xmlns:p14="http://schemas.microsoft.com/office/powerpoint/2010/main" val="1732438812"/>
       </p:ext>
     </p:extLst>
   </p:cSld>
@@ -5719,7 +3931,7 @@
           <p:cNvPr id="5" name="TextBox 4">
             <a:extLst>
               <a:ext uri="{FF2B5EF4-FFF2-40B4-BE49-F238E27FC236}">
-                <a16:creationId xmlns:a16="http://schemas.microsoft.com/office/drawing/2014/main" id="{6DC971D7-6B19-BDAA-C1B2-9AF9FA1FD74C}"/>
+                <a16:creationId xmlns:a16="http://schemas.microsoft.com/office/drawing/2014/main" id="{71D67B28-5576-AA61-67CE-9F181054D28C}"/>
               </a:ext>
             </a:extLst>
           </p:cNvPr>
@@ -5728,8 +3940,8 @@
         </p:nvSpPr>
         <p:spPr>
           <a:xfrm>
-            <a:off x="518531" y="88540"/>
-            <a:ext cx="6099716" cy="369332"/>
+            <a:off x="3417848" y="-99726"/>
+            <a:ext cx="9662531" cy="7325082"/>
           </a:xfrm>
           <a:prstGeom prst="rect">
             <a:avLst/>
@@ -5745,22 +3957,1887 @@
             <a:pPr>
               <a:buNone/>
             </a:pPr>
-            <a:r>
-              <a:rPr lang="en-GB" b="1" dirty="0" err="1">
-                <a:latin typeface="Courier New" panose="02070309020205020404" pitchFamily="49" charset="0"/>
-              </a:rPr>
-              <a:t>sft.py</a:t>
-            </a:r>
-            <a:endParaRPr lang="en-GB" b="1" dirty="0"/>
+            <a:br>
+              <a:rPr lang="en-GB" sz="1000" dirty="0">
+                <a:solidFill>
+                  <a:srgbClr val="BCBEC4"/>
+                </a:solidFill>
+                <a:effectLst/>
+                <a:latin typeface="JetBrains Mono"/>
+              </a:rPr>
+            </a:br>
+            <a:r>
+              <a:rPr lang="en-GB" sz="1000" dirty="0">
+                <a:solidFill>
+                  <a:srgbClr val="CF8E6D"/>
+                </a:solidFill>
+                <a:effectLst/>
+                <a:latin typeface="JetBrains Mono"/>
+              </a:rPr>
+              <a:t>import </a:t>
+            </a:r>
+            <a:r>
+              <a:rPr lang="en-GB" sz="1000" dirty="0" err="1">
+                <a:solidFill>
+                  <a:srgbClr val="BCBEC4"/>
+                </a:solidFill>
+                <a:effectLst/>
+                <a:latin typeface="JetBrains Mono"/>
+              </a:rPr>
+              <a:t>json</a:t>
+            </a:r>
+            <a:br>
+              <a:rPr lang="en-GB" sz="1000" dirty="0">
+                <a:solidFill>
+                  <a:srgbClr val="BCBEC4"/>
+                </a:solidFill>
+                <a:effectLst/>
+                <a:latin typeface="JetBrains Mono"/>
+              </a:rPr>
+            </a:br>
+            <a:r>
+              <a:rPr lang="en-GB" sz="1000" dirty="0">
+                <a:solidFill>
+                  <a:srgbClr val="BCBEC4"/>
+                </a:solidFill>
+                <a:effectLst/>
+                <a:latin typeface="JetBrains Mono"/>
+              </a:rPr>
+              <a:t>data = []</a:t>
+            </a:r>
+            <a:br>
+              <a:rPr lang="en-GB" sz="1000" dirty="0">
+                <a:solidFill>
+                  <a:srgbClr val="BCBEC4"/>
+                </a:solidFill>
+                <a:effectLst/>
+                <a:latin typeface="JetBrains Mono"/>
+              </a:rPr>
+            </a:br>
+            <a:r>
+              <a:rPr lang="en-GB" sz="1000" dirty="0">
+                <a:solidFill>
+                  <a:srgbClr val="CF8E6D"/>
+                </a:solidFill>
+                <a:effectLst/>
+                <a:latin typeface="JetBrains Mono"/>
+              </a:rPr>
+              <a:t>from </a:t>
+            </a:r>
+            <a:r>
+              <a:rPr lang="en-GB" sz="1000" dirty="0">
+                <a:solidFill>
+                  <a:srgbClr val="BCBEC4"/>
+                </a:solidFill>
+                <a:effectLst/>
+                <a:latin typeface="JetBrains Mono"/>
+              </a:rPr>
+              <a:t>tokenizer </a:t>
+            </a:r>
+            <a:r>
+              <a:rPr lang="en-GB" sz="1000" dirty="0">
+                <a:solidFill>
+                  <a:srgbClr val="CF8E6D"/>
+                </a:solidFill>
+                <a:effectLst/>
+                <a:latin typeface="JetBrains Mono"/>
+              </a:rPr>
+              <a:t>import </a:t>
+            </a:r>
+            <a:r>
+              <a:rPr lang="en-GB" sz="1000" dirty="0">
+                <a:solidFill>
+                  <a:srgbClr val="BCBEC4"/>
+                </a:solidFill>
+                <a:effectLst/>
+                <a:latin typeface="JetBrains Mono"/>
+              </a:rPr>
+              <a:t>Tokenizer</a:t>
+            </a:r>
+            <a:br>
+              <a:rPr lang="en-GB" sz="1000" dirty="0">
+                <a:solidFill>
+                  <a:srgbClr val="BCBEC4"/>
+                </a:solidFill>
+                <a:effectLst/>
+                <a:latin typeface="JetBrains Mono"/>
+              </a:rPr>
+            </a:br>
+            <a:r>
+              <a:rPr lang="en-GB" sz="1000" dirty="0">
+                <a:solidFill>
+                  <a:srgbClr val="BCBEC4"/>
+                </a:solidFill>
+                <a:effectLst/>
+                <a:latin typeface="JetBrains Mono"/>
+              </a:rPr>
+              <a:t>tokenizer = Tokenizer()</a:t>
+            </a:r>
+            <a:br>
+              <a:rPr lang="en-GB" sz="1000" dirty="0">
+                <a:solidFill>
+                  <a:srgbClr val="BCBEC4"/>
+                </a:solidFill>
+                <a:effectLst/>
+                <a:latin typeface="JetBrains Mono"/>
+              </a:rPr>
+            </a:br>
+            <a:br>
+              <a:rPr lang="en-GB" sz="1000" dirty="0">
+                <a:solidFill>
+                  <a:srgbClr val="BCBEC4"/>
+                </a:solidFill>
+                <a:effectLst/>
+                <a:latin typeface="JetBrains Mono"/>
+              </a:rPr>
+            </a:br>
+            <a:r>
+              <a:rPr lang="en-GB" sz="1000" dirty="0">
+                <a:solidFill>
+                  <a:srgbClr val="CF8E6D"/>
+                </a:solidFill>
+                <a:effectLst/>
+                <a:latin typeface="JetBrains Mono"/>
+              </a:rPr>
+              <a:t>with </a:t>
+            </a:r>
+            <a:r>
+              <a:rPr lang="en-GB" sz="1000" dirty="0">
+                <a:solidFill>
+                  <a:srgbClr val="8888C6"/>
+                </a:solidFill>
+                <a:effectLst/>
+                <a:latin typeface="JetBrains Mono"/>
+              </a:rPr>
+              <a:t>open</a:t>
+            </a:r>
+            <a:r>
+              <a:rPr lang="en-GB" sz="1000" dirty="0">
+                <a:solidFill>
+                  <a:srgbClr val="BCBEC4"/>
+                </a:solidFill>
+                <a:effectLst/>
+                <a:latin typeface="JetBrains Mono"/>
+              </a:rPr>
+              <a:t>(</a:t>
+            </a:r>
+            <a:r>
+              <a:rPr lang="en-GB" sz="1000" dirty="0">
+                <a:solidFill>
+                  <a:srgbClr val="6AAB73"/>
+                </a:solidFill>
+                <a:effectLst/>
+                <a:latin typeface="JetBrains Mono"/>
+              </a:rPr>
+              <a:t>'</a:t>
+            </a:r>
+            <a:r>
+              <a:rPr lang="en-GB" sz="1000" dirty="0" err="1">
+                <a:solidFill>
+                  <a:srgbClr val="6AAB73"/>
+                </a:solidFill>
+                <a:effectLst/>
+                <a:latin typeface="JetBrains Mono"/>
+              </a:rPr>
+              <a:t>sft_data.jsonl</a:t>
+            </a:r>
+            <a:r>
+              <a:rPr lang="en-GB" sz="1000" dirty="0">
+                <a:solidFill>
+                  <a:srgbClr val="6AAB73"/>
+                </a:solidFill>
+                <a:effectLst/>
+                <a:latin typeface="JetBrains Mono"/>
+              </a:rPr>
+              <a:t>'</a:t>
+            </a:r>
+            <a:r>
+              <a:rPr lang="en-GB" sz="1000" dirty="0">
+                <a:solidFill>
+                  <a:srgbClr val="BCBEC4"/>
+                </a:solidFill>
+                <a:effectLst/>
+                <a:latin typeface="JetBrains Mono"/>
+              </a:rPr>
+              <a:t>, </a:t>
+            </a:r>
+            <a:r>
+              <a:rPr lang="en-GB" sz="1000" dirty="0">
+                <a:solidFill>
+                  <a:srgbClr val="6AAB73"/>
+                </a:solidFill>
+                <a:effectLst/>
+                <a:latin typeface="JetBrains Mono"/>
+              </a:rPr>
+              <a:t>"r"</a:t>
+            </a:r>
+            <a:r>
+              <a:rPr lang="en-GB" sz="1000" dirty="0">
+                <a:solidFill>
+                  <a:srgbClr val="BCBEC4"/>
+                </a:solidFill>
+                <a:effectLst/>
+                <a:latin typeface="JetBrains Mono"/>
+              </a:rPr>
+              <a:t>) </a:t>
+            </a:r>
+            <a:r>
+              <a:rPr lang="en-GB" sz="1000" dirty="0">
+                <a:solidFill>
+                  <a:srgbClr val="CF8E6D"/>
+                </a:solidFill>
+                <a:effectLst/>
+                <a:latin typeface="JetBrains Mono"/>
+              </a:rPr>
+              <a:t>as </a:t>
+            </a:r>
+            <a:r>
+              <a:rPr lang="en-GB" sz="1000" dirty="0">
+                <a:solidFill>
+                  <a:srgbClr val="BCBEC4"/>
+                </a:solidFill>
+                <a:effectLst/>
+                <a:latin typeface="JetBrains Mono"/>
+              </a:rPr>
+              <a:t>f:</a:t>
+            </a:r>
+            <a:br>
+              <a:rPr lang="en-GB" sz="1000" dirty="0">
+                <a:solidFill>
+                  <a:srgbClr val="BCBEC4"/>
+                </a:solidFill>
+                <a:effectLst/>
+                <a:latin typeface="JetBrains Mono"/>
+              </a:rPr>
+            </a:br>
+            <a:r>
+              <a:rPr lang="en-GB" sz="1000" dirty="0">
+                <a:solidFill>
+                  <a:srgbClr val="BCBEC4"/>
+                </a:solidFill>
+                <a:effectLst/>
+                <a:latin typeface="JetBrains Mono"/>
+              </a:rPr>
+              <a:t>    </a:t>
+            </a:r>
+            <a:r>
+              <a:rPr lang="en-GB" sz="1000" dirty="0">
+                <a:solidFill>
+                  <a:srgbClr val="CF8E6D"/>
+                </a:solidFill>
+                <a:effectLst/>
+                <a:latin typeface="JetBrains Mono"/>
+              </a:rPr>
+              <a:t>for </a:t>
+            </a:r>
+            <a:r>
+              <a:rPr lang="en-GB" sz="1000" dirty="0">
+                <a:solidFill>
+                  <a:srgbClr val="BCBEC4"/>
+                </a:solidFill>
+                <a:effectLst/>
+                <a:latin typeface="JetBrains Mono"/>
+              </a:rPr>
+              <a:t>line </a:t>
+            </a:r>
+            <a:r>
+              <a:rPr lang="en-GB" sz="1000" dirty="0">
+                <a:solidFill>
+                  <a:srgbClr val="CF8E6D"/>
+                </a:solidFill>
+                <a:effectLst/>
+                <a:latin typeface="JetBrains Mono"/>
+              </a:rPr>
+              <a:t>in </a:t>
+            </a:r>
+            <a:r>
+              <a:rPr lang="en-GB" sz="1000" dirty="0">
+                <a:solidFill>
+                  <a:srgbClr val="BCBEC4"/>
+                </a:solidFill>
+                <a:effectLst/>
+                <a:latin typeface="JetBrains Mono"/>
+              </a:rPr>
+              <a:t>f:</a:t>
+            </a:r>
+            <a:br>
+              <a:rPr lang="en-GB" sz="1000" dirty="0">
+                <a:solidFill>
+                  <a:srgbClr val="BCBEC4"/>
+                </a:solidFill>
+                <a:effectLst/>
+                <a:latin typeface="JetBrains Mono"/>
+              </a:rPr>
+            </a:br>
+            <a:r>
+              <a:rPr lang="en-GB" sz="1000" dirty="0">
+                <a:solidFill>
+                  <a:srgbClr val="BCBEC4"/>
+                </a:solidFill>
+                <a:effectLst/>
+                <a:latin typeface="JetBrains Mono"/>
+              </a:rPr>
+              <a:t>        </a:t>
+            </a:r>
+            <a:r>
+              <a:rPr lang="en-GB" sz="1000" dirty="0" err="1">
+                <a:solidFill>
+                  <a:srgbClr val="BCBEC4"/>
+                </a:solidFill>
+                <a:effectLst/>
+                <a:latin typeface="JetBrains Mono"/>
+              </a:rPr>
+              <a:t>data.append</a:t>
+            </a:r>
+            <a:r>
+              <a:rPr lang="en-GB" sz="1000" dirty="0">
+                <a:solidFill>
+                  <a:srgbClr val="BCBEC4"/>
+                </a:solidFill>
+                <a:effectLst/>
+                <a:latin typeface="JetBrains Mono"/>
+              </a:rPr>
+              <a:t>(</a:t>
+            </a:r>
+            <a:r>
+              <a:rPr lang="en-GB" sz="1000" dirty="0" err="1">
+                <a:solidFill>
+                  <a:srgbClr val="BCBEC4"/>
+                </a:solidFill>
+                <a:effectLst/>
+                <a:latin typeface="JetBrains Mono"/>
+              </a:rPr>
+              <a:t>json.loads</a:t>
+            </a:r>
+            <a:r>
+              <a:rPr lang="en-GB" sz="1000" dirty="0">
+                <a:solidFill>
+                  <a:srgbClr val="BCBEC4"/>
+                </a:solidFill>
+                <a:effectLst/>
+                <a:latin typeface="JetBrains Mono"/>
+              </a:rPr>
+              <a:t>(line))</a:t>
+            </a:r>
+            <a:br>
+              <a:rPr lang="en-GB" sz="1000" dirty="0">
+                <a:solidFill>
+                  <a:srgbClr val="BCBEC4"/>
+                </a:solidFill>
+                <a:effectLst/>
+                <a:latin typeface="JetBrains Mono"/>
+              </a:rPr>
+            </a:br>
+            <a:br>
+              <a:rPr lang="en-GB" sz="1000" dirty="0">
+                <a:solidFill>
+                  <a:srgbClr val="BCBEC4"/>
+                </a:solidFill>
+                <a:effectLst/>
+                <a:latin typeface="JetBrains Mono"/>
+              </a:rPr>
+            </a:br>
+            <a:r>
+              <a:rPr lang="en-GB" sz="1000" dirty="0">
+                <a:solidFill>
+                  <a:srgbClr val="8888C6"/>
+                </a:solidFill>
+                <a:effectLst/>
+                <a:latin typeface="JetBrains Mono"/>
+              </a:rPr>
+              <a:t>print</a:t>
+            </a:r>
+            <a:r>
+              <a:rPr lang="en-GB" sz="1000" dirty="0">
+                <a:solidFill>
+                  <a:srgbClr val="BCBEC4"/>
+                </a:solidFill>
+                <a:effectLst/>
+                <a:latin typeface="JetBrains Mono"/>
+              </a:rPr>
+              <a:t>(data)</a:t>
+            </a:r>
+            <a:br>
+              <a:rPr lang="en-GB" sz="1000" dirty="0">
+                <a:solidFill>
+                  <a:srgbClr val="BCBEC4"/>
+                </a:solidFill>
+                <a:effectLst/>
+                <a:latin typeface="JetBrains Mono"/>
+              </a:rPr>
+            </a:br>
+            <a:r>
+              <a:rPr lang="en-GB" sz="1000" dirty="0" err="1">
+                <a:solidFill>
+                  <a:srgbClr val="BCBEC4"/>
+                </a:solidFill>
+                <a:effectLst/>
+                <a:latin typeface="JetBrains Mono"/>
+              </a:rPr>
+              <a:t>seq_len</a:t>
+            </a:r>
+            <a:r>
+              <a:rPr lang="en-GB" sz="1000" dirty="0">
+                <a:solidFill>
+                  <a:srgbClr val="BCBEC4"/>
+                </a:solidFill>
+                <a:effectLst/>
+                <a:latin typeface="JetBrains Mono"/>
+              </a:rPr>
+              <a:t> = </a:t>
+            </a:r>
+            <a:r>
+              <a:rPr lang="en-GB" sz="1000" dirty="0">
+                <a:solidFill>
+                  <a:srgbClr val="2AACB8"/>
+                </a:solidFill>
+                <a:effectLst/>
+                <a:latin typeface="JetBrains Mono"/>
+              </a:rPr>
+              <a:t>30</a:t>
+            </a:r>
+            <a:br>
+              <a:rPr lang="en-GB" sz="1000" dirty="0">
+                <a:solidFill>
+                  <a:srgbClr val="2AACB8"/>
+                </a:solidFill>
+                <a:effectLst/>
+                <a:latin typeface="JetBrains Mono"/>
+              </a:rPr>
+            </a:br>
+            <a:r>
+              <a:rPr lang="en-GB" sz="1000" dirty="0">
+                <a:solidFill>
+                  <a:srgbClr val="BCBEC4"/>
+                </a:solidFill>
+                <a:effectLst/>
+                <a:latin typeface="JetBrains Mono"/>
+              </a:rPr>
+              <a:t>item = data[</a:t>
+            </a:r>
+            <a:r>
+              <a:rPr lang="en-GB" sz="1000" dirty="0">
+                <a:solidFill>
+                  <a:srgbClr val="2AACB8"/>
+                </a:solidFill>
+                <a:effectLst/>
+                <a:latin typeface="JetBrains Mono"/>
+              </a:rPr>
+              <a:t>0</a:t>
+            </a:r>
+            <a:r>
+              <a:rPr lang="en-GB" sz="1000" dirty="0">
+                <a:solidFill>
+                  <a:srgbClr val="BCBEC4"/>
+                </a:solidFill>
+                <a:effectLst/>
+                <a:latin typeface="JetBrains Mono"/>
+              </a:rPr>
+              <a:t>]</a:t>
+            </a:r>
+            <a:br>
+              <a:rPr lang="en-GB" sz="1000" dirty="0">
+                <a:solidFill>
+                  <a:srgbClr val="BCBEC4"/>
+                </a:solidFill>
+                <a:effectLst/>
+                <a:latin typeface="JetBrains Mono"/>
+              </a:rPr>
+            </a:br>
+            <a:br>
+              <a:rPr lang="en-GB" sz="1000" dirty="0">
+                <a:solidFill>
+                  <a:srgbClr val="BCBEC4"/>
+                </a:solidFill>
+                <a:effectLst/>
+                <a:latin typeface="JetBrains Mono"/>
+              </a:rPr>
+            </a:br>
+            <a:r>
+              <a:rPr lang="en-GB" sz="1000" dirty="0" err="1">
+                <a:solidFill>
+                  <a:srgbClr val="BCBEC4"/>
+                </a:solidFill>
+                <a:effectLst/>
+                <a:latin typeface="JetBrains Mono"/>
+              </a:rPr>
+              <a:t>prompt_ids</a:t>
+            </a:r>
+            <a:r>
+              <a:rPr lang="en-GB" sz="1000" dirty="0">
+                <a:solidFill>
+                  <a:srgbClr val="BCBEC4"/>
+                </a:solidFill>
+                <a:effectLst/>
+                <a:latin typeface="JetBrains Mono"/>
+              </a:rPr>
+              <a:t> =  </a:t>
+            </a:r>
+            <a:r>
+              <a:rPr lang="en-GB" sz="1000" dirty="0" err="1">
+                <a:solidFill>
+                  <a:srgbClr val="BCBEC4"/>
+                </a:solidFill>
+                <a:effectLst/>
+                <a:latin typeface="JetBrains Mono"/>
+              </a:rPr>
+              <a:t>tokenizer.encode</a:t>
+            </a:r>
+            <a:r>
+              <a:rPr lang="en-GB" sz="1000" dirty="0">
+                <a:solidFill>
+                  <a:srgbClr val="BCBEC4"/>
+                </a:solidFill>
+                <a:effectLst/>
+                <a:latin typeface="JetBrains Mono"/>
+              </a:rPr>
+              <a:t>(item[</a:t>
+            </a:r>
+            <a:r>
+              <a:rPr lang="en-GB" sz="1000" dirty="0">
+                <a:solidFill>
+                  <a:srgbClr val="6AAB73"/>
+                </a:solidFill>
+                <a:effectLst/>
+                <a:latin typeface="JetBrains Mono"/>
+              </a:rPr>
+              <a:t>"prompt"</a:t>
+            </a:r>
+            <a:r>
+              <a:rPr lang="en-GB" sz="1000" dirty="0">
+                <a:solidFill>
+                  <a:srgbClr val="BCBEC4"/>
+                </a:solidFill>
+                <a:effectLst/>
+                <a:latin typeface="JetBrains Mono"/>
+              </a:rPr>
+              <a:t>])</a:t>
+            </a:r>
+            <a:br>
+              <a:rPr lang="en-GB" sz="1000" dirty="0">
+                <a:solidFill>
+                  <a:srgbClr val="BCBEC4"/>
+                </a:solidFill>
+                <a:effectLst/>
+                <a:latin typeface="JetBrains Mono"/>
+              </a:rPr>
+            </a:br>
+            <a:r>
+              <a:rPr lang="en-GB" sz="1000" dirty="0" err="1">
+                <a:solidFill>
+                  <a:srgbClr val="BCBEC4"/>
+                </a:solidFill>
+                <a:effectLst/>
+                <a:latin typeface="JetBrains Mono"/>
+              </a:rPr>
+              <a:t>response_ids</a:t>
+            </a:r>
+            <a:r>
+              <a:rPr lang="en-GB" sz="1000" dirty="0">
+                <a:solidFill>
+                  <a:srgbClr val="BCBEC4"/>
+                </a:solidFill>
+                <a:effectLst/>
+                <a:latin typeface="JetBrains Mono"/>
+              </a:rPr>
+              <a:t> =</a:t>
+            </a:r>
+            <a:r>
+              <a:rPr lang="en-GB" sz="1000" dirty="0" err="1">
+                <a:solidFill>
+                  <a:srgbClr val="BCBEC4"/>
+                </a:solidFill>
+                <a:effectLst/>
+                <a:latin typeface="JetBrains Mono"/>
+              </a:rPr>
+              <a:t>tokenizer.encode</a:t>
+            </a:r>
+            <a:r>
+              <a:rPr lang="en-GB" sz="1000" dirty="0">
+                <a:solidFill>
+                  <a:srgbClr val="BCBEC4"/>
+                </a:solidFill>
+                <a:effectLst/>
+                <a:latin typeface="JetBrains Mono"/>
+              </a:rPr>
+              <a:t>(item[</a:t>
+            </a:r>
+            <a:r>
+              <a:rPr lang="en-GB" sz="1000" dirty="0">
+                <a:solidFill>
+                  <a:srgbClr val="6AAB73"/>
+                </a:solidFill>
+                <a:effectLst/>
+                <a:latin typeface="JetBrains Mono"/>
+              </a:rPr>
+              <a:t>"response"</a:t>
+            </a:r>
+            <a:r>
+              <a:rPr lang="en-GB" sz="1000" dirty="0">
+                <a:solidFill>
+                  <a:srgbClr val="BCBEC4"/>
+                </a:solidFill>
+                <a:effectLst/>
+                <a:latin typeface="JetBrains Mono"/>
+              </a:rPr>
+              <a:t>])</a:t>
+            </a:r>
+            <a:br>
+              <a:rPr lang="en-GB" sz="1000" dirty="0">
+                <a:solidFill>
+                  <a:srgbClr val="BCBEC4"/>
+                </a:solidFill>
+                <a:effectLst/>
+                <a:latin typeface="JetBrains Mono"/>
+              </a:rPr>
+            </a:br>
+            <a:br>
+              <a:rPr lang="en-GB" sz="1000" dirty="0">
+                <a:solidFill>
+                  <a:srgbClr val="BCBEC4"/>
+                </a:solidFill>
+                <a:effectLst/>
+                <a:latin typeface="JetBrains Mono"/>
+              </a:rPr>
+            </a:br>
+            <a:r>
+              <a:rPr lang="en-GB" sz="1000" dirty="0">
+                <a:solidFill>
+                  <a:srgbClr val="BCBEC4"/>
+                </a:solidFill>
+                <a:effectLst/>
+                <a:latin typeface="JetBrains Mono"/>
+              </a:rPr>
+              <a:t>tokens = </a:t>
+            </a:r>
+            <a:r>
+              <a:rPr lang="en-GB" sz="1000" dirty="0" err="1">
+                <a:solidFill>
+                  <a:srgbClr val="BCBEC4"/>
+                </a:solidFill>
+                <a:effectLst/>
+                <a:latin typeface="JetBrains Mono"/>
+              </a:rPr>
+              <a:t>prompt_ids</a:t>
+            </a:r>
+            <a:r>
+              <a:rPr lang="en-GB" sz="1000" dirty="0">
+                <a:solidFill>
+                  <a:srgbClr val="BCBEC4"/>
+                </a:solidFill>
+                <a:effectLst/>
+                <a:latin typeface="JetBrains Mono"/>
+              </a:rPr>
+              <a:t> + </a:t>
+            </a:r>
+            <a:r>
+              <a:rPr lang="en-GB" sz="1000" dirty="0" err="1">
+                <a:solidFill>
+                  <a:srgbClr val="BCBEC4"/>
+                </a:solidFill>
+                <a:effectLst/>
+                <a:latin typeface="JetBrains Mono"/>
+              </a:rPr>
+              <a:t>response_ids</a:t>
+            </a:r>
+            <a:br>
+              <a:rPr lang="en-GB" sz="1000" dirty="0">
+                <a:solidFill>
+                  <a:srgbClr val="BCBEC4"/>
+                </a:solidFill>
+                <a:effectLst/>
+                <a:latin typeface="JetBrains Mono"/>
+              </a:rPr>
+            </a:br>
+            <a:br>
+              <a:rPr lang="en-GB" sz="1000" dirty="0">
+                <a:solidFill>
+                  <a:srgbClr val="BCBEC4"/>
+                </a:solidFill>
+                <a:effectLst/>
+                <a:latin typeface="JetBrains Mono"/>
+              </a:rPr>
+            </a:br>
+            <a:r>
+              <a:rPr lang="en-GB" sz="1000" dirty="0">
+                <a:solidFill>
+                  <a:srgbClr val="BCBEC4"/>
+                </a:solidFill>
+                <a:effectLst/>
+                <a:latin typeface="JetBrains Mono"/>
+              </a:rPr>
+              <a:t>tokens = tokens[:</a:t>
+            </a:r>
+            <a:r>
+              <a:rPr lang="en-GB" sz="1000" dirty="0" err="1">
+                <a:solidFill>
+                  <a:srgbClr val="BCBEC4"/>
+                </a:solidFill>
+                <a:effectLst/>
+                <a:latin typeface="JetBrains Mono"/>
+              </a:rPr>
+              <a:t>seq_len</a:t>
+            </a:r>
+            <a:r>
+              <a:rPr lang="en-GB" sz="1000" dirty="0">
+                <a:solidFill>
+                  <a:srgbClr val="BCBEC4"/>
+                </a:solidFill>
+                <a:effectLst/>
+                <a:latin typeface="JetBrains Mono"/>
+              </a:rPr>
+              <a:t> + </a:t>
+            </a:r>
+            <a:r>
+              <a:rPr lang="en-GB" sz="1000" dirty="0">
+                <a:solidFill>
+                  <a:srgbClr val="2AACB8"/>
+                </a:solidFill>
+                <a:effectLst/>
+                <a:latin typeface="JetBrains Mono"/>
+              </a:rPr>
+              <a:t>1</a:t>
+            </a:r>
+            <a:r>
+              <a:rPr lang="en-GB" sz="1000" dirty="0">
+                <a:solidFill>
+                  <a:srgbClr val="BCBEC4"/>
+                </a:solidFill>
+                <a:effectLst/>
+                <a:latin typeface="JetBrains Mono"/>
+              </a:rPr>
+              <a:t>]</a:t>
+            </a:r>
+            <a:br>
+              <a:rPr lang="en-GB" sz="1000" dirty="0">
+                <a:solidFill>
+                  <a:srgbClr val="BCBEC4"/>
+                </a:solidFill>
+                <a:effectLst/>
+                <a:latin typeface="JetBrains Mono"/>
+              </a:rPr>
+            </a:br>
+            <a:br>
+              <a:rPr lang="en-GB" sz="1000" dirty="0">
+                <a:solidFill>
+                  <a:srgbClr val="BCBEC4"/>
+                </a:solidFill>
+                <a:effectLst/>
+                <a:latin typeface="JetBrains Mono"/>
+              </a:rPr>
+            </a:br>
+            <a:r>
+              <a:rPr lang="en-GB" sz="1000" dirty="0" err="1">
+                <a:solidFill>
+                  <a:srgbClr val="BCBEC4"/>
+                </a:solidFill>
+                <a:effectLst/>
+                <a:latin typeface="JetBrains Mono"/>
+              </a:rPr>
+              <a:t>pad_id</a:t>
+            </a:r>
+            <a:r>
+              <a:rPr lang="en-GB" sz="1000" dirty="0">
+                <a:solidFill>
+                  <a:srgbClr val="BCBEC4"/>
+                </a:solidFill>
+                <a:effectLst/>
+                <a:latin typeface="JetBrains Mono"/>
+              </a:rPr>
+              <a:t> = </a:t>
+            </a:r>
+            <a:r>
+              <a:rPr lang="en-GB" sz="1000" dirty="0">
+                <a:solidFill>
+                  <a:srgbClr val="2AACB8"/>
+                </a:solidFill>
+                <a:effectLst/>
+                <a:latin typeface="JetBrains Mono"/>
+              </a:rPr>
+              <a:t>0</a:t>
+            </a:r>
+            <a:br>
+              <a:rPr lang="en-GB" sz="1000" dirty="0">
+                <a:solidFill>
+                  <a:srgbClr val="2AACB8"/>
+                </a:solidFill>
+                <a:effectLst/>
+                <a:latin typeface="JetBrains Mono"/>
+              </a:rPr>
+            </a:br>
+            <a:r>
+              <a:rPr lang="en-GB" sz="1000" dirty="0" err="1">
+                <a:solidFill>
+                  <a:srgbClr val="BCBEC4"/>
+                </a:solidFill>
+                <a:effectLst/>
+                <a:latin typeface="JetBrains Mono"/>
+              </a:rPr>
+              <a:t>pad_len</a:t>
+            </a:r>
+            <a:r>
+              <a:rPr lang="en-GB" sz="1000" dirty="0">
+                <a:solidFill>
+                  <a:srgbClr val="BCBEC4"/>
+                </a:solidFill>
+                <a:effectLst/>
+                <a:latin typeface="JetBrains Mono"/>
+              </a:rPr>
+              <a:t> = (</a:t>
+            </a:r>
+            <a:r>
+              <a:rPr lang="en-GB" sz="1000" dirty="0" err="1">
+                <a:solidFill>
+                  <a:srgbClr val="BCBEC4"/>
+                </a:solidFill>
+                <a:effectLst/>
+                <a:latin typeface="JetBrains Mono"/>
+              </a:rPr>
+              <a:t>seq_len</a:t>
+            </a:r>
+            <a:r>
+              <a:rPr lang="en-GB" sz="1000" dirty="0">
+                <a:solidFill>
+                  <a:srgbClr val="BCBEC4"/>
+                </a:solidFill>
+                <a:effectLst/>
+                <a:latin typeface="JetBrains Mono"/>
+              </a:rPr>
+              <a:t> + </a:t>
+            </a:r>
+            <a:r>
+              <a:rPr lang="en-GB" sz="1000" dirty="0">
+                <a:solidFill>
+                  <a:srgbClr val="2AACB8"/>
+                </a:solidFill>
+                <a:effectLst/>
+                <a:latin typeface="JetBrains Mono"/>
+              </a:rPr>
+              <a:t>1</a:t>
+            </a:r>
+            <a:r>
+              <a:rPr lang="en-GB" sz="1000" dirty="0">
+                <a:solidFill>
+                  <a:srgbClr val="BCBEC4"/>
+                </a:solidFill>
+                <a:effectLst/>
+                <a:latin typeface="JetBrains Mono"/>
+              </a:rPr>
+              <a:t>) - </a:t>
+            </a:r>
+            <a:r>
+              <a:rPr lang="en-GB" sz="1000" dirty="0" err="1">
+                <a:solidFill>
+                  <a:srgbClr val="8888C6"/>
+                </a:solidFill>
+                <a:effectLst/>
+                <a:latin typeface="JetBrains Mono"/>
+              </a:rPr>
+              <a:t>len</a:t>
+            </a:r>
+            <a:r>
+              <a:rPr lang="en-GB" sz="1000" dirty="0">
+                <a:solidFill>
+                  <a:srgbClr val="BCBEC4"/>
+                </a:solidFill>
+                <a:effectLst/>
+                <a:latin typeface="JetBrains Mono"/>
+              </a:rPr>
+              <a:t>(tokens)</a:t>
+            </a:r>
+            <a:br>
+              <a:rPr lang="en-GB" sz="1000" dirty="0">
+                <a:solidFill>
+                  <a:srgbClr val="BCBEC4"/>
+                </a:solidFill>
+                <a:effectLst/>
+                <a:latin typeface="JetBrains Mono"/>
+              </a:rPr>
+            </a:br>
+            <a:r>
+              <a:rPr lang="en-GB" sz="1000" dirty="0">
+                <a:solidFill>
+                  <a:srgbClr val="BCBEC4"/>
+                </a:solidFill>
+                <a:effectLst/>
+                <a:latin typeface="JetBrains Mono"/>
+              </a:rPr>
+              <a:t>tokens = tokens + [</a:t>
+            </a:r>
+            <a:r>
+              <a:rPr lang="en-GB" sz="1000" dirty="0" err="1">
+                <a:solidFill>
+                  <a:srgbClr val="BCBEC4"/>
+                </a:solidFill>
+                <a:effectLst/>
+                <a:latin typeface="JetBrains Mono"/>
+              </a:rPr>
+              <a:t>pad_id</a:t>
+            </a:r>
+            <a:r>
+              <a:rPr lang="en-GB" sz="1000" dirty="0">
+                <a:solidFill>
+                  <a:srgbClr val="BCBEC4"/>
+                </a:solidFill>
+                <a:effectLst/>
+                <a:latin typeface="JetBrains Mono"/>
+              </a:rPr>
+              <a:t>] * </a:t>
+            </a:r>
+            <a:r>
+              <a:rPr lang="en-GB" sz="1000" dirty="0" err="1">
+                <a:solidFill>
+                  <a:srgbClr val="BCBEC4"/>
+                </a:solidFill>
+                <a:effectLst/>
+                <a:latin typeface="JetBrains Mono"/>
+              </a:rPr>
+              <a:t>pad_len</a:t>
+            </a:r>
+            <a:br>
+              <a:rPr lang="en-GB" sz="1000" dirty="0">
+                <a:solidFill>
+                  <a:srgbClr val="BCBEC4"/>
+                </a:solidFill>
+                <a:effectLst/>
+                <a:latin typeface="JetBrains Mono"/>
+              </a:rPr>
+            </a:br>
+            <a:r>
+              <a:rPr lang="en-GB" sz="1000" dirty="0">
+                <a:solidFill>
+                  <a:srgbClr val="8888C6"/>
+                </a:solidFill>
+                <a:effectLst/>
+                <a:latin typeface="JetBrains Mono"/>
+              </a:rPr>
+              <a:t>print</a:t>
+            </a:r>
+            <a:r>
+              <a:rPr lang="en-GB" sz="1000" dirty="0">
+                <a:solidFill>
+                  <a:srgbClr val="BCBEC4"/>
+                </a:solidFill>
+                <a:effectLst/>
+                <a:latin typeface="JetBrains Mono"/>
+              </a:rPr>
+              <a:t>(tokens)</a:t>
+            </a:r>
+            <a:br>
+              <a:rPr lang="en-GB" sz="1000" dirty="0">
+                <a:solidFill>
+                  <a:srgbClr val="BCBEC4"/>
+                </a:solidFill>
+                <a:effectLst/>
+                <a:latin typeface="JetBrains Mono"/>
+              </a:rPr>
+            </a:br>
+            <a:br>
+              <a:rPr lang="en-GB" sz="1000" dirty="0">
+                <a:solidFill>
+                  <a:srgbClr val="BCBEC4"/>
+                </a:solidFill>
+                <a:effectLst/>
+                <a:latin typeface="JetBrains Mono"/>
+              </a:rPr>
+            </a:br>
+            <a:r>
+              <a:rPr lang="en-GB" sz="1000" dirty="0">
+                <a:solidFill>
+                  <a:srgbClr val="BCBEC4"/>
+                </a:solidFill>
+                <a:effectLst/>
+                <a:latin typeface="JetBrains Mono"/>
+              </a:rPr>
+              <a:t>x = tokens[:-</a:t>
+            </a:r>
+            <a:r>
+              <a:rPr lang="en-GB" sz="1000" dirty="0">
+                <a:solidFill>
+                  <a:srgbClr val="2AACB8"/>
+                </a:solidFill>
+                <a:effectLst/>
+                <a:latin typeface="JetBrains Mono"/>
+              </a:rPr>
+              <a:t>1</a:t>
+            </a:r>
+            <a:r>
+              <a:rPr lang="en-GB" sz="1000" dirty="0">
+                <a:solidFill>
+                  <a:srgbClr val="BCBEC4"/>
+                </a:solidFill>
+                <a:effectLst/>
+                <a:latin typeface="JetBrains Mono"/>
+              </a:rPr>
+              <a:t>]</a:t>
+            </a:r>
+            <a:br>
+              <a:rPr lang="en-GB" sz="1000" dirty="0">
+                <a:solidFill>
+                  <a:srgbClr val="BCBEC4"/>
+                </a:solidFill>
+                <a:effectLst/>
+                <a:latin typeface="JetBrains Mono"/>
+              </a:rPr>
+            </a:br>
+            <a:r>
+              <a:rPr lang="en-GB" sz="1000" dirty="0">
+                <a:solidFill>
+                  <a:srgbClr val="BCBEC4"/>
+                </a:solidFill>
+                <a:effectLst/>
+                <a:latin typeface="JetBrains Mono"/>
+              </a:rPr>
+              <a:t>y = tokens[</a:t>
+            </a:r>
+            <a:r>
+              <a:rPr lang="en-GB" sz="1000" dirty="0">
+                <a:solidFill>
+                  <a:srgbClr val="2AACB8"/>
+                </a:solidFill>
+                <a:effectLst/>
+                <a:latin typeface="JetBrains Mono"/>
+              </a:rPr>
+              <a:t>1</a:t>
+            </a:r>
+            <a:r>
+              <a:rPr lang="en-GB" sz="1000" dirty="0">
+                <a:solidFill>
+                  <a:srgbClr val="BCBEC4"/>
+                </a:solidFill>
+                <a:effectLst/>
+                <a:latin typeface="JetBrains Mono"/>
+              </a:rPr>
+              <a:t>:]</a:t>
+            </a:r>
+            <a:br>
+              <a:rPr lang="en-GB" sz="1000" dirty="0">
+                <a:solidFill>
+                  <a:srgbClr val="BCBEC4"/>
+                </a:solidFill>
+                <a:effectLst/>
+                <a:latin typeface="JetBrains Mono"/>
+              </a:rPr>
+            </a:br>
+            <a:br>
+              <a:rPr lang="en-GB" sz="1000" dirty="0">
+                <a:solidFill>
+                  <a:srgbClr val="BCBEC4"/>
+                </a:solidFill>
+                <a:effectLst/>
+                <a:latin typeface="JetBrains Mono"/>
+              </a:rPr>
+            </a:br>
+            <a:r>
+              <a:rPr lang="en-GB" sz="1000" dirty="0">
+                <a:solidFill>
+                  <a:srgbClr val="8888C6"/>
+                </a:solidFill>
+                <a:effectLst/>
+                <a:latin typeface="JetBrains Mono"/>
+              </a:rPr>
+              <a:t>print</a:t>
+            </a:r>
+            <a:r>
+              <a:rPr lang="en-GB" sz="1000" dirty="0">
+                <a:solidFill>
+                  <a:srgbClr val="BCBEC4"/>
+                </a:solidFill>
+                <a:effectLst/>
+                <a:latin typeface="JetBrains Mono"/>
+              </a:rPr>
+              <a:t>(x)</a:t>
+            </a:r>
+            <a:br>
+              <a:rPr lang="en-GB" sz="1000" dirty="0">
+                <a:solidFill>
+                  <a:srgbClr val="BCBEC4"/>
+                </a:solidFill>
+                <a:effectLst/>
+                <a:latin typeface="JetBrains Mono"/>
+              </a:rPr>
+            </a:br>
+            <a:r>
+              <a:rPr lang="en-GB" sz="1000" dirty="0">
+                <a:solidFill>
+                  <a:srgbClr val="8888C6"/>
+                </a:solidFill>
+                <a:effectLst/>
+                <a:latin typeface="JetBrains Mono"/>
+              </a:rPr>
+              <a:t>print</a:t>
+            </a:r>
+            <a:r>
+              <a:rPr lang="en-GB" sz="1000" dirty="0">
+                <a:solidFill>
+                  <a:srgbClr val="BCBEC4"/>
+                </a:solidFill>
+                <a:effectLst/>
+                <a:latin typeface="JetBrains Mono"/>
+              </a:rPr>
+              <a:t>(y)</a:t>
+            </a:r>
+            <a:br>
+              <a:rPr lang="en-GB" sz="1000" dirty="0">
+                <a:solidFill>
+                  <a:srgbClr val="BCBEC4"/>
+                </a:solidFill>
+                <a:effectLst/>
+                <a:latin typeface="JetBrains Mono"/>
+              </a:rPr>
+            </a:br>
+            <a:br>
+              <a:rPr lang="en-GB" sz="1000" dirty="0">
+                <a:solidFill>
+                  <a:srgbClr val="BCBEC4"/>
+                </a:solidFill>
+                <a:effectLst/>
+                <a:latin typeface="JetBrains Mono"/>
+              </a:rPr>
+            </a:br>
+            <a:r>
+              <a:rPr lang="en-GB" sz="1000" dirty="0">
+                <a:solidFill>
+                  <a:srgbClr val="BCBEC4"/>
+                </a:solidFill>
+                <a:effectLst/>
+                <a:latin typeface="JetBrains Mono"/>
+              </a:rPr>
+              <a:t>labels = </a:t>
+            </a:r>
+            <a:r>
+              <a:rPr lang="en-GB" sz="1000" dirty="0" err="1">
+                <a:solidFill>
+                  <a:srgbClr val="BCBEC4"/>
+                </a:solidFill>
+                <a:effectLst/>
+                <a:latin typeface="JetBrains Mono"/>
+              </a:rPr>
+              <a:t>y.copy</a:t>
+            </a:r>
+            <a:r>
+              <a:rPr lang="en-GB" sz="1000" dirty="0">
+                <a:solidFill>
+                  <a:srgbClr val="BCBEC4"/>
+                </a:solidFill>
+                <a:effectLst/>
+                <a:latin typeface="JetBrains Mono"/>
+              </a:rPr>
+              <a:t>()</a:t>
+            </a:r>
+            <a:br>
+              <a:rPr lang="en-GB" sz="1000" dirty="0">
+                <a:solidFill>
+                  <a:srgbClr val="BCBEC4"/>
+                </a:solidFill>
+                <a:effectLst/>
+                <a:latin typeface="JetBrains Mono"/>
+              </a:rPr>
+            </a:br>
+            <a:br>
+              <a:rPr lang="en-GB" sz="1000" dirty="0">
+                <a:solidFill>
+                  <a:srgbClr val="BCBEC4"/>
+                </a:solidFill>
+                <a:effectLst/>
+                <a:latin typeface="JetBrains Mono"/>
+              </a:rPr>
+            </a:br>
+            <a:r>
+              <a:rPr lang="en-GB" sz="1000" dirty="0" err="1">
+                <a:solidFill>
+                  <a:srgbClr val="BCBEC4"/>
+                </a:solidFill>
+                <a:effectLst/>
+                <a:latin typeface="JetBrains Mono"/>
+              </a:rPr>
+              <a:t>prompt_len</a:t>
+            </a:r>
+            <a:r>
+              <a:rPr lang="en-GB" sz="1000" dirty="0">
+                <a:solidFill>
+                  <a:srgbClr val="BCBEC4"/>
+                </a:solidFill>
+                <a:effectLst/>
+                <a:latin typeface="JetBrains Mono"/>
+              </a:rPr>
+              <a:t> = </a:t>
+            </a:r>
+            <a:r>
+              <a:rPr lang="en-GB" sz="1000" dirty="0">
+                <a:solidFill>
+                  <a:srgbClr val="8888C6"/>
+                </a:solidFill>
+                <a:effectLst/>
+                <a:latin typeface="JetBrains Mono"/>
+              </a:rPr>
+              <a:t>min</a:t>
+            </a:r>
+            <a:r>
+              <a:rPr lang="en-GB" sz="1000" dirty="0">
+                <a:solidFill>
+                  <a:srgbClr val="BCBEC4"/>
+                </a:solidFill>
+                <a:effectLst/>
+                <a:latin typeface="JetBrains Mono"/>
+              </a:rPr>
+              <a:t>(</a:t>
+            </a:r>
+            <a:r>
+              <a:rPr lang="en-GB" sz="1000" dirty="0" err="1">
+                <a:solidFill>
+                  <a:srgbClr val="8888C6"/>
+                </a:solidFill>
+                <a:effectLst/>
+                <a:latin typeface="JetBrains Mono"/>
+              </a:rPr>
+              <a:t>len</a:t>
+            </a:r>
+            <a:r>
+              <a:rPr lang="en-GB" sz="1000" dirty="0">
+                <a:solidFill>
+                  <a:srgbClr val="BCBEC4"/>
+                </a:solidFill>
+                <a:effectLst/>
+                <a:latin typeface="JetBrains Mono"/>
+              </a:rPr>
+              <a:t>(</a:t>
+            </a:r>
+            <a:r>
+              <a:rPr lang="en-GB" sz="1000" dirty="0" err="1">
+                <a:solidFill>
+                  <a:srgbClr val="BCBEC4"/>
+                </a:solidFill>
+                <a:effectLst/>
+                <a:latin typeface="JetBrains Mono"/>
+              </a:rPr>
+              <a:t>prompt_ids</a:t>
+            </a:r>
+            <a:r>
+              <a:rPr lang="en-GB" sz="1000" dirty="0">
+                <a:solidFill>
+                  <a:srgbClr val="BCBEC4"/>
+                </a:solidFill>
+                <a:effectLst/>
+                <a:latin typeface="JetBrains Mono"/>
+              </a:rPr>
+              <a:t>),</a:t>
+            </a:r>
+            <a:r>
+              <a:rPr lang="en-GB" sz="1000" dirty="0" err="1">
+                <a:solidFill>
+                  <a:srgbClr val="BCBEC4"/>
+                </a:solidFill>
+                <a:effectLst/>
+                <a:latin typeface="JetBrains Mono"/>
+              </a:rPr>
+              <a:t>seq_len</a:t>
+            </a:r>
+            <a:r>
+              <a:rPr lang="en-GB" sz="1000" dirty="0">
+                <a:solidFill>
+                  <a:srgbClr val="BCBEC4"/>
+                </a:solidFill>
+                <a:effectLst/>
+                <a:latin typeface="JetBrains Mono"/>
+              </a:rPr>
+              <a:t>)</a:t>
+            </a:r>
+            <a:br>
+              <a:rPr lang="en-GB" sz="1000" dirty="0">
+                <a:solidFill>
+                  <a:srgbClr val="BCBEC4"/>
+                </a:solidFill>
+                <a:effectLst/>
+                <a:latin typeface="JetBrains Mono"/>
+              </a:rPr>
+            </a:br>
+            <a:r>
+              <a:rPr lang="en-GB" sz="1000" dirty="0" err="1">
+                <a:solidFill>
+                  <a:srgbClr val="BCBEC4"/>
+                </a:solidFill>
+                <a:effectLst/>
+                <a:latin typeface="JetBrains Mono"/>
+              </a:rPr>
+              <a:t>mask_len</a:t>
+            </a:r>
+            <a:r>
+              <a:rPr lang="en-GB" sz="1000" dirty="0">
+                <a:solidFill>
+                  <a:srgbClr val="BCBEC4"/>
+                </a:solidFill>
+                <a:effectLst/>
+                <a:latin typeface="JetBrains Mono"/>
+              </a:rPr>
+              <a:t> = </a:t>
+            </a:r>
+            <a:r>
+              <a:rPr lang="en-GB" sz="1000" dirty="0">
+                <a:solidFill>
+                  <a:srgbClr val="8888C6"/>
+                </a:solidFill>
+                <a:effectLst/>
+                <a:latin typeface="JetBrains Mono"/>
+              </a:rPr>
+              <a:t>max</a:t>
+            </a:r>
+            <a:r>
+              <a:rPr lang="en-GB" sz="1000" dirty="0">
+                <a:solidFill>
+                  <a:srgbClr val="BCBEC4"/>
+                </a:solidFill>
+                <a:effectLst/>
+                <a:latin typeface="JetBrains Mono"/>
+              </a:rPr>
+              <a:t>(</a:t>
+            </a:r>
+            <a:r>
+              <a:rPr lang="en-GB" sz="1000" dirty="0">
+                <a:solidFill>
+                  <a:srgbClr val="2AACB8"/>
+                </a:solidFill>
+                <a:effectLst/>
+                <a:latin typeface="JetBrains Mono"/>
+              </a:rPr>
+              <a:t>0</a:t>
+            </a:r>
+            <a:r>
+              <a:rPr lang="en-GB" sz="1000" dirty="0">
+                <a:solidFill>
+                  <a:srgbClr val="BCBEC4"/>
+                </a:solidFill>
+                <a:effectLst/>
+                <a:latin typeface="JetBrains Mono"/>
+              </a:rPr>
+              <a:t>, </a:t>
+            </a:r>
+            <a:r>
+              <a:rPr lang="en-GB" sz="1000" dirty="0" err="1">
+                <a:solidFill>
+                  <a:srgbClr val="BCBEC4"/>
+                </a:solidFill>
+                <a:effectLst/>
+                <a:latin typeface="JetBrains Mono"/>
+              </a:rPr>
+              <a:t>prompt_len</a:t>
+            </a:r>
+            <a:r>
+              <a:rPr lang="en-GB" sz="1000" dirty="0">
+                <a:solidFill>
+                  <a:srgbClr val="BCBEC4"/>
+                </a:solidFill>
+                <a:effectLst/>
+                <a:latin typeface="JetBrains Mono"/>
+              </a:rPr>
+              <a:t> - </a:t>
+            </a:r>
+            <a:r>
+              <a:rPr lang="en-GB" sz="1000" dirty="0">
+                <a:solidFill>
+                  <a:srgbClr val="2AACB8"/>
+                </a:solidFill>
+                <a:effectLst/>
+                <a:latin typeface="JetBrains Mono"/>
+              </a:rPr>
+              <a:t>1</a:t>
+            </a:r>
+            <a:r>
+              <a:rPr lang="en-GB" sz="1000" dirty="0">
+                <a:solidFill>
+                  <a:srgbClr val="BCBEC4"/>
+                </a:solidFill>
+                <a:effectLst/>
+                <a:latin typeface="JetBrains Mono"/>
+              </a:rPr>
+              <a:t>)</a:t>
+            </a:r>
+            <a:br>
+              <a:rPr lang="en-GB" sz="1000" dirty="0">
+                <a:solidFill>
+                  <a:srgbClr val="BCBEC4"/>
+                </a:solidFill>
+                <a:effectLst/>
+                <a:latin typeface="JetBrains Mono"/>
+              </a:rPr>
+            </a:br>
+            <a:r>
+              <a:rPr lang="en-GB" sz="1000" dirty="0">
+                <a:solidFill>
+                  <a:srgbClr val="BCBEC4"/>
+                </a:solidFill>
+                <a:effectLst/>
+                <a:latin typeface="JetBrains Mono"/>
+              </a:rPr>
+              <a:t>labels[:</a:t>
+            </a:r>
+            <a:r>
+              <a:rPr lang="en-GB" sz="1000" dirty="0" err="1">
+                <a:solidFill>
+                  <a:srgbClr val="BCBEC4"/>
+                </a:solidFill>
+                <a:effectLst/>
+                <a:latin typeface="JetBrains Mono"/>
+              </a:rPr>
+              <a:t>mask_len</a:t>
+            </a:r>
+            <a:r>
+              <a:rPr lang="en-GB" sz="1000" dirty="0">
+                <a:solidFill>
+                  <a:srgbClr val="BCBEC4"/>
+                </a:solidFill>
+                <a:effectLst/>
+                <a:latin typeface="JetBrains Mono"/>
+              </a:rPr>
+              <a:t>] = [-</a:t>
+            </a:r>
+            <a:r>
+              <a:rPr lang="en-GB" sz="1000" dirty="0">
+                <a:solidFill>
+                  <a:srgbClr val="2AACB8"/>
+                </a:solidFill>
+                <a:effectLst/>
+                <a:latin typeface="JetBrains Mono"/>
+              </a:rPr>
+              <a:t>100</a:t>
+            </a:r>
+            <a:r>
+              <a:rPr lang="en-GB" sz="1000" dirty="0">
+                <a:solidFill>
+                  <a:srgbClr val="BCBEC4"/>
+                </a:solidFill>
+                <a:effectLst/>
+                <a:latin typeface="JetBrains Mono"/>
+              </a:rPr>
+              <a:t>] * </a:t>
+            </a:r>
+            <a:r>
+              <a:rPr lang="en-GB" sz="1000" dirty="0" err="1">
+                <a:solidFill>
+                  <a:srgbClr val="BCBEC4"/>
+                </a:solidFill>
+                <a:effectLst/>
+                <a:latin typeface="JetBrains Mono"/>
+              </a:rPr>
+              <a:t>mask_len</a:t>
+            </a:r>
+            <a:br>
+              <a:rPr lang="en-GB" sz="1000" dirty="0">
+                <a:solidFill>
+                  <a:srgbClr val="BCBEC4"/>
+                </a:solidFill>
+                <a:effectLst/>
+                <a:latin typeface="JetBrains Mono"/>
+              </a:rPr>
+            </a:br>
+            <a:br>
+              <a:rPr lang="en-GB" sz="1000" dirty="0">
+                <a:solidFill>
+                  <a:srgbClr val="BCBEC4"/>
+                </a:solidFill>
+                <a:effectLst/>
+                <a:latin typeface="JetBrains Mono"/>
+              </a:rPr>
+            </a:br>
+            <a:r>
+              <a:rPr lang="en-GB" sz="1000" dirty="0">
+                <a:solidFill>
+                  <a:srgbClr val="8888C6"/>
+                </a:solidFill>
+                <a:effectLst/>
+                <a:latin typeface="JetBrains Mono"/>
+              </a:rPr>
+              <a:t>print</a:t>
+            </a:r>
+            <a:r>
+              <a:rPr lang="en-GB" sz="1000" dirty="0">
+                <a:solidFill>
+                  <a:srgbClr val="BCBEC4"/>
+                </a:solidFill>
+                <a:effectLst/>
+                <a:latin typeface="JetBrains Mono"/>
+              </a:rPr>
+              <a:t>(labels)</a:t>
+            </a:r>
+            <a:br>
+              <a:rPr lang="en-GB" sz="1000" dirty="0">
+                <a:solidFill>
+                  <a:srgbClr val="BCBEC4"/>
+                </a:solidFill>
+                <a:effectLst/>
+                <a:latin typeface="JetBrains Mono"/>
+              </a:rPr>
+            </a:br>
+            <a:br>
+              <a:rPr lang="en-GB" sz="1000" dirty="0">
+                <a:solidFill>
+                  <a:srgbClr val="BCBEC4"/>
+                </a:solidFill>
+                <a:effectLst/>
+                <a:latin typeface="JetBrains Mono"/>
+              </a:rPr>
+            </a:br>
+            <a:r>
+              <a:rPr lang="en-GB" sz="1000" dirty="0" err="1">
+                <a:solidFill>
+                  <a:srgbClr val="BCBEC4"/>
+                </a:solidFill>
+                <a:effectLst/>
+                <a:latin typeface="JetBrains Mono"/>
+              </a:rPr>
+              <a:t>real_len</a:t>
+            </a:r>
+            <a:r>
+              <a:rPr lang="en-GB" sz="1000" dirty="0">
+                <a:solidFill>
+                  <a:srgbClr val="BCBEC4"/>
+                </a:solidFill>
+                <a:effectLst/>
+                <a:latin typeface="JetBrains Mono"/>
+              </a:rPr>
+              <a:t> = </a:t>
+            </a:r>
+            <a:r>
+              <a:rPr lang="en-GB" sz="1000" dirty="0">
+                <a:solidFill>
+                  <a:srgbClr val="8888C6"/>
+                </a:solidFill>
+                <a:effectLst/>
+                <a:latin typeface="JetBrains Mono"/>
+              </a:rPr>
+              <a:t>min</a:t>
+            </a:r>
+            <a:r>
+              <a:rPr lang="en-GB" sz="1000" dirty="0">
+                <a:solidFill>
+                  <a:srgbClr val="BCBEC4"/>
+                </a:solidFill>
+                <a:effectLst/>
+                <a:latin typeface="JetBrains Mono"/>
+              </a:rPr>
+              <a:t>(</a:t>
+            </a:r>
+            <a:r>
+              <a:rPr lang="en-GB" sz="1000" dirty="0" err="1">
+                <a:solidFill>
+                  <a:srgbClr val="8888C6"/>
+                </a:solidFill>
+                <a:effectLst/>
+                <a:latin typeface="JetBrains Mono"/>
+              </a:rPr>
+              <a:t>len</a:t>
+            </a:r>
+            <a:r>
+              <a:rPr lang="en-GB" sz="1000" dirty="0">
+                <a:solidFill>
+                  <a:srgbClr val="BCBEC4"/>
+                </a:solidFill>
+                <a:effectLst/>
+                <a:latin typeface="JetBrains Mono"/>
+              </a:rPr>
+              <a:t>(</a:t>
+            </a:r>
+            <a:r>
+              <a:rPr lang="en-GB" sz="1000" dirty="0" err="1">
+                <a:solidFill>
+                  <a:srgbClr val="BCBEC4"/>
+                </a:solidFill>
+                <a:effectLst/>
+                <a:latin typeface="JetBrains Mono"/>
+              </a:rPr>
+              <a:t>prompt_ids</a:t>
+            </a:r>
+            <a:r>
+              <a:rPr lang="en-GB" sz="1000" dirty="0">
+                <a:solidFill>
+                  <a:srgbClr val="BCBEC4"/>
+                </a:solidFill>
+                <a:effectLst/>
+                <a:latin typeface="JetBrains Mono"/>
+              </a:rPr>
+              <a:t>) + </a:t>
+            </a:r>
+            <a:r>
+              <a:rPr lang="en-GB" sz="1000" dirty="0" err="1">
+                <a:solidFill>
+                  <a:srgbClr val="8888C6"/>
+                </a:solidFill>
+                <a:effectLst/>
+                <a:latin typeface="JetBrains Mono"/>
+              </a:rPr>
+              <a:t>len</a:t>
+            </a:r>
+            <a:r>
+              <a:rPr lang="en-GB" sz="1000" dirty="0">
+                <a:solidFill>
+                  <a:srgbClr val="BCBEC4"/>
+                </a:solidFill>
+                <a:effectLst/>
+                <a:latin typeface="JetBrains Mono"/>
+              </a:rPr>
+              <a:t>(</a:t>
+            </a:r>
+            <a:r>
+              <a:rPr lang="en-GB" sz="1000" dirty="0" err="1">
+                <a:solidFill>
+                  <a:srgbClr val="BCBEC4"/>
+                </a:solidFill>
+                <a:effectLst/>
+                <a:latin typeface="JetBrains Mono"/>
+              </a:rPr>
+              <a:t>response_ids</a:t>
+            </a:r>
+            <a:r>
+              <a:rPr lang="en-GB" sz="1000" dirty="0">
+                <a:solidFill>
+                  <a:srgbClr val="BCBEC4"/>
+                </a:solidFill>
+                <a:effectLst/>
+                <a:latin typeface="JetBrains Mono"/>
+              </a:rPr>
+              <a:t>),</a:t>
+            </a:r>
+            <a:r>
+              <a:rPr lang="en-GB" sz="1000" dirty="0" err="1">
+                <a:solidFill>
+                  <a:srgbClr val="BCBEC4"/>
+                </a:solidFill>
+                <a:effectLst/>
+                <a:latin typeface="JetBrains Mono"/>
+              </a:rPr>
+              <a:t>seq_len</a:t>
+            </a:r>
+            <a:r>
+              <a:rPr lang="en-GB" sz="1000" dirty="0">
+                <a:solidFill>
+                  <a:srgbClr val="BCBEC4"/>
+                </a:solidFill>
+                <a:effectLst/>
+                <a:latin typeface="JetBrains Mono"/>
+              </a:rPr>
+              <a:t> + </a:t>
+            </a:r>
+            <a:r>
+              <a:rPr lang="en-GB" sz="1000" dirty="0">
+                <a:solidFill>
+                  <a:srgbClr val="2AACB8"/>
+                </a:solidFill>
+                <a:effectLst/>
+                <a:latin typeface="JetBrains Mono"/>
+              </a:rPr>
+              <a:t>1</a:t>
+            </a:r>
+            <a:r>
+              <a:rPr lang="en-GB" sz="1000" dirty="0">
+                <a:solidFill>
+                  <a:srgbClr val="BCBEC4"/>
+                </a:solidFill>
+                <a:effectLst/>
+                <a:latin typeface="JetBrains Mono"/>
+              </a:rPr>
+              <a:t>) - </a:t>
+            </a:r>
+            <a:r>
+              <a:rPr lang="en-GB" sz="1000" dirty="0">
+                <a:solidFill>
+                  <a:srgbClr val="2AACB8"/>
+                </a:solidFill>
+                <a:effectLst/>
+                <a:latin typeface="JetBrains Mono"/>
+              </a:rPr>
+              <a:t>1</a:t>
+            </a:r>
+            <a:br>
+              <a:rPr lang="en-GB" sz="1000" dirty="0">
+                <a:solidFill>
+                  <a:srgbClr val="2AACB8"/>
+                </a:solidFill>
+                <a:effectLst/>
+                <a:latin typeface="JetBrains Mono"/>
+              </a:rPr>
+            </a:br>
+            <a:r>
+              <a:rPr lang="en-GB" sz="1000" dirty="0">
+                <a:solidFill>
+                  <a:srgbClr val="BCBEC4"/>
+                </a:solidFill>
+                <a:effectLst/>
+                <a:latin typeface="JetBrains Mono"/>
+              </a:rPr>
+              <a:t>labels[</a:t>
+            </a:r>
+            <a:r>
+              <a:rPr lang="en-GB" sz="1000" dirty="0" err="1">
+                <a:solidFill>
+                  <a:srgbClr val="BCBEC4"/>
+                </a:solidFill>
+                <a:effectLst/>
+                <a:latin typeface="JetBrains Mono"/>
+              </a:rPr>
+              <a:t>real_len</a:t>
+            </a:r>
+            <a:r>
+              <a:rPr lang="en-GB" sz="1000" dirty="0">
+                <a:solidFill>
+                  <a:srgbClr val="BCBEC4"/>
+                </a:solidFill>
+                <a:effectLst/>
+                <a:latin typeface="JetBrains Mono"/>
+              </a:rPr>
+              <a:t>:] = [-</a:t>
+            </a:r>
+            <a:r>
+              <a:rPr lang="en-GB" sz="1000" dirty="0">
+                <a:solidFill>
+                  <a:srgbClr val="2AACB8"/>
+                </a:solidFill>
+                <a:effectLst/>
+                <a:latin typeface="JetBrains Mono"/>
+              </a:rPr>
+              <a:t>100</a:t>
+            </a:r>
+            <a:r>
+              <a:rPr lang="en-GB" sz="1000" dirty="0">
+                <a:solidFill>
+                  <a:srgbClr val="BCBEC4"/>
+                </a:solidFill>
+                <a:effectLst/>
+                <a:latin typeface="JetBrains Mono"/>
+              </a:rPr>
+              <a:t>] * (</a:t>
+            </a:r>
+            <a:r>
+              <a:rPr lang="en-GB" sz="1000" dirty="0" err="1">
+                <a:solidFill>
+                  <a:srgbClr val="BCBEC4"/>
+                </a:solidFill>
+                <a:effectLst/>
+                <a:latin typeface="JetBrains Mono"/>
+              </a:rPr>
+              <a:t>seq_len</a:t>
+            </a:r>
+            <a:r>
+              <a:rPr lang="en-GB" sz="1000" dirty="0">
+                <a:solidFill>
+                  <a:srgbClr val="BCBEC4"/>
+                </a:solidFill>
+                <a:effectLst/>
+                <a:latin typeface="JetBrains Mono"/>
+              </a:rPr>
+              <a:t> - </a:t>
+            </a:r>
+            <a:r>
+              <a:rPr lang="en-GB" sz="1000" dirty="0" err="1">
+                <a:solidFill>
+                  <a:srgbClr val="BCBEC4"/>
+                </a:solidFill>
+                <a:effectLst/>
+                <a:latin typeface="JetBrains Mono"/>
+              </a:rPr>
+              <a:t>real_len</a:t>
+            </a:r>
+            <a:r>
+              <a:rPr lang="en-GB" sz="1000" dirty="0">
+                <a:solidFill>
+                  <a:srgbClr val="BCBEC4"/>
+                </a:solidFill>
+                <a:effectLst/>
+                <a:latin typeface="JetBrains Mono"/>
+              </a:rPr>
+              <a:t>)</a:t>
+            </a:r>
+            <a:br>
+              <a:rPr lang="en-GB" sz="1000" dirty="0">
+                <a:solidFill>
+                  <a:srgbClr val="BCBEC4"/>
+                </a:solidFill>
+                <a:effectLst/>
+                <a:latin typeface="JetBrains Mono"/>
+              </a:rPr>
+            </a:br>
+            <a:br>
+              <a:rPr lang="en-GB" sz="1000" dirty="0">
+                <a:solidFill>
+                  <a:srgbClr val="BCBEC4"/>
+                </a:solidFill>
+                <a:effectLst/>
+                <a:latin typeface="JetBrains Mono"/>
+              </a:rPr>
+            </a:br>
+            <a:r>
+              <a:rPr lang="en-GB" sz="1000" dirty="0">
+                <a:solidFill>
+                  <a:srgbClr val="8888C6"/>
+                </a:solidFill>
+                <a:effectLst/>
+                <a:latin typeface="JetBrains Mono"/>
+              </a:rPr>
+              <a:t>print</a:t>
+            </a:r>
+            <a:r>
+              <a:rPr lang="en-GB" sz="1000" dirty="0">
+                <a:solidFill>
+                  <a:srgbClr val="BCBEC4"/>
+                </a:solidFill>
+                <a:effectLst/>
+                <a:latin typeface="JetBrains Mono"/>
+              </a:rPr>
+              <a:t>(x)</a:t>
+            </a:r>
+            <a:br>
+              <a:rPr lang="en-GB" sz="1000" dirty="0">
+                <a:solidFill>
+                  <a:srgbClr val="BCBEC4"/>
+                </a:solidFill>
+                <a:effectLst/>
+                <a:latin typeface="JetBrains Mono"/>
+              </a:rPr>
+            </a:br>
+            <a:r>
+              <a:rPr lang="en-GB" sz="1000" dirty="0">
+                <a:solidFill>
+                  <a:srgbClr val="8888C6"/>
+                </a:solidFill>
+                <a:effectLst/>
+                <a:latin typeface="JetBrains Mono"/>
+              </a:rPr>
+              <a:t>print</a:t>
+            </a:r>
+            <a:r>
+              <a:rPr lang="en-GB" sz="1000" dirty="0">
+                <a:solidFill>
+                  <a:srgbClr val="BCBEC4"/>
+                </a:solidFill>
+                <a:effectLst/>
+                <a:latin typeface="JetBrains Mono"/>
+              </a:rPr>
+              <a:t>(labels)</a:t>
+            </a:r>
+            <a:br>
+              <a:rPr lang="en-GB" sz="1000" dirty="0">
+                <a:solidFill>
+                  <a:srgbClr val="BCBEC4"/>
+                </a:solidFill>
+                <a:effectLst/>
+                <a:latin typeface="JetBrains Mono"/>
+              </a:rPr>
+            </a:br>
+            <a:endParaRPr lang="en-GB" sz="1000" dirty="0">
+              <a:solidFill>
+                <a:srgbClr val="BCBEC4"/>
+              </a:solidFill>
+              <a:effectLst/>
+              <a:latin typeface="JetBrains Mono"/>
+            </a:endParaRPr>
           </a:p>
         </p:txBody>
       </p:sp>
       <p:sp>
         <p:nvSpPr>
-          <p:cNvPr id="11" name="TextBox 10">
-            <a:extLst>
-              <a:ext uri="{FF2B5EF4-FFF2-40B4-BE49-F238E27FC236}">
-                <a16:creationId xmlns:a16="http://schemas.microsoft.com/office/drawing/2014/main" id="{C0EACF66-B793-7AD0-0119-A03B5969B876}"/>
+          <p:cNvPr id="6" name="TextBox 5">
+            <a:extLst>
+              <a:ext uri="{FF2B5EF4-FFF2-40B4-BE49-F238E27FC236}">
+                <a16:creationId xmlns:a16="http://schemas.microsoft.com/office/drawing/2014/main" id="{285FC240-8AD0-7E29-422B-AF6815305B73}"/>
               </a:ext>
             </a:extLst>
           </p:cNvPr>
@@ -5769,8 +5846,8 @@
         </p:nvSpPr>
         <p:spPr>
           <a:xfrm>
-            <a:off x="4387262" y="-159306"/>
-            <a:ext cx="6099716" cy="7017306"/>
+            <a:off x="646771" y="189571"/>
+            <a:ext cx="1280607" cy="369332"/>
           </a:xfrm>
           <a:prstGeom prst="rect">
             <a:avLst/>
@@ -5778,325 +5855,14 @@
           <a:noFill/>
         </p:spPr>
         <p:txBody>
-          <a:bodyPr wrap="square">
+          <a:bodyPr wrap="none" rtlCol="0">
             <a:spAutoFit/>
           </a:bodyPr>
           <a:lstStyle/>
           <a:p>
-            <a:endParaRPr lang="en-LK" sz="1000" dirty="0"/>
-          </a:p>
-          <a:p>
-            <a:endParaRPr lang="en-LK" sz="1000" dirty="0"/>
-          </a:p>
-          <a:p>
-            <a:r>
-              <a:rPr lang="en-LK" sz="1000" dirty="0"/>
-              <a:t>class SFTDataset(Dataset):</a:t>
-            </a:r>
-          </a:p>
-          <a:p>
-            <a:r>
-              <a:rPr lang="en-LK" sz="1000" dirty="0"/>
-              <a:t>    def __init__(self, path, tokenizer, seq_len):</a:t>
-            </a:r>
-          </a:p>
-          <a:p>
-            <a:r>
-              <a:rPr lang="en-LK" sz="1000" dirty="0"/>
-              <a:t>        self.data = []</a:t>
-            </a:r>
-          </a:p>
-          <a:p>
-            <a:r>
-              <a:rPr lang="en-LK" sz="1000" dirty="0"/>
-              <a:t>        self.tokenizer = tokenizer</a:t>
-            </a:r>
-          </a:p>
-          <a:p>
-            <a:r>
-              <a:rPr lang="en-LK" sz="1000" dirty="0"/>
-              <a:t>        self.seq_len = seq_len</a:t>
-            </a:r>
-          </a:p>
-          <a:p>
-            <a:endParaRPr lang="en-LK" sz="1000" dirty="0"/>
-          </a:p>
-          <a:p>
-            <a:r>
-              <a:rPr lang="en-LK" sz="1000" dirty="0"/>
-              <a:t>        with open(path, "r") as f:</a:t>
-            </a:r>
-          </a:p>
-          <a:p>
-            <a:r>
-              <a:rPr lang="en-LK" sz="1000" dirty="0"/>
-              <a:t>            for line in f:</a:t>
-            </a:r>
-          </a:p>
-          <a:p>
-            <a:r>
-              <a:rPr lang="en-LK" sz="1000" dirty="0"/>
-              <a:t>                self.data.append(json.loads(line))</a:t>
-            </a:r>
-          </a:p>
-          <a:p>
-            <a:endParaRPr lang="en-LK" sz="1000" dirty="0"/>
-          </a:p>
-          <a:p>
-            <a:r>
-              <a:rPr lang="en-LK" sz="1000" dirty="0"/>
-              <a:t>    def __len__(self):</a:t>
-            </a:r>
-          </a:p>
-          <a:p>
-            <a:r>
-              <a:rPr lang="en-LK" sz="1000" dirty="0"/>
-              <a:t>        return len(self.data)</a:t>
-            </a:r>
-          </a:p>
-          <a:p>
-            <a:endParaRPr lang="en-LK" sz="1000" dirty="0"/>
-          </a:p>
-          <a:p>
-            <a:r>
-              <a:rPr lang="en-LK" sz="1000" dirty="0"/>
-              <a:t>    def __getitem__(self, idx):</a:t>
-            </a:r>
-          </a:p>
-          <a:p>
-            <a:r>
-              <a:rPr lang="en-LK" sz="1000" dirty="0"/>
-              <a:t>        item = self.data[idx]</a:t>
-            </a:r>
-          </a:p>
-          <a:p>
-            <a:endParaRPr lang="en-LK" sz="1000" dirty="0"/>
-          </a:p>
-          <a:p>
-            <a:r>
-              <a:rPr lang="en-LK" sz="1000" dirty="0"/>
-              <a:t>        prompt_ids = self.tokenizer.encode(item["prompt"])</a:t>
-            </a:r>
-          </a:p>
-          <a:p>
-            <a:r>
-              <a:rPr lang="en-LK" sz="1000" dirty="0"/>
-              <a:t>        response_ids = self.tokenizer.encode(item["response"])</a:t>
-            </a:r>
-          </a:p>
-          <a:p>
-            <a:endParaRPr lang="en-LK" sz="1000" dirty="0"/>
-          </a:p>
-          <a:p>
-            <a:r>
-              <a:rPr lang="en-LK" sz="1000" dirty="0"/>
-              <a:t>        tokens = prompt_ids + response_ids</a:t>
-            </a:r>
-          </a:p>
-          <a:p>
-            <a:endParaRPr lang="en-LK" sz="1000" dirty="0"/>
-          </a:p>
-          <a:p>
-            <a:r>
-              <a:rPr lang="en-LK" sz="1000" dirty="0"/>
-              <a:t>        tokens = tokens[:self.seq_len + 1]</a:t>
-            </a:r>
-          </a:p>
-          <a:p>
-            <a:endParaRPr lang="en-LK" sz="1000" dirty="0"/>
-          </a:p>
-          <a:p>
-            <a:r>
-              <a:rPr lang="en-LK" sz="1000" dirty="0"/>
-              <a:t>        pad_id = 0</a:t>
-            </a:r>
-          </a:p>
-          <a:p>
-            <a:r>
-              <a:rPr lang="en-LK" sz="1000" dirty="0"/>
-              <a:t>        pad_len = (self.seq_len + 1) - len(tokens)</a:t>
-            </a:r>
-          </a:p>
-          <a:p>
-            <a:r>
-              <a:rPr lang="en-LK" sz="1000" dirty="0"/>
-              <a:t>        tokens = tokens + [pad_id] * pad_len</a:t>
-            </a:r>
-          </a:p>
-          <a:p>
-            <a:endParaRPr lang="en-LK" sz="1000" dirty="0"/>
-          </a:p>
-          <a:p>
-            <a:r>
-              <a:rPr lang="en-LK" sz="1000" dirty="0"/>
-              <a:t>        x = tokens[:-1]</a:t>
-            </a:r>
-          </a:p>
-          <a:p>
-            <a:r>
-              <a:rPr lang="en-LK" sz="1000" dirty="0"/>
-              <a:t>        y = tokens[1:]</a:t>
-            </a:r>
-          </a:p>
-          <a:p>
-            <a:endParaRPr lang="en-LK" sz="1000" dirty="0"/>
-          </a:p>
-          <a:p>
-            <a:r>
-              <a:rPr lang="en-LK" sz="1000" dirty="0"/>
-              <a:t>        labels = y.copy()</a:t>
-            </a:r>
-          </a:p>
-          <a:p>
-            <a:endParaRPr lang="en-LK" sz="1000" dirty="0"/>
-          </a:p>
-          <a:p>
-            <a:r>
-              <a:rPr lang="en-LK" sz="1000" dirty="0"/>
-              <a:t>        prompt_len = min(len(prompt_ids), self.seq_len)</a:t>
-            </a:r>
-          </a:p>
-          <a:p>
-            <a:r>
-              <a:rPr lang="en-LK" sz="1000" dirty="0"/>
-              <a:t>        mask_len = max(0, prompt_len - 1)</a:t>
-            </a:r>
-          </a:p>
-          <a:p>
-            <a:r>
-              <a:rPr lang="en-LK" sz="1000" dirty="0"/>
-              <a:t>        labels[:mask_len] = [-100] * mask_len</a:t>
-            </a:r>
-          </a:p>
-          <a:p>
-            <a:endParaRPr lang="en-LK" sz="1000" dirty="0"/>
-          </a:p>
-          <a:p>
-            <a:r>
-              <a:rPr lang="en-LK" sz="1000" dirty="0"/>
-              <a:t>        real_len = min(len(prompt_ids) + len(response_ids), self.seq_len + 1) - 1</a:t>
-            </a:r>
-          </a:p>
-          <a:p>
-            <a:r>
-              <a:rPr lang="en-LK" sz="1000" dirty="0"/>
-              <a:t>        labels[real_len:] = [-100] * (self.seq_len - real_len)</a:t>
-            </a:r>
-          </a:p>
-          <a:p>
-            <a:endParaRPr lang="en-LK" sz="1000" dirty="0"/>
-          </a:p>
-          <a:p>
-            <a:r>
-              <a:rPr lang="en-LK" sz="1000" dirty="0"/>
-              <a:t>        return (</a:t>
-            </a:r>
-          </a:p>
-          <a:p>
-            <a:r>
-              <a:rPr lang="en-LK" sz="1000" dirty="0"/>
-              <a:t>            torch.tensor(x, dtype=torch.long),</a:t>
-            </a:r>
-          </a:p>
-          <a:p>
-            <a:r>
-              <a:rPr lang="en-LK" sz="1000" dirty="0"/>
-              <a:t>            torch.tensor(labels, dtype=torch.long)</a:t>
-            </a:r>
-          </a:p>
-          <a:p>
-            <a:r>
-              <a:rPr lang="en-LK" sz="1000" dirty="0"/>
-              <a:t>        )</a:t>
-            </a:r>
-          </a:p>
-        </p:txBody>
-      </p:sp>
-      <p:sp>
-        <p:nvSpPr>
-          <p:cNvPr id="13" name="TextBox 12">
-            <a:extLst>
-              <a:ext uri="{FF2B5EF4-FFF2-40B4-BE49-F238E27FC236}">
-                <a16:creationId xmlns:a16="http://schemas.microsoft.com/office/drawing/2014/main" id="{565671C1-78BB-F3F8-091A-A42A9D5CDE1B}"/>
-              </a:ext>
-            </a:extLst>
-          </p:cNvPr>
-          <p:cNvSpPr txBox="1"/>
-          <p:nvPr/>
-        </p:nvSpPr>
-        <p:spPr>
-          <a:xfrm>
-            <a:off x="518531" y="705718"/>
-            <a:ext cx="6956474" cy="1785104"/>
-          </a:xfrm>
-          <a:prstGeom prst="rect">
-            <a:avLst/>
-          </a:prstGeom>
-          <a:noFill/>
-        </p:spPr>
-        <p:txBody>
-          <a:bodyPr wrap="square">
-            <a:spAutoFit/>
-          </a:bodyPr>
-          <a:lstStyle/>
-          <a:p>
-            <a:r>
-              <a:rPr lang="en-LK" sz="1000" dirty="0"/>
-              <a:t>import torch</a:t>
-            </a:r>
-          </a:p>
-          <a:p>
-            <a:r>
-              <a:rPr lang="en-LK" sz="1000" dirty="0"/>
-              <a:t>import torch.nn.functional as F</a:t>
-            </a:r>
-          </a:p>
-          <a:p>
-            <a:r>
-              <a:rPr lang="en-LK" sz="1000" dirty="0"/>
-              <a:t>import json</a:t>
-            </a:r>
-          </a:p>
-          <a:p>
-            <a:r>
-              <a:rPr lang="en-LK" sz="1000" dirty="0"/>
-              <a:t>import os</a:t>
-            </a:r>
-          </a:p>
-          <a:p>
-            <a:r>
-              <a:rPr lang="en-LK" sz="1000" dirty="0"/>
-              <a:t>import time</a:t>
-            </a:r>
-          </a:p>
-          <a:p>
-            <a:endParaRPr lang="en-LK" sz="1000" dirty="0"/>
-          </a:p>
-          <a:p>
-            <a:r>
-              <a:rPr lang="en-LK" sz="1000" dirty="0"/>
-              <a:t>from torch.utils.data import Dataset, DataLoader</a:t>
-            </a:r>
-          </a:p>
-          <a:p>
-            <a:endParaRPr lang="en-LK" sz="1000" dirty="0"/>
-          </a:p>
-          <a:p>
-            <a:r>
-              <a:rPr lang="en-LK" sz="1000" dirty="0"/>
-              <a:t>from config import GPTConfig</a:t>
-            </a:r>
-          </a:p>
-          <a:p>
-            <a:r>
-              <a:rPr lang="en-LK" sz="1000" dirty="0"/>
-              <a:t>from model import GPT</a:t>
-            </a:r>
-          </a:p>
-          <a:p>
-            <a:r>
-              <a:rPr lang="en-LK" sz="1000" dirty="0"/>
-              <a:t>from tokenizer import Tokenizer</a:t>
+            <a:r>
+              <a:rPr lang="en-LK" dirty="0"/>
+              <a:t>Pure logic -</a:t>
             </a:r>
           </a:p>
         </p:txBody>
@@ -6104,7 +5870,7 @@
     </p:spTree>
     <p:extLst>
       <p:ext uri="{BB962C8B-B14F-4D97-AF65-F5344CB8AC3E}">
-        <p14:creationId xmlns:p14="http://schemas.microsoft.com/office/powerpoint/2010/main" val="3462763545"/>
+        <p14:creationId xmlns:p14="http://schemas.microsoft.com/office/powerpoint/2010/main" val="3498353759"/>
       </p:ext>
     </p:extLst>
   </p:cSld>
@@ -6133,10 +5899,10 @@
       </p:grpSpPr>
       <p:sp>
         <p:nvSpPr>
-          <p:cNvPr id="6" name="TextBox 5">
-            <a:extLst>
-              <a:ext uri="{FF2B5EF4-FFF2-40B4-BE49-F238E27FC236}">
-                <a16:creationId xmlns:a16="http://schemas.microsoft.com/office/drawing/2014/main" id="{C9CE574C-AEB6-E784-D75D-2BF1D3942C5B}"/>
+          <p:cNvPr id="5" name="TextBox 4">
+            <a:extLst>
+              <a:ext uri="{FF2B5EF4-FFF2-40B4-BE49-F238E27FC236}">
+                <a16:creationId xmlns:a16="http://schemas.microsoft.com/office/drawing/2014/main" id="{6DC971D7-6B19-BDAA-C1B2-9AF9FA1FD74C}"/>
               </a:ext>
             </a:extLst>
           </p:cNvPr>
@@ -6145,8 +5911,8 @@
         </p:nvSpPr>
         <p:spPr>
           <a:xfrm>
-            <a:off x="228599" y="0"/>
-            <a:ext cx="12826218" cy="5632311"/>
+            <a:off x="518531" y="88540"/>
+            <a:ext cx="6099716" cy="369332"/>
           </a:xfrm>
           <a:prstGeom prst="rect">
             <a:avLst/>
@@ -6159,199 +5925,25 @@
           </a:bodyPr>
           <a:lstStyle/>
           <a:p>
-            <a:endParaRPr lang="en-LK" sz="1000" dirty="0"/>
-          </a:p>
-          <a:p>
-            <a:endParaRPr lang="en-LK" sz="1000" dirty="0"/>
-          </a:p>
-          <a:p>
-            <a:r>
-              <a:rPr lang="en-LK" sz="1000" dirty="0"/>
-              <a:t>def get_loader(path, tokenizer, seq_len, batch_size):</a:t>
-            </a:r>
-          </a:p>
-          <a:p>
-            <a:r>
-              <a:rPr lang="en-LK" sz="1000" dirty="0"/>
-              <a:t>    dataset = SFTDataset(path, tokenizer, seq_len)</a:t>
-            </a:r>
-          </a:p>
-          <a:p>
-            <a:endParaRPr lang="en-LK" sz="1000" dirty="0"/>
-          </a:p>
-          <a:p>
-            <a:r>
-              <a:rPr lang="en-LK" sz="1000" dirty="0"/>
-              <a:t>    return DataLoader(</a:t>
-            </a:r>
-          </a:p>
-          <a:p>
-            <a:r>
-              <a:rPr lang="en-LK" sz="1000" dirty="0"/>
-              <a:t>        dataset,</a:t>
-            </a:r>
-          </a:p>
-          <a:p>
-            <a:r>
-              <a:rPr lang="en-LK" sz="1000" dirty="0"/>
-              <a:t>        batch_size=batch_size,</a:t>
-            </a:r>
-          </a:p>
-          <a:p>
-            <a:r>
-              <a:rPr lang="en-LK" sz="1000" dirty="0"/>
-              <a:t>        shuffle=True,</a:t>
-            </a:r>
-          </a:p>
-          <a:p>
-            <a:r>
-              <a:rPr lang="en-LK" sz="1000" dirty="0"/>
-              <a:t>        drop_last=True</a:t>
-            </a:r>
-          </a:p>
-          <a:p>
-            <a:r>
-              <a:rPr lang="en-LK" sz="1000" dirty="0"/>
-              <a:t>    )</a:t>
-            </a:r>
-          </a:p>
-          <a:p>
-            <a:endParaRPr lang="en-LK" sz="1000" dirty="0"/>
-          </a:p>
-          <a:p>
-            <a:endParaRPr lang="en-LK" sz="1000" dirty="0"/>
-          </a:p>
-          <a:p>
-            <a:r>
-              <a:rPr lang="en-LK" sz="1000" dirty="0"/>
-              <a:t>cfg = GPTConfig(</a:t>
-            </a:r>
-          </a:p>
-          <a:p>
-            <a:r>
-              <a:rPr lang="en-LK" sz="1000" dirty="0"/>
-              <a:t>    vocab_size = 50257,</a:t>
-            </a:r>
-          </a:p>
-          <a:p>
-            <a:r>
-              <a:rPr lang="en-LK" sz="1000" dirty="0"/>
-              <a:t>    seq_len    = 128,</a:t>
-            </a:r>
-          </a:p>
-          <a:p>
-            <a:r>
-              <a:rPr lang="en-LK" sz="1000" dirty="0"/>
-              <a:t>    d_model    = 128,</a:t>
-            </a:r>
-          </a:p>
-          <a:p>
-            <a:r>
-              <a:rPr lang="en-LK" sz="1000" dirty="0"/>
-              <a:t>    n_heads    = 8,</a:t>
-            </a:r>
-          </a:p>
-          <a:p>
-            <a:r>
-              <a:rPr lang="en-LK" sz="1000" dirty="0"/>
-              <a:t>    n_layers   = 4,</a:t>
-            </a:r>
-          </a:p>
-          <a:p>
-            <a:r>
-              <a:rPr lang="en-LK" sz="1000" dirty="0"/>
-              <a:t>    d_ff       = 512,</a:t>
-            </a:r>
-          </a:p>
-          <a:p>
-            <a:r>
-              <a:rPr lang="en-LK" sz="1000" dirty="0"/>
-              <a:t>    dropout    = 0.1,</a:t>
-            </a:r>
-          </a:p>
-          <a:p>
-            <a:r>
-              <a:rPr lang="en-LK" sz="1000" dirty="0"/>
-              <a:t>    batch_size = 16,</a:t>
-            </a:r>
-          </a:p>
-          <a:p>
-            <a:r>
-              <a:rPr lang="en-LK" sz="1000" dirty="0"/>
-              <a:t>    lr         = 8e-3,</a:t>
-            </a:r>
-          </a:p>
-          <a:p>
-            <a:r>
-              <a:rPr lang="en-LK" sz="1000" dirty="0"/>
-              <a:t>    max_iters  = 10000,</a:t>
-            </a:r>
-          </a:p>
-          <a:p>
-            <a:r>
-              <a:rPr lang="en-LK" sz="1000" dirty="0"/>
-              <a:t>)</a:t>
-            </a:r>
-          </a:p>
-          <a:p>
-            <a:endParaRPr lang="en-LK" sz="1000" dirty="0"/>
-          </a:p>
-          <a:p>
-            <a:r>
-              <a:rPr lang="en-LK" sz="1000" dirty="0"/>
-              <a:t>device = cfg.device</a:t>
-            </a:r>
-          </a:p>
-          <a:p>
-            <a:endParaRPr lang="en-LK" sz="1000" dirty="0"/>
-          </a:p>
-          <a:p>
-            <a:r>
-              <a:rPr lang="en-LK" sz="1000" dirty="0"/>
-              <a:t>tokenizer = Tokenizer()</a:t>
-            </a:r>
-          </a:p>
-          <a:p>
-            <a:endParaRPr lang="en-LK" sz="1000" dirty="0"/>
-          </a:p>
-          <a:p>
-            <a:r>
-              <a:rPr lang="en-LK" sz="1000" dirty="0"/>
-              <a:t>model = GPT(cfg).to(device)</a:t>
-            </a:r>
-          </a:p>
-          <a:p>
-            <a:endParaRPr lang="en-LK" sz="1000" dirty="0"/>
-          </a:p>
-          <a:p>
-            <a:r>
-              <a:rPr lang="en-LK" sz="1000" dirty="0"/>
-              <a:t>ckpt = torch.load("checkpoints/gpt_step_6000.pt", map_location=device)</a:t>
-            </a:r>
-          </a:p>
-          <a:p>
-            <a:r>
-              <a:rPr lang="en-LK" sz="1000" dirty="0"/>
-              <a:t>model.load_state_dict(ckpt["model"])</a:t>
-            </a:r>
-          </a:p>
-          <a:p>
-            <a:r>
-              <a:rPr lang="en-LK" sz="1000" dirty="0"/>
-              <a:t>print("Loaded pretrained model")</a:t>
-            </a:r>
-          </a:p>
-          <a:p>
-            <a:endParaRPr lang="en-LK" sz="1000" dirty="0"/>
+            <a:pPr>
+              <a:buNone/>
+            </a:pPr>
+            <a:r>
+              <a:rPr lang="en-GB" b="1" dirty="0" err="1">
+                <a:latin typeface="Courier New" panose="02070309020205020404" pitchFamily="49" charset="0"/>
+              </a:rPr>
+              <a:t>sft.py</a:t>
+            </a:r>
+            <a:endParaRPr lang="en-GB" b="1" dirty="0"/>
           </a:p>
         </p:txBody>
       </p:sp>
       <p:sp>
         <p:nvSpPr>
-          <p:cNvPr id="9" name="TextBox 8">
-            <a:extLst>
-              <a:ext uri="{FF2B5EF4-FFF2-40B4-BE49-F238E27FC236}">
-                <a16:creationId xmlns:a16="http://schemas.microsoft.com/office/drawing/2014/main" id="{C5041B14-51DE-F3F2-B134-D312FBEFAFCA}"/>
+          <p:cNvPr id="13" name="TextBox 12">
+            <a:extLst>
+              <a:ext uri="{FF2B5EF4-FFF2-40B4-BE49-F238E27FC236}">
+                <a16:creationId xmlns:a16="http://schemas.microsoft.com/office/drawing/2014/main" id="{565671C1-78BB-F3F8-091A-A42A9D5CDE1B}"/>
               </a:ext>
             </a:extLst>
           </p:cNvPr>
@@ -6360,8 +5952,8 @@
         </p:nvSpPr>
         <p:spPr>
           <a:xfrm>
-            <a:off x="5077707" y="186342"/>
-            <a:ext cx="6956474" cy="2246769"/>
+            <a:off x="518531" y="705718"/>
+            <a:ext cx="6956474" cy="1785104"/>
           </a:xfrm>
           <a:prstGeom prst="rect">
             <a:avLst/>
@@ -6374,42 +5966,42 @@
           </a:bodyPr>
           <a:lstStyle/>
           <a:p>
+            <a:r>
+              <a:rPr lang="en-LK" sz="1000" dirty="0"/>
+              <a:t>import torch</a:t>
+            </a:r>
+          </a:p>
+          <a:p>
+            <a:r>
+              <a:rPr lang="en-LK" sz="1000" dirty="0"/>
+              <a:t>import torch.nn.functional as F</a:t>
+            </a:r>
+          </a:p>
+          <a:p>
+            <a:r>
+              <a:rPr lang="en-LK" sz="1000" dirty="0"/>
+              <a:t>import json</a:t>
+            </a:r>
+          </a:p>
+          <a:p>
+            <a:r>
+              <a:rPr lang="en-LK" sz="1000" dirty="0"/>
+              <a:t>import os</a:t>
+            </a:r>
+          </a:p>
+          <a:p>
+            <a:r>
+              <a:rPr lang="en-LK" sz="1000" dirty="0"/>
+              <a:t>import time</a:t>
+            </a:r>
+          </a:p>
+          <a:p>
             <a:endParaRPr lang="en-LK" sz="1000" dirty="0"/>
           </a:p>
           <a:p>
             <a:r>
               <a:rPr lang="en-LK" sz="1000" dirty="0"/>
-              <a:t>optimizer = torch.optim.AdamW(</a:t>
-            </a:r>
-          </a:p>
-          <a:p>
-            <a:r>
-              <a:rPr lang="en-LK" sz="1000" dirty="0"/>
-              <a:t>    model.parameters(),</a:t>
-            </a:r>
-          </a:p>
-          <a:p>
-            <a:r>
-              <a:rPr lang="en-LK" sz="1000" dirty="0"/>
-              <a:t>    lr=cfg.lr,</a:t>
-            </a:r>
-          </a:p>
-          <a:p>
-            <a:r>
-              <a:rPr lang="en-LK" sz="1000" dirty="0"/>
-              <a:t>    weight_decay=0.1,</a:t>
-            </a:r>
-          </a:p>
-          <a:p>
-            <a:r>
-              <a:rPr lang="en-LK" sz="1000" dirty="0"/>
-              <a:t>    betas=(0.9, 0.95),</a:t>
-            </a:r>
-          </a:p>
-          <a:p>
-            <a:r>
-              <a:rPr lang="en-LK" sz="1000" dirty="0"/>
-              <a:t>)</a:t>
+              <a:t>from torch.utils.data import Dataset, DataLoader</a:t>
             </a:r>
           </a:p>
           <a:p>
@@ -6418,37 +6010,300 @@
           <a:p>
             <a:r>
               <a:rPr lang="en-LK" sz="1000" dirty="0"/>
-              <a:t>loader = get_loader(</a:t>
-            </a:r>
-          </a:p>
-          <a:p>
-            <a:r>
-              <a:rPr lang="en-LK" sz="1000" dirty="0"/>
-              <a:t>    "sft_data.jsonl",</a:t>
-            </a:r>
-          </a:p>
-          <a:p>
-            <a:r>
-              <a:rPr lang="en-LK" sz="1000" dirty="0"/>
-              <a:t>    tokenizer,</a:t>
-            </a:r>
-          </a:p>
-          <a:p>
-            <a:r>
-              <a:rPr lang="en-LK" sz="1000" dirty="0"/>
-              <a:t>    cfg.seq_len,</a:t>
-            </a:r>
-          </a:p>
-          <a:p>
-            <a:r>
-              <a:rPr lang="en-LK" sz="1000" dirty="0"/>
-              <a:t>    cfg.batch_size</a:t>
-            </a:r>
-          </a:p>
-          <a:p>
-            <a:r>
-              <a:rPr lang="en-LK" sz="1000" dirty="0"/>
-              <a:t>)</a:t>
+              <a:t>from config import GPTConfig</a:t>
+            </a:r>
+          </a:p>
+          <a:p>
+            <a:r>
+              <a:rPr lang="en-LK" sz="1000" dirty="0"/>
+              <a:t>from model import GPT</a:t>
+            </a:r>
+          </a:p>
+          <a:p>
+            <a:r>
+              <a:rPr lang="en-LK" sz="1000" dirty="0"/>
+              <a:t>from tokenizer import Tokenizer</a:t>
+            </a:r>
+          </a:p>
+        </p:txBody>
+      </p:sp>
+      <p:sp>
+        <p:nvSpPr>
+          <p:cNvPr id="3" name="TextBox 2">
+            <a:extLst>
+              <a:ext uri="{FF2B5EF4-FFF2-40B4-BE49-F238E27FC236}">
+                <a16:creationId xmlns:a16="http://schemas.microsoft.com/office/drawing/2014/main" id="{E3C6F3B9-F646-ACE7-F95E-5076FE0012F4}"/>
+              </a:ext>
+            </a:extLst>
+          </p:cNvPr>
+          <p:cNvSpPr txBox="1"/>
+          <p:nvPr/>
+        </p:nvSpPr>
+        <p:spPr>
+          <a:xfrm>
+            <a:off x="3657600" y="88540"/>
+            <a:ext cx="8015869" cy="6878806"/>
+          </a:xfrm>
+          <a:prstGeom prst="rect">
+            <a:avLst/>
+          </a:prstGeom>
+          <a:noFill/>
+        </p:spPr>
+        <p:txBody>
+          <a:bodyPr wrap="square">
+            <a:spAutoFit/>
+          </a:bodyPr>
+          <a:lstStyle/>
+          <a:p>
+            <a:r>
+              <a:rPr lang="en-LK" sz="900" dirty="0"/>
+              <a:t>class SFTDataset(Dataset):</a:t>
+            </a:r>
+          </a:p>
+          <a:p>
+            <a:r>
+              <a:rPr lang="en-LK" sz="900" dirty="0"/>
+              <a:t>    def __init__(self, path, tokenizer, seq_len):</a:t>
+            </a:r>
+          </a:p>
+          <a:p>
+            <a:r>
+              <a:rPr lang="en-LK" sz="900" dirty="0"/>
+              <a:t>        self.data = []</a:t>
+            </a:r>
+          </a:p>
+          <a:p>
+            <a:r>
+              <a:rPr lang="en-LK" sz="900" dirty="0"/>
+              <a:t>        self.tokenizer = tokenizer</a:t>
+            </a:r>
+          </a:p>
+          <a:p>
+            <a:r>
+              <a:rPr lang="en-LK" sz="900" dirty="0"/>
+              <a:t>        self.seq_len = seq_len</a:t>
+            </a:r>
+          </a:p>
+          <a:p>
+            <a:endParaRPr lang="en-LK" sz="900" dirty="0"/>
+          </a:p>
+          <a:p>
+            <a:r>
+              <a:rPr lang="en-LK" sz="900" dirty="0"/>
+              <a:t>        with open(path, "r") as f:</a:t>
+            </a:r>
+          </a:p>
+          <a:p>
+            <a:r>
+              <a:rPr lang="en-LK" sz="900" dirty="0"/>
+              <a:t>            for line in f:</a:t>
+            </a:r>
+          </a:p>
+          <a:p>
+            <a:r>
+              <a:rPr lang="en-LK" sz="900" dirty="0"/>
+              <a:t>                self.data.append(json.loads(line))</a:t>
+            </a:r>
+          </a:p>
+          <a:p>
+            <a:endParaRPr lang="en-LK" sz="900" dirty="0"/>
+          </a:p>
+          <a:p>
+            <a:r>
+              <a:rPr lang="en-LK" sz="900" dirty="0"/>
+              <a:t>    def __len__(self):</a:t>
+            </a:r>
+          </a:p>
+          <a:p>
+            <a:r>
+              <a:rPr lang="en-LK" sz="900" dirty="0"/>
+              <a:t>        return len(self.data)</a:t>
+            </a:r>
+          </a:p>
+          <a:p>
+            <a:endParaRPr lang="en-LK" sz="900" dirty="0"/>
+          </a:p>
+          <a:p>
+            <a:r>
+              <a:rPr lang="en-LK" sz="900" dirty="0"/>
+              <a:t>    def __getitem__(self, idx):</a:t>
+            </a:r>
+          </a:p>
+          <a:p>
+            <a:endParaRPr lang="en-LK" sz="900" dirty="0"/>
+          </a:p>
+          <a:p>
+            <a:r>
+              <a:rPr lang="en-LK" sz="900" dirty="0"/>
+              <a:t>        item = self.data[idx]</a:t>
+            </a:r>
+          </a:p>
+          <a:p>
+            <a:r>
+              <a:rPr lang="en-LK" sz="900" dirty="0"/>
+              <a:t>        prompt = f"User: {item['prompt']}\nAssistant:"</a:t>
+            </a:r>
+          </a:p>
+          <a:p>
+            <a:r>
+              <a:rPr lang="en-LK" sz="900" dirty="0"/>
+              <a:t>        response = item["response"] + "&lt;|endoftext|&gt;"</a:t>
+            </a:r>
+          </a:p>
+          <a:p>
+            <a:r>
+              <a:rPr lang="en-LK" sz="900" dirty="0"/>
+              <a:t>        prompt_ids = self.tokenizer.encode(prompt)</a:t>
+            </a:r>
+          </a:p>
+          <a:p>
+            <a:r>
+              <a:rPr lang="en-LK" sz="900" dirty="0"/>
+              <a:t>        response_ids = self.tokenizer.encode(response)</a:t>
+            </a:r>
+          </a:p>
+          <a:p>
+            <a:r>
+              <a:rPr lang="en-LK" sz="900" dirty="0"/>
+              <a:t>        tokens = prompt_ids + response_ids</a:t>
+            </a:r>
+          </a:p>
+          <a:p>
+            <a:r>
+              <a:rPr lang="en-LK" sz="900" dirty="0"/>
+              <a:t>        tokens = tokens[:self.seq_len + 1]</a:t>
+            </a:r>
+          </a:p>
+          <a:p>
+            <a:r>
+              <a:rPr lang="en-LK" sz="900" dirty="0"/>
+              <a:t>        pad_id = 0</a:t>
+            </a:r>
+          </a:p>
+          <a:p>
+            <a:r>
+              <a:rPr lang="en-LK" sz="900" dirty="0"/>
+              <a:t>        pad_len = (self.seq_len + 1) - len(tokens)</a:t>
+            </a:r>
+          </a:p>
+          <a:p>
+            <a:r>
+              <a:rPr lang="en-LK" sz="900" dirty="0"/>
+              <a:t>        tokens = tokens + [pad_id] * pad_len</a:t>
+            </a:r>
+          </a:p>
+          <a:p>
+            <a:endParaRPr lang="en-LK" sz="900" dirty="0"/>
+          </a:p>
+          <a:p>
+            <a:r>
+              <a:rPr lang="en-LK" sz="900" dirty="0"/>
+              <a:t>        x = tokens[:-1]</a:t>
+            </a:r>
+          </a:p>
+          <a:p>
+            <a:r>
+              <a:rPr lang="en-LK" sz="900" dirty="0"/>
+              <a:t>        y = tokens[1:]</a:t>
+            </a:r>
+          </a:p>
+          <a:p>
+            <a:endParaRPr lang="en-LK" sz="900" dirty="0"/>
+          </a:p>
+          <a:p>
+            <a:r>
+              <a:rPr lang="en-LK" sz="900" dirty="0"/>
+              <a:t>        labels = y.copy()</a:t>
+            </a:r>
+          </a:p>
+          <a:p>
+            <a:endParaRPr lang="en-LK" sz="900" dirty="0"/>
+          </a:p>
+          <a:p>
+            <a:r>
+              <a:rPr lang="en-LK" sz="900" dirty="0"/>
+              <a:t>        prompt_len = min(len(prompt_ids), self.seq_len)</a:t>
+            </a:r>
+          </a:p>
+          <a:p>
+            <a:endParaRPr lang="en-LK" sz="900" dirty="0"/>
+          </a:p>
+          <a:p>
+            <a:r>
+              <a:rPr lang="en-LK" sz="900" dirty="0"/>
+              <a:t>        mask_len = max(0, prompt_len - 1)</a:t>
+            </a:r>
+          </a:p>
+          <a:p>
+            <a:endParaRPr lang="en-LK" sz="900" dirty="0"/>
+          </a:p>
+          <a:p>
+            <a:r>
+              <a:rPr lang="en-LK" sz="900" dirty="0"/>
+              <a:t>        labels[:mask_len] = [-100] * mask_len</a:t>
+            </a:r>
+          </a:p>
+          <a:p>
+            <a:endParaRPr lang="en-LK" sz="900" dirty="0"/>
+          </a:p>
+          <a:p>
+            <a:r>
+              <a:rPr lang="en-LK" sz="900" dirty="0"/>
+              <a:t>        real_len = min(</a:t>
+            </a:r>
+          </a:p>
+          <a:p>
+            <a:r>
+              <a:rPr lang="en-LK" sz="900" dirty="0"/>
+              <a:t>            len(prompt_ids) + len(response_ids),</a:t>
+            </a:r>
+          </a:p>
+          <a:p>
+            <a:r>
+              <a:rPr lang="en-LK" sz="900" dirty="0"/>
+              <a:t>            self.seq_len + 1</a:t>
+            </a:r>
+          </a:p>
+          <a:p>
+            <a:r>
+              <a:rPr lang="en-LK" sz="900" dirty="0"/>
+              <a:t>        ) - 1</a:t>
+            </a:r>
+          </a:p>
+          <a:p>
+            <a:endParaRPr lang="en-LK" sz="900" dirty="0"/>
+          </a:p>
+          <a:p>
+            <a:r>
+              <a:rPr lang="en-LK" sz="900" dirty="0"/>
+              <a:t>        labels[real_len:] = [-100] * (self.seq_len - real_len)</a:t>
+            </a:r>
+          </a:p>
+          <a:p>
+            <a:endParaRPr lang="en-LK" sz="900" dirty="0"/>
+          </a:p>
+          <a:p>
+            <a:r>
+              <a:rPr lang="en-LK" sz="900" dirty="0"/>
+              <a:t>        return (</a:t>
+            </a:r>
+          </a:p>
+          <a:p>
+            <a:r>
+              <a:rPr lang="en-LK" sz="900" dirty="0"/>
+              <a:t>            torch.tensor(x, dtype=torch.long),</a:t>
+            </a:r>
+          </a:p>
+          <a:p>
+            <a:r>
+              <a:rPr lang="en-LK" sz="900" dirty="0"/>
+              <a:t>            torch.tensor(labels, dtype=torch.long)</a:t>
+            </a:r>
+          </a:p>
+          <a:p>
+            <a:r>
+              <a:rPr lang="en-LK" sz="900" dirty="0"/>
+              <a:t>        )</a:t>
             </a:r>
           </a:p>
         </p:txBody>
@@ -6456,7 +6311,7 @@
     </p:spTree>
     <p:extLst>
       <p:ext uri="{BB962C8B-B14F-4D97-AF65-F5344CB8AC3E}">
-        <p14:creationId xmlns:p14="http://schemas.microsoft.com/office/powerpoint/2010/main" val="3336233075"/>
+        <p14:creationId xmlns:p14="http://schemas.microsoft.com/office/powerpoint/2010/main" val="3462763545"/>
       </p:ext>
     </p:extLst>
   </p:cSld>
@@ -6485,10 +6340,10 @@
       </p:grpSpPr>
       <p:sp>
         <p:nvSpPr>
-          <p:cNvPr id="4" name="TextBox 3">
-            <a:extLst>
-              <a:ext uri="{FF2B5EF4-FFF2-40B4-BE49-F238E27FC236}">
-                <a16:creationId xmlns:a16="http://schemas.microsoft.com/office/drawing/2014/main" id="{844D67CC-80ED-A82E-BB67-6C67CFC37DD1}"/>
+          <p:cNvPr id="6" name="TextBox 5">
+            <a:extLst>
+              <a:ext uri="{FF2B5EF4-FFF2-40B4-BE49-F238E27FC236}">
+                <a16:creationId xmlns:a16="http://schemas.microsoft.com/office/drawing/2014/main" id="{C9CE574C-AEB6-E784-D75D-2BF1D3942C5B}"/>
               </a:ext>
             </a:extLst>
           </p:cNvPr>
@@ -6497,8 +6352,8 @@
         </p:nvSpPr>
         <p:spPr>
           <a:xfrm>
-            <a:off x="438000" y="0"/>
-            <a:ext cx="10697021" cy="5940088"/>
+            <a:off x="228599" y="0"/>
+            <a:ext cx="12826218" cy="5632311"/>
           </a:xfrm>
           <a:prstGeom prst="rect">
             <a:avLst/>
@@ -6519,25 +6374,13 @@
           <a:p>
             <a:r>
               <a:rPr lang="en-LK" sz="1000" dirty="0"/>
-              <a:t>def train():</a:t>
-            </a:r>
-          </a:p>
-          <a:p>
-            <a:r>
-              <a:rPr lang="en-LK" sz="1000" dirty="0"/>
-              <a:t>    model.train()</a:t>
-            </a:r>
-          </a:p>
-          <a:p>
-            <a:r>
-              <a:rPr lang="en-LK" sz="1000" dirty="0"/>
-              <a:t>    step = 0</a:t>
-            </a:r>
-          </a:p>
-          <a:p>
-            <a:r>
-              <a:rPr lang="en-LK" sz="1000" dirty="0"/>
-              <a:t>    start_time = time.time()</a:t>
+              <a:t>def get_loader(path, tokenizer, seq_len, batch_size):</a:t>
+            </a:r>
+          </a:p>
+          <a:p>
+            <a:r>
+              <a:rPr lang="en-LK" sz="1000" dirty="0"/>
+              <a:t>    dataset = SFTDataset(path, tokenizer, seq_len)</a:t>
             </a:r>
           </a:p>
           <a:p>
@@ -6546,37 +6389,115 @@
           <a:p>
             <a:r>
               <a:rPr lang="en-LK" sz="1000" dirty="0"/>
-              <a:t>    for epoch in range(1000):</a:t>
-            </a:r>
-          </a:p>
-          <a:p>
-            <a:r>
-              <a:rPr lang="en-LK" sz="1000" dirty="0"/>
-              <a:t>        for x, y in loader:</a:t>
+              <a:t>    return DataLoader(</a:t>
+            </a:r>
+          </a:p>
+          <a:p>
+            <a:r>
+              <a:rPr lang="en-LK" sz="1000" dirty="0"/>
+              <a:t>        dataset,</a:t>
+            </a:r>
+          </a:p>
+          <a:p>
+            <a:r>
+              <a:rPr lang="en-LK" sz="1000" dirty="0"/>
+              <a:t>        batch_size=batch_size,</a:t>
+            </a:r>
+          </a:p>
+          <a:p>
+            <a:r>
+              <a:rPr lang="en-LK" sz="1000" dirty="0"/>
+              <a:t>        shuffle=True,</a:t>
+            </a:r>
+          </a:p>
+          <a:p>
+            <a:r>
+              <a:rPr lang="en-LK" sz="1000" dirty="0"/>
+              <a:t>        drop_last=True</a:t>
+            </a:r>
+          </a:p>
+          <a:p>
+            <a:r>
+              <a:rPr lang="en-LK" sz="1000" dirty="0"/>
+              <a:t>    )</a:t>
             </a:r>
           </a:p>
           <a:p>
             <a:endParaRPr lang="en-LK" sz="1000" dirty="0"/>
           </a:p>
           <a:p>
-            <a:r>
-              <a:rPr lang="en-LK" sz="1000" dirty="0"/>
-              <a:t>            x = x.to(device)</a:t>
-            </a:r>
-          </a:p>
-          <a:p>
-            <a:r>
-              <a:rPr lang="en-LK" sz="1000" dirty="0"/>
-              <a:t>            y = y.to(device)</a:t>
-            </a:r>
-          </a:p>
-          <a:p>
             <a:endParaRPr lang="en-LK" sz="1000" dirty="0"/>
           </a:p>
           <a:p>
             <a:r>
               <a:rPr lang="en-LK" sz="1000" dirty="0"/>
-              <a:t>            logits = model(x)</a:t>
+              <a:t>cfg = GPTConfig(</a:t>
+            </a:r>
+          </a:p>
+          <a:p>
+            <a:r>
+              <a:rPr lang="en-LK" sz="1000" dirty="0"/>
+              <a:t>    vocab_size = 50257,</a:t>
+            </a:r>
+          </a:p>
+          <a:p>
+            <a:r>
+              <a:rPr lang="en-LK" sz="1000" dirty="0"/>
+              <a:t>    seq_len    = 128,</a:t>
+            </a:r>
+          </a:p>
+          <a:p>
+            <a:r>
+              <a:rPr lang="en-LK" sz="1000" dirty="0"/>
+              <a:t>    d_model    = 128,</a:t>
+            </a:r>
+          </a:p>
+          <a:p>
+            <a:r>
+              <a:rPr lang="en-LK" sz="1000" dirty="0"/>
+              <a:t>    n_heads    = 8,</a:t>
+            </a:r>
+          </a:p>
+          <a:p>
+            <a:r>
+              <a:rPr lang="en-LK" sz="1000" dirty="0"/>
+              <a:t>    n_layers   = 4,</a:t>
+            </a:r>
+          </a:p>
+          <a:p>
+            <a:r>
+              <a:rPr lang="en-LK" sz="1000" dirty="0"/>
+              <a:t>    d_ff       = 512,</a:t>
+            </a:r>
+          </a:p>
+          <a:p>
+            <a:r>
+              <a:rPr lang="en-LK" sz="1000" dirty="0"/>
+              <a:t>    dropout    = 0.1,</a:t>
+            </a:r>
+          </a:p>
+          <a:p>
+            <a:r>
+              <a:rPr lang="en-LK" sz="1000" dirty="0"/>
+              <a:t>    batch_size = 16,</a:t>
+            </a:r>
+          </a:p>
+          <a:p>
+            <a:r>
+              <a:rPr lang="en-LK" sz="1000" dirty="0"/>
+              <a:t>    lr         = 8e-3,</a:t>
+            </a:r>
+          </a:p>
+          <a:p>
+            <a:r>
+              <a:rPr lang="en-LK" sz="1000" dirty="0"/>
+              <a:t>    max_iters  = 10000,</a:t>
+            </a:r>
+          </a:p>
+          <a:p>
+            <a:r>
+              <a:rPr lang="en-LK" sz="1000" dirty="0"/>
+              <a:t>)</a:t>
             </a:r>
           </a:p>
           <a:p>
@@ -6585,31 +6506,7 @@
           <a:p>
             <a:r>
               <a:rPr lang="en-LK" sz="1000" dirty="0"/>
-              <a:t>            loss = F.cross_entropy(</a:t>
-            </a:r>
-          </a:p>
-          <a:p>
-            <a:r>
-              <a:rPr lang="en-LK" sz="1000" dirty="0"/>
-              <a:t>                logits.view(-1, logits.size(-1)),</a:t>
-            </a:r>
-          </a:p>
-          <a:p>
-            <a:r>
-              <a:rPr lang="en-LK" sz="1000" dirty="0"/>
-              <a:t>                y.view(-1),</a:t>
-            </a:r>
-          </a:p>
-          <a:p>
-            <a:r>
-              <a:rPr lang="en-LK" sz="1000" dirty="0"/>
-              <a:t>                ignore_index=-100</a:t>
-            </a:r>
-          </a:p>
-          <a:p>
-            <a:r>
-              <a:rPr lang="en-LK" sz="1000" dirty="0"/>
-              <a:t>            )</a:t>
+              <a:t>device = cfg.device</a:t>
             </a:r>
           </a:p>
           <a:p>
@@ -6618,13 +6515,7 @@
           <a:p>
             <a:r>
               <a:rPr lang="en-LK" sz="1000" dirty="0"/>
-              <a:t>            optimizer.zero_grad()</a:t>
-            </a:r>
-          </a:p>
-          <a:p>
-            <a:r>
-              <a:rPr lang="en-LK" sz="1000" dirty="0"/>
-              <a:t>            loss.backward()</a:t>
+              <a:t>tokenizer = Tokenizer()</a:t>
             </a:r>
           </a:p>
           <a:p>
@@ -6633,7 +6524,7 @@
           <a:p>
             <a:r>
               <a:rPr lang="en-LK" sz="1000" dirty="0"/>
-              <a:t>            torch.nn.utils.clip_grad_norm_(model.parameters(), 1.0)</a:t>
+              <a:t>model = GPT(cfg).to(device)</a:t>
             </a:r>
           </a:p>
           <a:p>
@@ -6642,56 +6533,20 @@
           <a:p>
             <a:r>
               <a:rPr lang="en-LK" sz="1000" dirty="0"/>
-              <a:t>            optimizer.step()</a:t>
-            </a:r>
-          </a:p>
-          <a:p>
-            <a:endParaRPr lang="en-LK" sz="1000" dirty="0"/>
-          </a:p>
-          <a:p>
-            <a:r>
-              <a:rPr lang="en-LK" sz="1000" dirty="0"/>
-              <a:t>            step += 1</a:t>
-            </a:r>
-          </a:p>
-          <a:p>
-            <a:endParaRPr lang="en-LK" sz="1000" dirty="0"/>
-          </a:p>
-          <a:p>
-            <a:r>
-              <a:rPr lang="en-LK" sz="1000" dirty="0"/>
-              <a:t>            if step % 10 == 0:</a:t>
-            </a:r>
-          </a:p>
-          <a:p>
-            <a:r>
-              <a:rPr lang="en-LK" sz="1000" dirty="0"/>
-              <a:t>                elapsed = time.time() - start_time</a:t>
-            </a:r>
-          </a:p>
-          <a:p>
-            <a:r>
-              <a:rPr lang="en-LK" sz="1000" dirty="0"/>
-              <a:t>                print(f"Step {step} | Loss: {loss.item():.4f} | Time: {elapsed:.2f}s")</a:t>
-            </a:r>
-          </a:p>
-          <a:p>
-            <a:endParaRPr lang="en-LK" sz="1000" dirty="0"/>
-          </a:p>
-          <a:p>
-            <a:r>
-              <a:rPr lang="en-LK" sz="1000" dirty="0"/>
-              <a:t>            if step % 200 == 0:</a:t>
-            </a:r>
-          </a:p>
-          <a:p>
-            <a:r>
-              <a:rPr lang="en-LK" sz="1000" dirty="0"/>
-              <a:t>                save_checkpoint(step)</a:t>
-            </a:r>
-          </a:p>
-          <a:p>
-            <a:endParaRPr lang="en-LK" sz="1000" dirty="0"/>
+              <a:t>ckpt = torch.load("checkpoints/gpt_step_6000.pt", map_location=device)</a:t>
+            </a:r>
+          </a:p>
+          <a:p>
+            <a:r>
+              <a:rPr lang="en-LK" sz="1000" dirty="0"/>
+              <a:t>model.load_state_dict(ckpt["model"])</a:t>
+            </a:r>
+          </a:p>
+          <a:p>
+            <a:r>
+              <a:rPr lang="en-LK" sz="1000" dirty="0"/>
+              <a:t>print("Loaded pretrained model")</a:t>
+            </a:r>
           </a:p>
           <a:p>
             <a:endParaRPr lang="en-LK" sz="1000" dirty="0"/>
@@ -6700,10 +6555,10 @@
       </p:sp>
       <p:sp>
         <p:nvSpPr>
-          <p:cNvPr id="6" name="TextBox 5">
-            <a:extLst>
-              <a:ext uri="{FF2B5EF4-FFF2-40B4-BE49-F238E27FC236}">
-                <a16:creationId xmlns:a16="http://schemas.microsoft.com/office/drawing/2014/main" id="{7290FD2D-A1A8-408F-E94A-CF961C007FF5}"/>
+          <p:cNvPr id="9" name="TextBox 8">
+            <a:extLst>
+              <a:ext uri="{FF2B5EF4-FFF2-40B4-BE49-F238E27FC236}">
+                <a16:creationId xmlns:a16="http://schemas.microsoft.com/office/drawing/2014/main" id="{C5041B14-51DE-F3F2-B134-D312FBEFAFCA}"/>
               </a:ext>
             </a:extLst>
           </p:cNvPr>
@@ -6712,8 +6567,8 @@
         </p:nvSpPr>
         <p:spPr>
           <a:xfrm>
-            <a:off x="5786510" y="390104"/>
-            <a:ext cx="6098344" cy="2092881"/>
+            <a:off x="5077707" y="186342"/>
+            <a:ext cx="6956474" cy="2246769"/>
           </a:xfrm>
           <a:prstGeom prst="rect">
             <a:avLst/>
@@ -6726,72 +6581,81 @@
           </a:bodyPr>
           <a:lstStyle/>
           <a:p>
-            <a:r>
-              <a:rPr lang="en-LK" sz="1000" dirty="0"/>
-              <a:t>def save_checkpoint(step):</a:t>
-            </a:r>
-          </a:p>
-          <a:p>
-            <a:r>
-              <a:rPr lang="en-LK" sz="1000" dirty="0"/>
-              <a:t>    os.makedirs("checkpoints", exist_ok=True)</a:t>
-            </a:r>
-          </a:p>
-          <a:p>
             <a:endParaRPr lang="en-LK" sz="1000" dirty="0"/>
           </a:p>
           <a:p>
             <a:r>
               <a:rPr lang="en-LK" sz="1000" dirty="0"/>
-              <a:t>    torch.save({</a:t>
-            </a:r>
-          </a:p>
-          <a:p>
-            <a:r>
-              <a:rPr lang="en-LK" sz="1000" dirty="0"/>
-              <a:t>        "model": model.state_dict(),</a:t>
-            </a:r>
-          </a:p>
-          <a:p>
-            <a:r>
-              <a:rPr lang="en-LK" sz="1000" dirty="0"/>
-              <a:t>        "optimizer": optimizer.state_dict(),</a:t>
-            </a:r>
-          </a:p>
-          <a:p>
-            <a:r>
-              <a:rPr lang="en-LK" sz="1000" dirty="0"/>
-              <a:t>        "step": step,</a:t>
-            </a:r>
-          </a:p>
-          <a:p>
-            <a:r>
-              <a:rPr lang="en-LK" sz="1000" dirty="0"/>
-              <a:t>        "config": cfg.__dict__,</a:t>
-            </a:r>
-          </a:p>
-          <a:p>
-            <a:r>
-              <a:rPr lang="en-LK" sz="1000" dirty="0"/>
-              <a:t>    }, f"checkpoints/sft_step_{step}.pt")</a:t>
+              <a:t>optimizer = torch.optim.AdamW(</a:t>
+            </a:r>
+          </a:p>
+          <a:p>
+            <a:r>
+              <a:rPr lang="en-LK" sz="1000" dirty="0"/>
+              <a:t>    model.parameters(),</a:t>
+            </a:r>
+          </a:p>
+          <a:p>
+            <a:r>
+              <a:rPr lang="en-LK" sz="1000" dirty="0"/>
+              <a:t>    lr=cfg.lr,</a:t>
+            </a:r>
+          </a:p>
+          <a:p>
+            <a:r>
+              <a:rPr lang="en-LK" sz="1000" dirty="0"/>
+              <a:t>    weight_decay=0.1,</a:t>
+            </a:r>
+          </a:p>
+          <a:p>
+            <a:r>
+              <a:rPr lang="en-LK" sz="1000" dirty="0"/>
+              <a:t>    betas=(0.9, 0.95),</a:t>
+            </a:r>
+          </a:p>
+          <a:p>
+            <a:r>
+              <a:rPr lang="en-LK" sz="1000" dirty="0"/>
+              <a:t>)</a:t>
             </a:r>
           </a:p>
           <a:p>
             <a:endParaRPr lang="en-LK" sz="1000" dirty="0"/>
           </a:p>
           <a:p>
-            <a:endParaRPr lang="en-LK" sz="1000" dirty="0"/>
-          </a:p>
-          <a:p>
-            <a:r>
-              <a:rPr lang="en-LK" sz="1000" dirty="0"/>
-              <a:t>if __name__ == "__main__":</a:t>
-            </a:r>
-          </a:p>
-          <a:p>
-            <a:r>
-              <a:rPr lang="en-LK" sz="1000" dirty="0"/>
-              <a:t>    train()</a:t>
+            <a:r>
+              <a:rPr lang="en-LK" sz="1000" dirty="0"/>
+              <a:t>loader = get_loader(</a:t>
+            </a:r>
+          </a:p>
+          <a:p>
+            <a:r>
+              <a:rPr lang="en-LK" sz="1000" dirty="0"/>
+              <a:t>    "sft_data.jsonl",</a:t>
+            </a:r>
+          </a:p>
+          <a:p>
+            <a:r>
+              <a:rPr lang="en-LK" sz="1000" dirty="0"/>
+              <a:t>    tokenizer,</a:t>
+            </a:r>
+          </a:p>
+          <a:p>
+            <a:r>
+              <a:rPr lang="en-LK" sz="1000" dirty="0"/>
+              <a:t>    cfg.seq_len,</a:t>
+            </a:r>
+          </a:p>
+          <a:p>
+            <a:r>
+              <a:rPr lang="en-LK" sz="1000" dirty="0"/>
+              <a:t>    cfg.batch_size</a:t>
+            </a:r>
+          </a:p>
+          <a:p>
+            <a:r>
+              <a:rPr lang="en-LK" sz="1000" dirty="0"/>
+              <a:t>)</a:t>
             </a:r>
           </a:p>
         </p:txBody>
@@ -6799,7 +6663,7 @@
     </p:spTree>
     <p:extLst>
       <p:ext uri="{BB962C8B-B14F-4D97-AF65-F5344CB8AC3E}">
-        <p14:creationId xmlns:p14="http://schemas.microsoft.com/office/powerpoint/2010/main" val="353873191"/>
+        <p14:creationId xmlns:p14="http://schemas.microsoft.com/office/powerpoint/2010/main" val="3336233075"/>
       </p:ext>
     </p:extLst>
   </p:cSld>
@@ -6831,7 +6695,7 @@
           <p:cNvPr id="4" name="TextBox 3">
             <a:extLst>
               <a:ext uri="{FF2B5EF4-FFF2-40B4-BE49-F238E27FC236}">
-                <a16:creationId xmlns:a16="http://schemas.microsoft.com/office/drawing/2014/main" id="{DCF2F77B-F423-E120-88BA-D5FE919FE26F}"/>
+                <a16:creationId xmlns:a16="http://schemas.microsoft.com/office/drawing/2014/main" id="{844D67CC-80ED-A82E-BB67-6C67CFC37DD1}"/>
               </a:ext>
             </a:extLst>
           </p:cNvPr>
@@ -6840,47 +6704,8 @@
         </p:nvSpPr>
         <p:spPr>
           <a:xfrm>
-            <a:off x="702527" y="178420"/>
-            <a:ext cx="966418" cy="369332"/>
-          </a:xfrm>
-          <a:prstGeom prst="rect">
-            <a:avLst/>
-          </a:prstGeom>
-          <a:noFill/>
-        </p:spPr>
-        <p:txBody>
-          <a:bodyPr wrap="none" rtlCol="0">
-            <a:spAutoFit/>
-          </a:bodyPr>
-          <a:lstStyle/>
-          <a:p>
-            <a:r>
-              <a:rPr lang="en-GB" b="1" dirty="0"/>
-              <a:t>c</a:t>
-            </a:r>
-            <a:r>
-              <a:rPr lang="en-LK" b="1" dirty="0"/>
-              <a:t>hat.py</a:t>
-            </a:r>
-          </a:p>
-        </p:txBody>
-      </p:sp>
-      <p:sp>
-        <p:nvSpPr>
-          <p:cNvPr id="6" name="TextBox 5">
-            <a:extLst>
-              <a:ext uri="{FF2B5EF4-FFF2-40B4-BE49-F238E27FC236}">
-                <a16:creationId xmlns:a16="http://schemas.microsoft.com/office/drawing/2014/main" id="{A51D5CE2-387D-32E9-6291-E84EFEDC8677}"/>
-              </a:ext>
-            </a:extLst>
-          </p:cNvPr>
-          <p:cNvSpPr txBox="1"/>
-          <p:nvPr/>
-        </p:nvSpPr>
-        <p:spPr>
-          <a:xfrm>
-            <a:off x="702526" y="769434"/>
-            <a:ext cx="8675649" cy="3785652"/>
+            <a:off x="438000" y="0"/>
+            <a:ext cx="10697021" cy="5940088"/>
           </a:xfrm>
           <a:prstGeom prst="rect">
             <a:avLst/>
@@ -6893,69 +6718,63 @@
           </a:bodyPr>
           <a:lstStyle/>
           <a:p>
-            <a:r>
-              <a:rPr lang="en-LK" sz="1000" dirty="0"/>
-              <a:t>import torch</a:t>
-            </a:r>
-          </a:p>
-          <a:p>
-            <a:r>
-              <a:rPr lang="en-LK" sz="1000" dirty="0"/>
-              <a:t>import torch.nn.functional as F</a:t>
-            </a:r>
-          </a:p>
-          <a:p>
             <a:endParaRPr lang="en-LK" sz="1000" dirty="0"/>
           </a:p>
           <a:p>
-            <a:r>
-              <a:rPr lang="en-LK" sz="1000" dirty="0"/>
-              <a:t>from config import GPTConfig</a:t>
-            </a:r>
-          </a:p>
-          <a:p>
-            <a:r>
-              <a:rPr lang="en-LK" sz="1000" dirty="0"/>
-              <a:t>from model import GPT</a:t>
-            </a:r>
-          </a:p>
-          <a:p>
-            <a:r>
-              <a:rPr lang="en-LK" sz="1000" dirty="0"/>
-              <a:t>from tokenizer import Tokenizer</a:t>
-            </a:r>
-          </a:p>
-          <a:p>
             <a:endParaRPr lang="en-LK" sz="1000" dirty="0"/>
           </a:p>
           <a:p>
             <a:r>
               <a:rPr lang="en-LK" sz="1000" dirty="0"/>
-              <a:t>device = "cuda" if torch.cuda.is_available() else "cpu"</a:t>
-            </a:r>
-          </a:p>
-          <a:p>
-            <a:r>
-              <a:rPr lang="en-LK" sz="1000" dirty="0"/>
-              <a:t>tokenizer = Tokenizer()</a:t>
+              <a:t>def train():</a:t>
+            </a:r>
+          </a:p>
+          <a:p>
+            <a:r>
+              <a:rPr lang="en-LK" sz="1000" dirty="0"/>
+              <a:t>    model.train()</a:t>
+            </a:r>
+          </a:p>
+          <a:p>
+            <a:r>
+              <a:rPr lang="en-LK" sz="1000" dirty="0"/>
+              <a:t>    step = 0</a:t>
+            </a:r>
+          </a:p>
+          <a:p>
+            <a:r>
+              <a:rPr lang="en-LK" sz="1000" dirty="0"/>
+              <a:t>    start_time = time.time()</a:t>
             </a:r>
           </a:p>
           <a:p>
             <a:endParaRPr lang="en-LK" sz="1000" dirty="0"/>
           </a:p>
           <a:p>
+            <a:r>
+              <a:rPr lang="en-LK" sz="1000" dirty="0"/>
+              <a:t>    for epoch in range(1000):</a:t>
+            </a:r>
+          </a:p>
+          <a:p>
+            <a:r>
+              <a:rPr lang="en-LK" sz="1000" dirty="0"/>
+              <a:t>        for x, y in loader:</a:t>
+            </a:r>
+          </a:p>
+          <a:p>
             <a:endParaRPr lang="en-LK" sz="1000" dirty="0"/>
           </a:p>
           <a:p>
             <a:r>
               <a:rPr lang="en-LK" sz="1000" dirty="0"/>
-              <a:t>def load_model(ckpt_path):</a:t>
-            </a:r>
-          </a:p>
-          <a:p>
-            <a:r>
-              <a:rPr lang="en-LK" sz="1000" dirty="0"/>
-              <a:t>    ckpt = torch.load(ckpt_path, map_location=device)</a:t>
+              <a:t>            x = x.to(device)</a:t>
+            </a:r>
+          </a:p>
+          <a:p>
+            <a:r>
+              <a:rPr lang="en-LK" sz="1000" dirty="0"/>
+              <a:t>            y = y.to(device)</a:t>
             </a:r>
           </a:p>
           <a:p>
@@ -6964,19 +6783,7 @@
           <a:p>
             <a:r>
               <a:rPr lang="en-LK" sz="1000" dirty="0"/>
-              <a:t>    cfg = GPTConfig(**ckpt["config"])</a:t>
-            </a:r>
-          </a:p>
-          <a:p>
-            <a:r>
-              <a:rPr lang="en-LK" sz="1000" dirty="0"/>
-              <a:t>    model = GPT(cfg).to(device)</a:t>
-            </a:r>
-          </a:p>
-          <a:p>
-            <a:r>
-              <a:rPr lang="en-LK" sz="1000" dirty="0"/>
-              <a:t>    model.load_state_dict(ckpt["model"])</a:t>
+              <a:t>            logits = model(x)</a:t>
             </a:r>
           </a:p>
           <a:p>
@@ -6985,20 +6792,110 @@
           <a:p>
             <a:r>
               <a:rPr lang="en-LK" sz="1000" dirty="0"/>
-              <a:t>    model.eval()</a:t>
-            </a:r>
-          </a:p>
-          <a:p>
-            <a:r>
-              <a:rPr lang="en-LK" sz="1000" dirty="0"/>
-              <a:t>    return model, cfg</a:t>
+              <a:t>            loss = F.cross_entropy(</a:t>
+            </a:r>
+          </a:p>
+          <a:p>
+            <a:r>
+              <a:rPr lang="en-LK" sz="1000" dirty="0"/>
+              <a:t>                logits.view(-1, logits.size(-1)),</a:t>
+            </a:r>
+          </a:p>
+          <a:p>
+            <a:r>
+              <a:rPr lang="en-LK" sz="1000" dirty="0"/>
+              <a:t>                y.view(-1),</a:t>
+            </a:r>
+          </a:p>
+          <a:p>
+            <a:r>
+              <a:rPr lang="en-LK" sz="1000" dirty="0"/>
+              <a:t>                ignore_index=-100</a:t>
+            </a:r>
+          </a:p>
+          <a:p>
+            <a:r>
+              <a:rPr lang="en-LK" sz="1000" dirty="0"/>
+              <a:t>            )</a:t>
             </a:r>
           </a:p>
           <a:p>
             <a:endParaRPr lang="en-LK" sz="1000" dirty="0"/>
           </a:p>
           <a:p>
+            <a:r>
+              <a:rPr lang="en-LK" sz="1000" dirty="0"/>
+              <a:t>            optimizer.zero_grad()</a:t>
+            </a:r>
+          </a:p>
+          <a:p>
+            <a:r>
+              <a:rPr lang="en-LK" sz="1000" dirty="0"/>
+              <a:t>            loss.backward()</a:t>
+            </a:r>
+          </a:p>
+          <a:p>
             <a:endParaRPr lang="en-LK" sz="1000" dirty="0"/>
+          </a:p>
+          <a:p>
+            <a:r>
+              <a:rPr lang="en-LK" sz="1000" dirty="0"/>
+              <a:t>            torch.nn.utils.clip_grad_norm_(model.parameters(), 1.0)</a:t>
+            </a:r>
+          </a:p>
+          <a:p>
+            <a:endParaRPr lang="en-LK" sz="1000" dirty="0"/>
+          </a:p>
+          <a:p>
+            <a:r>
+              <a:rPr lang="en-LK" sz="1000" dirty="0"/>
+              <a:t>            optimizer.step()</a:t>
+            </a:r>
+          </a:p>
+          <a:p>
+            <a:endParaRPr lang="en-LK" sz="1000" dirty="0"/>
+          </a:p>
+          <a:p>
+            <a:r>
+              <a:rPr lang="en-LK" sz="1000" dirty="0"/>
+              <a:t>            step += 1</a:t>
+            </a:r>
+          </a:p>
+          <a:p>
+            <a:endParaRPr lang="en-LK" sz="1000" dirty="0"/>
+          </a:p>
+          <a:p>
+            <a:r>
+              <a:rPr lang="en-LK" sz="1000" dirty="0"/>
+              <a:t>            if step % 10 == 0:</a:t>
+            </a:r>
+          </a:p>
+          <a:p>
+            <a:r>
+              <a:rPr lang="en-LK" sz="1000" dirty="0"/>
+              <a:t>                elapsed = time.time() - start_time</a:t>
+            </a:r>
+          </a:p>
+          <a:p>
+            <a:r>
+              <a:rPr lang="en-LK" sz="1000" dirty="0"/>
+              <a:t>                print(f"Step {step} | Loss: {loss.item():.4f} | Time: {elapsed:.2f}s")</a:t>
+            </a:r>
+          </a:p>
+          <a:p>
+            <a:endParaRPr lang="en-LK" sz="1000" dirty="0"/>
+          </a:p>
+          <a:p>
+            <a:r>
+              <a:rPr lang="en-LK" sz="1000" dirty="0"/>
+              <a:t>            if step % 200 == 0:</a:t>
+            </a:r>
+          </a:p>
+          <a:p>
+            <a:r>
+              <a:rPr lang="en-LK" sz="1000" dirty="0"/>
+              <a:t>                save_checkpoint(step)</a:t>
+            </a:r>
           </a:p>
           <a:p>
             <a:endParaRPr lang="en-LK" sz="1000" dirty="0"/>
@@ -7010,10 +6907,10 @@
       </p:sp>
       <p:sp>
         <p:nvSpPr>
-          <p:cNvPr id="8" name="TextBox 7">
-            <a:extLst>
-              <a:ext uri="{FF2B5EF4-FFF2-40B4-BE49-F238E27FC236}">
-                <a16:creationId xmlns:a16="http://schemas.microsoft.com/office/drawing/2014/main" id="{63485BA7-C10A-0FF5-B544-2D017D7BCE4E}"/>
+          <p:cNvPr id="6" name="TextBox 5">
+            <a:extLst>
+              <a:ext uri="{FF2B5EF4-FFF2-40B4-BE49-F238E27FC236}">
+                <a16:creationId xmlns:a16="http://schemas.microsoft.com/office/drawing/2014/main" id="{7290FD2D-A1A8-408F-E94A-CF961C007FF5}"/>
               </a:ext>
             </a:extLst>
           </p:cNvPr>
@@ -7022,8 +6919,8 @@
         </p:nvSpPr>
         <p:spPr>
           <a:xfrm>
-            <a:off x="5040350" y="871765"/>
-            <a:ext cx="6099716" cy="4401205"/>
+            <a:off x="5786510" y="390104"/>
+            <a:ext cx="6098344" cy="2092881"/>
           </a:xfrm>
           <a:prstGeom prst="rect">
             <a:avLst/>
@@ -7038,13 +6935,13 @@
           <a:p>
             <a:r>
               <a:rPr lang="en-LK" sz="1000" dirty="0"/>
-              <a:t>@torch.no_grad()</a:t>
-            </a:r>
-          </a:p>
-          <a:p>
-            <a:r>
-              <a:rPr lang="en-LK" sz="1000" dirty="0"/>
-              <a:t>def generate(model, idx, cfg, max_new_tokens=100, temperature=0.8, top_k=50):</a:t>
+              <a:t>def save_checkpoint(step):</a:t>
+            </a:r>
+          </a:p>
+          <a:p>
+            <a:r>
+              <a:rPr lang="en-LK" sz="1000" dirty="0"/>
+              <a:t>    os.makedirs("checkpoints", exist_ok=True)</a:t>
             </a:r>
           </a:p>
           <a:p>
@@ -7053,127 +6950,55 @@
           <a:p>
             <a:r>
               <a:rPr lang="en-LK" sz="1000" dirty="0"/>
-              <a:t>    for _ in range(max_new_tokens):</a:t>
+              <a:t>    torch.save({</a:t>
+            </a:r>
+          </a:p>
+          <a:p>
+            <a:r>
+              <a:rPr lang="en-LK" sz="1000" dirty="0"/>
+              <a:t>        "model": model.state_dict(),</a:t>
+            </a:r>
+          </a:p>
+          <a:p>
+            <a:r>
+              <a:rPr lang="en-LK" sz="1000" dirty="0"/>
+              <a:t>        "optimizer": optimizer.state_dict(),</a:t>
+            </a:r>
+          </a:p>
+          <a:p>
+            <a:r>
+              <a:rPr lang="en-LK" sz="1000" dirty="0"/>
+              <a:t>        "step": step,</a:t>
+            </a:r>
+          </a:p>
+          <a:p>
+            <a:r>
+              <a:rPr lang="en-LK" sz="1000" dirty="0"/>
+              <a:t>        "config": cfg.__dict__,</a:t>
+            </a:r>
+          </a:p>
+          <a:p>
+            <a:r>
+              <a:rPr lang="en-LK" sz="1000" dirty="0"/>
+              <a:t>    }, f"checkpoints/sft_step_{step}.pt")</a:t>
             </a:r>
           </a:p>
           <a:p>
             <a:endParaRPr lang="en-LK" sz="1000" dirty="0"/>
           </a:p>
           <a:p>
-            <a:r>
-              <a:rPr lang="en-LK" sz="1000" dirty="0"/>
-              <a:t>        idx_cond = idx[:, -cfg.seq_len:]</a:t>
-            </a:r>
-          </a:p>
-          <a:p>
             <a:endParaRPr lang="en-LK" sz="1000" dirty="0"/>
           </a:p>
           <a:p>
             <a:r>
               <a:rPr lang="en-LK" sz="1000" dirty="0"/>
-              <a:t>        logits = model(idx_cond)</a:t>
-            </a:r>
-          </a:p>
-          <a:p>
-            <a:r>
-              <a:rPr lang="en-LK" sz="1000" dirty="0"/>
-              <a:t>        logits = logits[:, -1, :]</a:t>
-            </a:r>
-          </a:p>
-          <a:p>
-            <a:endParaRPr lang="en-LK" sz="1000" dirty="0"/>
-          </a:p>
-          <a:p>
-            <a:r>
-              <a:rPr lang="en-LK" sz="1000" dirty="0"/>
-              <a:t>        logits = logits / temperature</a:t>
-            </a:r>
-          </a:p>
-          <a:p>
-            <a:endParaRPr lang="en-LK" sz="1000" dirty="0"/>
-          </a:p>
-          <a:p>
-            <a:r>
-              <a:rPr lang="en-LK" sz="1000" dirty="0"/>
-              <a:t>        if top_k is not None:</a:t>
-            </a:r>
-          </a:p>
-          <a:p>
-            <a:r>
-              <a:rPr lang="en-LK" sz="1000" dirty="0"/>
-              <a:t>            v, _ = torch.topk(logits, top_k)</a:t>
-            </a:r>
-          </a:p>
-          <a:p>
-            <a:r>
-              <a:rPr lang="en-LK" sz="1000" dirty="0"/>
-              <a:t>            cutoff = v[:, -1].unsqueeze(-1)</a:t>
-            </a:r>
-          </a:p>
-          <a:p>
-            <a:r>
-              <a:rPr lang="en-LK" sz="1000" dirty="0"/>
-              <a:t>            logits = torch.where(</a:t>
-            </a:r>
-          </a:p>
-          <a:p>
-            <a:r>
-              <a:rPr lang="en-LK" sz="1000" dirty="0"/>
-              <a:t>                logits &lt; cutoff,</a:t>
-            </a:r>
-          </a:p>
-          <a:p>
-            <a:r>
-              <a:rPr lang="en-LK" sz="1000" dirty="0"/>
-              <a:t>                torch.full_like(logits, -float("inf")),</a:t>
-            </a:r>
-          </a:p>
-          <a:p>
-            <a:r>
-              <a:rPr lang="en-LK" sz="1000" dirty="0"/>
-              <a:t>                logits</a:t>
-            </a:r>
-          </a:p>
-          <a:p>
-            <a:r>
-              <a:rPr lang="en-LK" sz="1000" dirty="0"/>
-              <a:t>            )</a:t>
-            </a:r>
-          </a:p>
-          <a:p>
-            <a:endParaRPr lang="en-LK" sz="1000" dirty="0"/>
-          </a:p>
-          <a:p>
-            <a:r>
-              <a:rPr lang="en-LK" sz="1000" dirty="0"/>
-              <a:t>        probs = F.softmax(logits, dim=-1)</a:t>
-            </a:r>
-          </a:p>
-          <a:p>
-            <a:endParaRPr lang="en-LK" sz="1000" dirty="0"/>
-          </a:p>
-          <a:p>
-            <a:r>
-              <a:rPr lang="en-LK" sz="1000" dirty="0"/>
-              <a:t>        next_token = torch.multinomial(probs, num_samples=1)</a:t>
-            </a:r>
-          </a:p>
-          <a:p>
-            <a:endParaRPr lang="en-LK" sz="1000" dirty="0"/>
-          </a:p>
-          <a:p>
-            <a:r>
-              <a:rPr lang="en-LK" sz="1000" dirty="0"/>
-              <a:t>        idx = torch.cat((idx, next_token), dim=1)</a:t>
-            </a:r>
-          </a:p>
-          <a:p>
-            <a:endParaRPr lang="en-LK" sz="1000" dirty="0"/>
-          </a:p>
-          <a:p>
-            <a:r>
-              <a:rPr lang="en-LK" sz="1000" dirty="0"/>
-              <a:t>    return idx</a:t>
+              <a:t>if __name__ == "__main__":</a:t>
+            </a:r>
+          </a:p>
+          <a:p>
+            <a:r>
+              <a:rPr lang="en-LK" sz="1000" dirty="0"/>
+              <a:t>    train()</a:t>
             </a:r>
           </a:p>
         </p:txBody>
@@ -7181,7 +7006,7 @@
     </p:spTree>
     <p:extLst>
       <p:ext uri="{BB962C8B-B14F-4D97-AF65-F5344CB8AC3E}">
-        <p14:creationId xmlns:p14="http://schemas.microsoft.com/office/powerpoint/2010/main" val="2172146084"/>
+        <p14:creationId xmlns:p14="http://schemas.microsoft.com/office/powerpoint/2010/main" val="353873191"/>
       </p:ext>
     </p:extLst>
   </p:cSld>
@@ -7210,10 +7035,10 @@
       </p:grpSpPr>
       <p:sp>
         <p:nvSpPr>
-          <p:cNvPr id="5" name="TextBox 4">
-            <a:extLst>
-              <a:ext uri="{FF2B5EF4-FFF2-40B4-BE49-F238E27FC236}">
-                <a16:creationId xmlns:a16="http://schemas.microsoft.com/office/drawing/2014/main" id="{DBBAF8D1-CD3B-7497-7D18-18C4F2AA5E32}"/>
+          <p:cNvPr id="4" name="TextBox 3">
+            <a:extLst>
+              <a:ext uri="{FF2B5EF4-FFF2-40B4-BE49-F238E27FC236}">
+                <a16:creationId xmlns:a16="http://schemas.microsoft.com/office/drawing/2014/main" id="{DCF2F77B-F423-E120-88BA-D5FE919FE26F}"/>
               </a:ext>
             </a:extLst>
           </p:cNvPr>
@@ -7222,8 +7047,47 @@
         </p:nvSpPr>
         <p:spPr>
           <a:xfrm>
-            <a:off x="451625" y="628220"/>
-            <a:ext cx="6099716" cy="4708981"/>
+            <a:off x="702527" y="178420"/>
+            <a:ext cx="966418" cy="369332"/>
+          </a:xfrm>
+          <a:prstGeom prst="rect">
+            <a:avLst/>
+          </a:prstGeom>
+          <a:noFill/>
+        </p:spPr>
+        <p:txBody>
+          <a:bodyPr wrap="none" rtlCol="0">
+            <a:spAutoFit/>
+          </a:bodyPr>
+          <a:lstStyle/>
+          <a:p>
+            <a:r>
+              <a:rPr lang="en-GB" b="1" dirty="0"/>
+              <a:t>c</a:t>
+            </a:r>
+            <a:r>
+              <a:rPr lang="en-LK" b="1" dirty="0"/>
+              <a:t>hat.py</a:t>
+            </a:r>
+          </a:p>
+        </p:txBody>
+      </p:sp>
+      <p:sp>
+        <p:nvSpPr>
+          <p:cNvPr id="3" name="TextBox 2">
+            <a:extLst>
+              <a:ext uri="{FF2B5EF4-FFF2-40B4-BE49-F238E27FC236}">
+                <a16:creationId xmlns:a16="http://schemas.microsoft.com/office/drawing/2014/main" id="{FC0C20AB-295C-4CAB-80F8-24C18520EA08}"/>
+              </a:ext>
+            </a:extLst>
+          </p:cNvPr>
+          <p:cNvSpPr txBox="1"/>
+          <p:nvPr/>
+        </p:nvSpPr>
+        <p:spPr>
+          <a:xfrm>
+            <a:off x="702527" y="885170"/>
+            <a:ext cx="6096000" cy="4031873"/>
           </a:xfrm>
           <a:prstGeom prst="rect">
             <a:avLst/>
@@ -7237,22 +7101,473 @@
           <a:lstStyle/>
           <a:p>
             <a:r>
+              <a:rPr lang="en-LK" sz="800" dirty="0"/>
+              <a:t>import torch</a:t>
+            </a:r>
+          </a:p>
+          <a:p>
+            <a:r>
+              <a:rPr lang="en-LK" sz="800" dirty="0"/>
+              <a:t>import torch.nn.functional as F</a:t>
+            </a:r>
+          </a:p>
+          <a:p>
+            <a:endParaRPr lang="en-LK" sz="800" dirty="0"/>
+          </a:p>
+          <a:p>
+            <a:r>
+              <a:rPr lang="en-LK" sz="800" dirty="0"/>
+              <a:t>from config import GPTConfig</a:t>
+            </a:r>
+          </a:p>
+          <a:p>
+            <a:r>
+              <a:rPr lang="en-LK" sz="800" dirty="0"/>
+              <a:t>from model import GPT</a:t>
+            </a:r>
+          </a:p>
+          <a:p>
+            <a:r>
+              <a:rPr lang="en-LK" sz="800" dirty="0"/>
+              <a:t>from tokenizer import Tokenizer</a:t>
+            </a:r>
+          </a:p>
+          <a:p>
+            <a:endParaRPr lang="en-LK" sz="800" dirty="0"/>
+          </a:p>
+          <a:p>
+            <a:r>
+              <a:rPr lang="en-LK" sz="800" dirty="0"/>
+              <a:t>device = "cuda" if torch.cuda.is_available() else "cpu"</a:t>
+            </a:r>
+          </a:p>
+          <a:p>
+            <a:endParaRPr lang="en-LK" sz="800" dirty="0"/>
+          </a:p>
+          <a:p>
+            <a:r>
+              <a:rPr lang="en-LK" sz="800" dirty="0"/>
+              <a:t>tokenizer = Tokenizer()</a:t>
+            </a:r>
+          </a:p>
+          <a:p>
+            <a:endParaRPr lang="en-LK" sz="800" dirty="0"/>
+          </a:p>
+          <a:p>
+            <a:r>
+              <a:rPr lang="en-LK" sz="800" dirty="0"/>
+              <a:t>EOS_TOKEN = "&lt;|endoftext|&gt;"</a:t>
+            </a:r>
+          </a:p>
+          <a:p>
+            <a:r>
+              <a:rPr lang="en-LK" sz="800" dirty="0"/>
+              <a:t>EOS_ID = tokenizer.encode(EOS_TOKEN)[0]</a:t>
+            </a:r>
+          </a:p>
+          <a:p>
+            <a:endParaRPr lang="en-LK" sz="800" dirty="0"/>
+          </a:p>
+          <a:p>
+            <a:endParaRPr lang="en-LK" sz="800" dirty="0"/>
+          </a:p>
+          <a:p>
+            <a:r>
+              <a:rPr lang="en-LK" sz="800" dirty="0"/>
+              <a:t>def load_model(ckpt_path):</a:t>
+            </a:r>
+          </a:p>
+          <a:p>
+            <a:endParaRPr lang="en-LK" sz="800" dirty="0"/>
+          </a:p>
+          <a:p>
+            <a:r>
+              <a:rPr lang="en-LK" sz="800" dirty="0"/>
+              <a:t>    ckpt = torch.load(ckpt_path, map_location=device)</a:t>
+            </a:r>
+          </a:p>
+          <a:p>
+            <a:endParaRPr lang="en-LK" sz="800" dirty="0"/>
+          </a:p>
+          <a:p>
+            <a:r>
+              <a:rPr lang="en-LK" sz="800" dirty="0"/>
+              <a:t>    cfg = GPTConfig(**ckpt["config"])</a:t>
+            </a:r>
+          </a:p>
+          <a:p>
+            <a:endParaRPr lang="en-LK" sz="800" dirty="0"/>
+          </a:p>
+          <a:p>
+            <a:r>
+              <a:rPr lang="en-LK" sz="800" dirty="0"/>
+              <a:t>    model = GPT(cfg).to(device)</a:t>
+            </a:r>
+          </a:p>
+          <a:p>
+            <a:endParaRPr lang="en-LK" sz="800" dirty="0"/>
+          </a:p>
+          <a:p>
+            <a:r>
+              <a:rPr lang="en-LK" sz="800" dirty="0"/>
+              <a:t>    model.load_state_dict(ckpt["model"])</a:t>
+            </a:r>
+          </a:p>
+          <a:p>
+            <a:endParaRPr lang="en-LK" sz="800" dirty="0"/>
+          </a:p>
+          <a:p>
+            <a:r>
+              <a:rPr lang="en-LK" sz="800" dirty="0"/>
+              <a:t>    model.eval()</a:t>
+            </a:r>
+          </a:p>
+          <a:p>
+            <a:endParaRPr lang="en-LK" sz="800" dirty="0"/>
+          </a:p>
+          <a:p>
+            <a:r>
+              <a:rPr lang="en-LK" sz="800" dirty="0"/>
+              <a:t>    return model, cfg</a:t>
+            </a:r>
+          </a:p>
+          <a:p>
+            <a:endParaRPr lang="en-LK" sz="800" dirty="0"/>
+          </a:p>
+          <a:p>
+            <a:endParaRPr lang="en-LK" sz="800" dirty="0"/>
+          </a:p>
+          <a:p>
+            <a:endParaRPr lang="en-LK" sz="800" dirty="0"/>
+          </a:p>
+          <a:p>
+            <a:endParaRPr lang="en-LK" sz="800" dirty="0"/>
+          </a:p>
+        </p:txBody>
+      </p:sp>
+      <p:sp>
+        <p:nvSpPr>
+          <p:cNvPr id="7" name="TextBox 6">
+            <a:extLst>
+              <a:ext uri="{FF2B5EF4-FFF2-40B4-BE49-F238E27FC236}">
+                <a16:creationId xmlns:a16="http://schemas.microsoft.com/office/drawing/2014/main" id="{45B2BCF9-8C56-906A-B809-CCA6F1DC8B51}"/>
+              </a:ext>
+            </a:extLst>
+          </p:cNvPr>
+          <p:cNvSpPr txBox="1"/>
+          <p:nvPr/>
+        </p:nvSpPr>
+        <p:spPr>
+          <a:xfrm>
+            <a:off x="5091289" y="74235"/>
+            <a:ext cx="6096000" cy="6709529"/>
+          </a:xfrm>
+          <a:prstGeom prst="rect">
+            <a:avLst/>
+          </a:prstGeom>
+          <a:noFill/>
+        </p:spPr>
+        <p:txBody>
+          <a:bodyPr wrap="square">
+            <a:spAutoFit/>
+          </a:bodyPr>
+          <a:lstStyle/>
+          <a:p>
+            <a:r>
+              <a:rPr lang="en-LK" sz="1000" dirty="0"/>
+              <a:t>@torch.no_grad()</a:t>
+            </a:r>
+          </a:p>
+          <a:p>
+            <a:r>
+              <a:rPr lang="en-LK" sz="1000" dirty="0"/>
+              <a:t>def generate(</a:t>
+            </a:r>
+          </a:p>
+          <a:p>
+            <a:r>
+              <a:rPr lang="en-LK" sz="1000" dirty="0"/>
+              <a:t>    model,</a:t>
+            </a:r>
+          </a:p>
+          <a:p>
+            <a:r>
+              <a:rPr lang="en-LK" sz="1000" dirty="0"/>
+              <a:t>    idx,</a:t>
+            </a:r>
+          </a:p>
+          <a:p>
+            <a:r>
+              <a:rPr lang="en-LK" sz="1000" dirty="0"/>
+              <a:t>    cfg,</a:t>
+            </a:r>
+          </a:p>
+          <a:p>
+            <a:r>
+              <a:rPr lang="en-LK" sz="1000" dirty="0"/>
+              <a:t>    max_new_tokens=100,</a:t>
+            </a:r>
+          </a:p>
+          <a:p>
+            <a:r>
+              <a:rPr lang="en-LK" sz="1000" dirty="0"/>
+              <a:t>    temperature=0.8,</a:t>
+            </a:r>
+          </a:p>
+          <a:p>
+            <a:r>
+              <a:rPr lang="en-LK" sz="1000" dirty="0"/>
+              <a:t>    top_k=50</a:t>
+            </a:r>
+          </a:p>
+          <a:p>
+            <a:r>
+              <a:rPr lang="en-LK" sz="1000" dirty="0"/>
+              <a:t>):</a:t>
+            </a:r>
+          </a:p>
+          <a:p>
+            <a:endParaRPr lang="en-LK" sz="1000" dirty="0"/>
+          </a:p>
+          <a:p>
+            <a:r>
+              <a:rPr lang="en-LK" sz="1000" dirty="0"/>
+              <a:t>    for _ in range(max_new_tokens):</a:t>
+            </a:r>
+          </a:p>
+          <a:p>
+            <a:endParaRPr lang="en-LK" sz="1000" dirty="0"/>
+          </a:p>
+          <a:p>
+            <a:r>
+              <a:rPr lang="en-LK" sz="1000" dirty="0"/>
+              <a:t>        idx_cond = idx[:, -cfg.seq_len:]</a:t>
+            </a:r>
+          </a:p>
+          <a:p>
+            <a:endParaRPr lang="en-LK" sz="1000" dirty="0"/>
+          </a:p>
+          <a:p>
+            <a:r>
+              <a:rPr lang="en-LK" sz="1000" dirty="0"/>
+              <a:t>        logits = model(idx_cond)</a:t>
+            </a:r>
+          </a:p>
+          <a:p>
+            <a:endParaRPr lang="en-LK" sz="1000" dirty="0"/>
+          </a:p>
+          <a:p>
+            <a:r>
+              <a:rPr lang="en-LK" sz="1000" dirty="0"/>
+              <a:t>        logits = logits[:, -1, :]</a:t>
+            </a:r>
+          </a:p>
+          <a:p>
+            <a:endParaRPr lang="en-LK" sz="1000" dirty="0"/>
+          </a:p>
+          <a:p>
+            <a:r>
+              <a:rPr lang="en-LK" sz="1000" dirty="0"/>
+              <a:t>        logits = logits / temperature</a:t>
+            </a:r>
+          </a:p>
+          <a:p>
+            <a:endParaRPr lang="en-LK" sz="1000" dirty="0"/>
+          </a:p>
+          <a:p>
+            <a:r>
+              <a:rPr lang="en-LK" sz="1000" dirty="0"/>
+              <a:t>        if top_k is not None:</a:t>
+            </a:r>
+          </a:p>
+          <a:p>
+            <a:endParaRPr lang="en-LK" sz="1000" dirty="0"/>
+          </a:p>
+          <a:p>
+            <a:r>
+              <a:rPr lang="en-LK" sz="1000" dirty="0"/>
+              <a:t>            v, _ = torch.topk(logits, top_k)</a:t>
+            </a:r>
+          </a:p>
+          <a:p>
+            <a:endParaRPr lang="en-LK" sz="1000" dirty="0"/>
+          </a:p>
+          <a:p>
+            <a:r>
+              <a:rPr lang="en-LK" sz="1000" dirty="0"/>
+              <a:t>            cutoff = v[:, -1].unsqueeze(-1)</a:t>
+            </a:r>
+          </a:p>
+          <a:p>
+            <a:endParaRPr lang="en-LK" sz="1000" dirty="0"/>
+          </a:p>
+          <a:p>
+            <a:r>
+              <a:rPr lang="en-LK" sz="1000" dirty="0"/>
+              <a:t>            logits = torch.where(</a:t>
+            </a:r>
+          </a:p>
+          <a:p>
+            <a:r>
+              <a:rPr lang="en-LK" sz="1000" dirty="0"/>
+              <a:t>                logits &lt; cutoff,</a:t>
+            </a:r>
+          </a:p>
+          <a:p>
+            <a:r>
+              <a:rPr lang="en-LK" sz="1000" dirty="0"/>
+              <a:t>                torch.full_like(logits, -float("inf")),</a:t>
+            </a:r>
+          </a:p>
+          <a:p>
+            <a:r>
+              <a:rPr lang="en-LK" sz="1000" dirty="0"/>
+              <a:t>                logits</a:t>
+            </a:r>
+          </a:p>
+          <a:p>
+            <a:r>
+              <a:rPr lang="en-LK" sz="1000" dirty="0"/>
+              <a:t>            )</a:t>
+            </a:r>
+          </a:p>
+          <a:p>
+            <a:endParaRPr lang="en-LK" sz="1000" dirty="0"/>
+          </a:p>
+          <a:p>
+            <a:r>
+              <a:rPr lang="en-LK" sz="1000" dirty="0"/>
+              <a:t>        probs = F.softmax(logits, dim=-1)</a:t>
+            </a:r>
+          </a:p>
+          <a:p>
+            <a:endParaRPr lang="en-LK" sz="1000" dirty="0"/>
+          </a:p>
+          <a:p>
+            <a:r>
+              <a:rPr lang="en-LK" sz="1000" dirty="0"/>
+              <a:t>        next_token = torch.multinomial(probs, num_samples=1)</a:t>
+            </a:r>
+          </a:p>
+          <a:p>
+            <a:endParaRPr lang="en-LK" sz="1000" dirty="0"/>
+          </a:p>
+          <a:p>
+            <a:r>
+              <a:rPr lang="en-LK" sz="1000" dirty="0"/>
+              <a:t>        idx = torch.cat((idx, next_token), dim=1)</a:t>
+            </a:r>
+          </a:p>
+          <a:p>
+            <a:endParaRPr lang="en-LK" sz="1000" dirty="0"/>
+          </a:p>
+          <a:p>
+            <a:r>
+              <a:rPr lang="en-LK" sz="1000" dirty="0"/>
+              <a:t>        # STOP GENERATION WHEN EOS TOKEN IS GENERATED</a:t>
+            </a:r>
+          </a:p>
+          <a:p>
+            <a:r>
+              <a:rPr lang="en-LK" sz="1000" dirty="0"/>
+              <a:t>        if next_token.item() == EOS_ID:</a:t>
+            </a:r>
+          </a:p>
+          <a:p>
+            <a:r>
+              <a:rPr lang="en-LK" sz="1000" dirty="0"/>
+              <a:t>            break</a:t>
+            </a:r>
+          </a:p>
+          <a:p>
+            <a:endParaRPr lang="en-LK" sz="1000" dirty="0"/>
+          </a:p>
+          <a:p>
+            <a:r>
+              <a:rPr lang="en-LK" sz="1000" dirty="0"/>
+              <a:t>    return idx</a:t>
+            </a:r>
+          </a:p>
+        </p:txBody>
+      </p:sp>
+    </p:spTree>
+    <p:extLst>
+      <p:ext uri="{BB962C8B-B14F-4D97-AF65-F5344CB8AC3E}">
+        <p14:creationId xmlns:p14="http://schemas.microsoft.com/office/powerpoint/2010/main" val="2172146084"/>
+      </p:ext>
+    </p:extLst>
+  </p:cSld>
+  <p:clrMapOvr>
+    <a:masterClrMapping/>
+  </p:clrMapOvr>
+</p:sld>
+</file>
+
+<file path=ppt/slides/slide9.xml><?xml version="1.0" encoding="utf-8"?>
+<p:sld xmlns:a="http://schemas.openxmlformats.org/drawingml/2006/main" xmlns:r="http://schemas.openxmlformats.org/officeDocument/2006/relationships" xmlns:p="http://schemas.openxmlformats.org/presentationml/2006/main">
+  <p:cSld>
+    <p:spTree>
+      <p:nvGrpSpPr>
+        <p:cNvPr id="1" name=""/>
+        <p:cNvGrpSpPr/>
+        <p:nvPr/>
+      </p:nvGrpSpPr>
+      <p:grpSpPr>
+        <a:xfrm>
+          <a:off x="0" y="0"/>
+          <a:ext cx="0" cy="0"/>
+          <a:chOff x="0" y="0"/>
+          <a:chExt cx="0" cy="0"/>
+        </a:xfrm>
+      </p:grpSpPr>
+      <p:sp>
+        <p:nvSpPr>
+          <p:cNvPr id="3" name="TextBox 2">
+            <a:extLst>
+              <a:ext uri="{FF2B5EF4-FFF2-40B4-BE49-F238E27FC236}">
+                <a16:creationId xmlns:a16="http://schemas.microsoft.com/office/drawing/2014/main" id="{A9858D6A-2C84-ACCA-925D-C71BFAC40785}"/>
+              </a:ext>
+            </a:extLst>
+          </p:cNvPr>
+          <p:cNvSpPr txBox="1"/>
+          <p:nvPr/>
+        </p:nvSpPr>
+        <p:spPr>
+          <a:xfrm>
+            <a:off x="857956" y="0"/>
+            <a:ext cx="6096000" cy="6863417"/>
+          </a:xfrm>
+          <a:prstGeom prst="rect">
+            <a:avLst/>
+          </a:prstGeom>
+          <a:noFill/>
+        </p:spPr>
+        <p:txBody>
+          <a:bodyPr wrap="square">
+            <a:spAutoFit/>
+          </a:bodyPr>
+          <a:lstStyle/>
+          <a:p>
+            <a:r>
               <a:rPr lang="en-LK" sz="1000" dirty="0"/>
               <a:t>def chat():</a:t>
             </a:r>
           </a:p>
           <a:p>
-            <a:r>
-              <a:rPr lang="en-LK" sz="1000" dirty="0"/>
-              <a:t>    model, cfg = load_model("checkpoints/sft_step_600.pt")</a:t>
-            </a:r>
-          </a:p>
-          <a:p>
             <a:endParaRPr lang="en-LK" sz="1000" dirty="0"/>
           </a:p>
           <a:p>
             <a:r>
               <a:rPr lang="en-LK" sz="1000" dirty="0"/>
+              <a:t>    model, cfg = load_model("checkpoints/sft_step_800.pt")</a:t>
+            </a:r>
+          </a:p>
+          <a:p>
+            <a:endParaRPr lang="en-LK" sz="1000" dirty="0"/>
+          </a:p>
+          <a:p>
+            <a:r>
+              <a:rPr lang="en-LK" sz="1000" dirty="0"/>
               <a:t>    print("Chatbot ready! Type 'exit' to stop.\n")</a:t>
             </a:r>
           </a:p>
@@ -7266,6 +7581,9 @@
             </a:r>
           </a:p>
           <a:p>
+            <a:endParaRPr lang="en-LK" sz="1000" dirty="0"/>
+          </a:p>
+          <a:p>
             <a:r>
               <a:rPr lang="en-LK" sz="1000" dirty="0"/>
               <a:t>        user_input = input("Ask anything: ")</a:t>
@@ -7292,6 +7610,12 @@
           <a:p>
             <a:r>
               <a:rPr lang="en-LK" sz="1000" dirty="0"/>
+              <a:t>        # CHAT FORMAT</a:t>
+            </a:r>
+          </a:p>
+          <a:p>
+            <a:r>
+              <a:rPr lang="en-LK" sz="1000" dirty="0"/>
               <a:t>        prompt = f"User: {user_input}\nAssistant:"</a:t>
             </a:r>
           </a:p>
@@ -7334,7 +7658,49 @@
           <a:p>
             <a:r>
               <a:rPr lang="en-LK" sz="1000" dirty="0"/>
-              <a:t>        out = generate(model, idx, cfg, max_new_tokens=100, temperature=0.8)</a:t>
+              <a:t>        out = generate(</a:t>
+            </a:r>
+          </a:p>
+          <a:p>
+            <a:r>
+              <a:rPr lang="en-LK" sz="1000" dirty="0"/>
+              <a:t>            model,</a:t>
+            </a:r>
+          </a:p>
+          <a:p>
+            <a:r>
+              <a:rPr lang="en-LK" sz="1000" dirty="0"/>
+              <a:t>            idx,</a:t>
+            </a:r>
+          </a:p>
+          <a:p>
+            <a:r>
+              <a:rPr lang="en-LK" sz="1000" dirty="0"/>
+              <a:t>            cfg,</a:t>
+            </a:r>
+          </a:p>
+          <a:p>
+            <a:r>
+              <a:rPr lang="en-LK" sz="1000" dirty="0"/>
+              <a:t>            max_new_tokens=100,</a:t>
+            </a:r>
+          </a:p>
+          <a:p>
+            <a:r>
+              <a:rPr lang="en-LK" sz="1000" dirty="0"/>
+              <a:t>            temperature=0.8,</a:t>
+            </a:r>
+          </a:p>
+          <a:p>
+            <a:r>
+              <a:rPr lang="en-LK" sz="1000" dirty="0"/>
+              <a:t>            top_k=50</a:t>
+            </a:r>
+          </a:p>
+          <a:p>
+            <a:r>
+              <a:rPr lang="en-LK" sz="1000" dirty="0"/>
+              <a:t>        )</a:t>
             </a:r>
           </a:p>
           <a:p>
@@ -7343,7 +7709,7 @@
           <a:p>
             <a:r>
               <a:rPr lang="en-LK" sz="1000" dirty="0"/>
-              <a:t>        text = tokenizer.decode(out[0].tolist())</a:t>
+              <a:t>        generated_text = tokenizer.decode(out[0].tolist())</a:t>
             </a:r>
           </a:p>
           <a:p>
@@ -7352,7 +7718,13 @@
           <a:p>
             <a:r>
               <a:rPr lang="en-LK" sz="1000" dirty="0"/>
-              <a:t>        response = text.split("Assistant:")[-1].strip()</a:t>
+              <a:t>        # REMOVE PROMPT</a:t>
+            </a:r>
+          </a:p>
+          <a:p>
+            <a:r>
+              <a:rPr lang="en-LK" sz="1000" dirty="0"/>
+              <a:t>        response = generated_text[len(prompt):]</a:t>
             </a:r>
           </a:p>
           <a:p>
@@ -7361,7 +7733,22 @@
           <a:p>
             <a:r>
               <a:rPr lang="en-LK" sz="1000" dirty="0"/>
-              <a:t>        print(f"Bot: {response}\n")</a:t>
+              <a:t>        # REMOVE EOS TOKEN</a:t>
+            </a:r>
+          </a:p>
+          <a:p>
+            <a:r>
+              <a:rPr lang="en-LK" sz="1000" dirty="0"/>
+              <a:t>        response = response.replace(EOS_TOKEN, "").strip()</a:t>
+            </a:r>
+          </a:p>
+          <a:p>
+            <a:endParaRPr lang="en-LK" sz="1000" dirty="0"/>
+          </a:p>
+          <a:p>
+            <a:r>
+              <a:rPr lang="en-LK" sz="1000" dirty="0"/>
+              <a:t>        print(f"\nBot: {response}\n")</a:t>
             </a:r>
           </a:p>
           <a:p>
